--- a/SFN/2023_SFN_trust_current.pptx
+++ b/SFN/2023_SFN_trust_current.pptx
@@ -4435,837 +4435,6 @@
       </p:grpSpPr>
       <p:grpSp>
         <p:nvGrpSpPr>
-          <p:cNvPr id="15621" name="Group 15620">
-            <a:extLst>
-              <a:ext uri="{FF2B5EF4-FFF2-40B4-BE49-F238E27FC236}">
-                <a16:creationId xmlns:a16="http://schemas.microsoft.com/office/drawing/2014/main" id="{5C45E275-5A15-8C98-B9C5-16C75C23860A}"/>
-              </a:ext>
-            </a:extLst>
-          </p:cNvPr>
-          <p:cNvGrpSpPr/>
-          <p:nvPr/>
-        </p:nvGrpSpPr>
-        <p:grpSpPr>
-          <a:xfrm>
-            <a:off x="3779671" y="16218296"/>
-            <a:ext cx="10697765" cy="10056750"/>
-            <a:chOff x="3779671" y="16218296"/>
-            <a:chExt cx="10697765" cy="10056750"/>
-          </a:xfrm>
-        </p:grpSpPr>
-        <p:grpSp>
-          <p:nvGrpSpPr>
-            <p:cNvPr id="15606" name="Group 15605">
-              <a:extLst>
-                <a:ext uri="{FF2B5EF4-FFF2-40B4-BE49-F238E27FC236}">
-                  <a16:creationId xmlns:a16="http://schemas.microsoft.com/office/drawing/2014/main" id="{B0CC5957-EC01-CDC2-ADAF-5A0141831C57}"/>
-                </a:ext>
-              </a:extLst>
-            </p:cNvPr>
-            <p:cNvGrpSpPr/>
-            <p:nvPr/>
-          </p:nvGrpSpPr>
-          <p:grpSpPr>
-            <a:xfrm>
-              <a:off x="3779671" y="16218296"/>
-              <a:ext cx="10697765" cy="10056750"/>
-              <a:chOff x="18887859" y="360968"/>
-              <a:chExt cx="6543891" cy="6151778"/>
-            </a:xfrm>
-          </p:grpSpPr>
-          <p:pic>
-            <p:nvPicPr>
-              <p:cNvPr id="15607" name="Picture 15606" descr="A green check mark on a grey background&#10;&#10;Description automatically generated">
-                <a:extLst>
-                  <a:ext uri="{FF2B5EF4-FFF2-40B4-BE49-F238E27FC236}">
-                    <a16:creationId xmlns:a16="http://schemas.microsoft.com/office/drawing/2014/main" id="{BFD42068-273C-19B5-B61E-D2752FACB16C}"/>
-                  </a:ext>
-                </a:extLst>
-              </p:cNvPr>
-              <p:cNvPicPr>
-                <a:picLocks noChangeAspect="1"/>
-              </p:cNvPicPr>
-              <p:nvPr/>
-            </p:nvPicPr>
-            <p:blipFill rotWithShape="1">
-              <a:blip r:embed="rId4"/>
-              <a:srcRect l="14791" t="15087" r="12450" b="22936"/>
-              <a:stretch/>
-            </p:blipFill>
-            <p:spPr>
-              <a:xfrm>
-                <a:off x="19244972" y="4622666"/>
-                <a:ext cx="2991981" cy="1890080"/>
-              </a:xfrm>
-              <a:prstGeom prst="rect">
-                <a:avLst/>
-              </a:prstGeom>
-              <a:solidFill>
-                <a:srgbClr val="FFFFFF">
-                  <a:shade val="85000"/>
-                </a:srgbClr>
-              </a:solidFill>
-              <a:ln w="88900" cap="sq">
-                <a:solidFill>
-                  <a:srgbClr val="C00000"/>
-                </a:solidFill>
-                <a:miter lim="800000"/>
-              </a:ln>
-              <a:effectLst>
-                <a:outerShdw blurRad="55000" dist="18000" dir="5400000" algn="tl" rotWithShape="0">
-                  <a:srgbClr val="000000">
-                    <a:alpha val="40000"/>
-                  </a:srgbClr>
-                </a:outerShdw>
-              </a:effectLst>
-              <a:scene3d>
-                <a:camera prst="orthographicFront"/>
-                <a:lightRig rig="twoPt" dir="t">
-                  <a:rot lat="0" lon="0" rev="7200000"/>
-                </a:lightRig>
-              </a:scene3d>
-              <a:sp3d>
-                <a:bevelT w="25400" h="19050"/>
-                <a:contourClr>
-                  <a:srgbClr val="FFFFFF"/>
-                </a:contourClr>
-              </a:sp3d>
-            </p:spPr>
-          </p:pic>
-          <p:pic>
-            <p:nvPicPr>
-              <p:cNvPr id="15608" name="Picture 15607" descr="A computer screen shot&#10;&#10;Description automatically generated">
-                <a:extLst>
-                  <a:ext uri="{FF2B5EF4-FFF2-40B4-BE49-F238E27FC236}">
-                    <a16:creationId xmlns:a16="http://schemas.microsoft.com/office/drawing/2014/main" id="{7AF89E18-68CC-9284-01FB-59B8ECC6A7F3}"/>
-                  </a:ext>
-                </a:extLst>
-              </p:cNvPr>
-              <p:cNvPicPr>
-                <a:picLocks noChangeAspect="1"/>
-              </p:cNvPicPr>
-              <p:nvPr/>
-            </p:nvPicPr>
-            <p:blipFill rotWithShape="1">
-              <a:blip r:embed="rId5"/>
-              <a:srcRect l="17658" t="18357" r="18046" b="25816"/>
-              <a:stretch/>
-            </p:blipFill>
-            <p:spPr>
-              <a:xfrm>
-                <a:off x="22543408" y="4676154"/>
-                <a:ext cx="2888342" cy="1819031"/>
-              </a:xfrm>
-              <a:prstGeom prst="rect">
-                <a:avLst/>
-              </a:prstGeom>
-              <a:solidFill>
-                <a:srgbClr val="FFFFFF">
-                  <a:shade val="85000"/>
-                </a:srgbClr>
-              </a:solidFill>
-              <a:ln w="88900" cap="sq">
-                <a:solidFill>
-                  <a:srgbClr val="C00000"/>
-                </a:solidFill>
-                <a:miter lim="800000"/>
-              </a:ln>
-              <a:effectLst>
-                <a:outerShdw blurRad="55000" dist="18000" dir="5400000" algn="tl" rotWithShape="0">
-                  <a:srgbClr val="000000">
-                    <a:alpha val="40000"/>
-                  </a:srgbClr>
-                </a:outerShdw>
-              </a:effectLst>
-              <a:scene3d>
-                <a:camera prst="orthographicFront"/>
-                <a:lightRig rig="twoPt" dir="t">
-                  <a:rot lat="0" lon="0" rev="7200000"/>
-                </a:lightRig>
-              </a:scene3d>
-              <a:sp3d>
-                <a:bevelT w="25400" h="19050"/>
-                <a:contourClr>
-                  <a:srgbClr val="FFFFFF"/>
-                </a:contourClr>
-              </a:sp3d>
-            </p:spPr>
-          </p:pic>
-          <p:pic>
-            <p:nvPicPr>
-              <p:cNvPr id="15609" name="Picture 15608" descr="A white cross on a gray background&#10;&#10;Description automatically generated">
-                <a:extLst>
-                  <a:ext uri="{FF2B5EF4-FFF2-40B4-BE49-F238E27FC236}">
-                    <a16:creationId xmlns:a16="http://schemas.microsoft.com/office/drawing/2014/main" id="{A316990F-59C7-631E-47E9-456D55904891}"/>
-                  </a:ext>
-                </a:extLst>
-              </p:cNvPr>
-              <p:cNvPicPr>
-                <a:picLocks noChangeAspect="1"/>
-              </p:cNvPicPr>
-              <p:nvPr/>
-            </p:nvPicPr>
-            <p:blipFill rotWithShape="1">
-              <a:blip r:embed="rId6"/>
-              <a:srcRect l="2620" t="7420" r="2620" b="4981"/>
-              <a:stretch/>
-            </p:blipFill>
-            <p:spPr>
-              <a:xfrm>
-                <a:off x="20965957" y="2971697"/>
-                <a:ext cx="2848448" cy="1890080"/>
-              </a:xfrm>
-              <a:prstGeom prst="rect">
-                <a:avLst/>
-              </a:prstGeom>
-              <a:solidFill>
-                <a:srgbClr val="FFFFFF">
-                  <a:shade val="85000"/>
-                </a:srgbClr>
-              </a:solidFill>
-              <a:ln w="88900" cap="sq">
-                <a:solidFill>
-                  <a:srgbClr val="C00000"/>
-                </a:solidFill>
-                <a:miter lim="800000"/>
-              </a:ln>
-              <a:effectLst>
-                <a:outerShdw blurRad="55000" dist="18000" dir="5400000" algn="tl" rotWithShape="0">
-                  <a:srgbClr val="000000">
-                    <a:alpha val="40000"/>
-                  </a:srgbClr>
-                </a:outerShdw>
-              </a:effectLst>
-              <a:scene3d>
-                <a:camera prst="orthographicFront"/>
-                <a:lightRig rig="twoPt" dir="t">
-                  <a:rot lat="0" lon="0" rev="7200000"/>
-                </a:lightRig>
-              </a:scene3d>
-              <a:sp3d>
-                <a:bevelT w="25400" h="19050"/>
-                <a:contourClr>
-                  <a:srgbClr val="FFFFFF"/>
-                </a:contourClr>
-              </a:sp3d>
-            </p:spPr>
-          </p:pic>
-          <p:pic>
-            <p:nvPicPr>
-              <p:cNvPr id="15610" name="Picture 15609" descr="A grey background with white text&#10;&#10;Description automatically generated">
-                <a:extLst>
-                  <a:ext uri="{FF2B5EF4-FFF2-40B4-BE49-F238E27FC236}">
-                    <a16:creationId xmlns:a16="http://schemas.microsoft.com/office/drawing/2014/main" id="{E95A9EFF-122D-C651-FDF5-564B82E90BBA}"/>
-                  </a:ext>
-                </a:extLst>
-              </p:cNvPr>
-              <p:cNvPicPr>
-                <a:picLocks noChangeAspect="1"/>
-              </p:cNvPicPr>
-              <p:nvPr/>
-            </p:nvPicPr>
-            <p:blipFill>
-              <a:blip r:embed="rId7"/>
-              <a:stretch>
-                <a:fillRect/>
-              </a:stretch>
-            </p:blipFill>
-            <p:spPr>
-              <a:xfrm>
-                <a:off x="19926908" y="1639461"/>
-                <a:ext cx="2848448" cy="1943823"/>
-              </a:xfrm>
-              <a:prstGeom prst="rect">
-                <a:avLst/>
-              </a:prstGeom>
-              <a:solidFill>
-                <a:srgbClr val="FFFFFF">
-                  <a:shade val="85000"/>
-                </a:srgbClr>
-              </a:solidFill>
-              <a:ln w="88900" cap="sq">
-                <a:solidFill>
-                  <a:srgbClr val="C00000"/>
-                </a:solidFill>
-                <a:miter lim="800000"/>
-              </a:ln>
-              <a:effectLst>
-                <a:outerShdw blurRad="55000" dist="18000" dir="5400000" algn="tl" rotWithShape="0">
-                  <a:srgbClr val="000000">
-                    <a:alpha val="40000"/>
-                  </a:srgbClr>
-                </a:outerShdw>
-              </a:effectLst>
-              <a:scene3d>
-                <a:camera prst="orthographicFront"/>
-                <a:lightRig rig="twoPt" dir="t">
-                  <a:rot lat="0" lon="0" rev="7200000"/>
-                </a:lightRig>
-              </a:scene3d>
-              <a:sp3d>
-                <a:bevelT w="25400" h="19050"/>
-                <a:contourClr>
-                  <a:srgbClr val="FFFFFF"/>
-                </a:contourClr>
-              </a:sp3d>
-            </p:spPr>
-          </p:pic>
-          <p:pic>
-            <p:nvPicPr>
-              <p:cNvPr id="15611" name="Picture 15610" descr="A computer and a keyboard&#10;&#10;Description automatically generated with medium confidence">
-                <a:extLst>
-                  <a:ext uri="{FF2B5EF4-FFF2-40B4-BE49-F238E27FC236}">
-                    <a16:creationId xmlns:a16="http://schemas.microsoft.com/office/drawing/2014/main" id="{BD10086D-C152-9AEB-CD34-13177C8F6D4A}"/>
-                  </a:ext>
-                </a:extLst>
-              </p:cNvPr>
-              <p:cNvPicPr>
-                <a:picLocks noChangeAspect="1"/>
-              </p:cNvPicPr>
-              <p:nvPr/>
-            </p:nvPicPr>
-            <p:blipFill rotWithShape="1">
-              <a:blip r:embed="rId8"/>
-              <a:srcRect l="2378" t="5420" r="2378" b="9853"/>
-              <a:stretch/>
-            </p:blipFill>
-            <p:spPr>
-              <a:xfrm>
-                <a:off x="18887859" y="360968"/>
-                <a:ext cx="2848448" cy="1919430"/>
-              </a:xfrm>
-              <a:prstGeom prst="rect">
-                <a:avLst/>
-              </a:prstGeom>
-              <a:solidFill>
-                <a:srgbClr val="FFFFFF">
-                  <a:shade val="85000"/>
-                </a:srgbClr>
-              </a:solidFill>
-              <a:ln w="88900" cap="sq">
-                <a:solidFill>
-                  <a:srgbClr val="C00000"/>
-                </a:solidFill>
-                <a:miter lim="800000"/>
-              </a:ln>
-              <a:effectLst>
-                <a:outerShdw blurRad="55000" dist="18000" dir="5400000" algn="tl" rotWithShape="0">
-                  <a:srgbClr val="000000">
-                    <a:alpha val="40000"/>
-                  </a:srgbClr>
-                </a:outerShdw>
-              </a:effectLst>
-              <a:scene3d>
-                <a:camera prst="orthographicFront"/>
-                <a:lightRig rig="twoPt" dir="t">
-                  <a:rot lat="0" lon="0" rev="7200000"/>
-                </a:lightRig>
-              </a:scene3d>
-              <a:sp3d>
-                <a:bevelT w="25400" h="19050"/>
-                <a:contourClr>
-                  <a:srgbClr val="FFFFFF"/>
-                </a:contourClr>
-              </a:sp3d>
-            </p:spPr>
-          </p:pic>
-          <p:grpSp>
-            <p:nvGrpSpPr>
-              <p:cNvPr id="15612" name="Group 15611">
-                <a:extLst>
-                  <a:ext uri="{FF2B5EF4-FFF2-40B4-BE49-F238E27FC236}">
-                    <a16:creationId xmlns:a16="http://schemas.microsoft.com/office/drawing/2014/main" id="{60B2107B-4199-FD0C-4076-CA2B2F109B20}"/>
-                  </a:ext>
-                </a:extLst>
-              </p:cNvPr>
-              <p:cNvGrpSpPr/>
-              <p:nvPr/>
-            </p:nvGrpSpPr>
-            <p:grpSpPr>
-              <a:xfrm>
-                <a:off x="22071524" y="360968"/>
-                <a:ext cx="3360226" cy="995434"/>
-                <a:chOff x="3514264" y="206684"/>
-                <a:chExt cx="3360226" cy="995434"/>
-              </a:xfrm>
-            </p:grpSpPr>
-            <p:pic>
-              <p:nvPicPr>
-                <p:cNvPr id="15613" name="Picture 15612">
-                  <a:extLst>
-                    <a:ext uri="{FF2B5EF4-FFF2-40B4-BE49-F238E27FC236}">
-                      <a16:creationId xmlns:a16="http://schemas.microsoft.com/office/drawing/2014/main" id="{8F1F804F-2F4C-1C69-0ED4-456A517A34F3}"/>
-                    </a:ext>
-                  </a:extLst>
-                </p:cNvPr>
-                <p:cNvPicPr>
-                  <a:picLocks noChangeAspect="1"/>
-                </p:cNvPicPr>
-                <p:nvPr/>
-              </p:nvPicPr>
-              <p:blipFill>
-                <a:blip r:embed="rId9"/>
-                <a:stretch>
-                  <a:fillRect/>
-                </a:stretch>
-              </p:blipFill>
-              <p:spPr>
-                <a:xfrm>
-                  <a:off x="3514264" y="206684"/>
-                  <a:ext cx="1027916" cy="990673"/>
-                </a:xfrm>
-                <a:prstGeom prst="rect">
-                  <a:avLst/>
-                </a:prstGeom>
-                <a:solidFill>
-                  <a:srgbClr val="FFFFFF">
-                    <a:shade val="85000"/>
-                  </a:srgbClr>
-                </a:solidFill>
-                <a:ln w="88900" cap="sq">
-                  <a:solidFill>
-                    <a:srgbClr val="C00000"/>
-                  </a:solidFill>
-                  <a:miter lim="800000"/>
-                </a:ln>
-                <a:effectLst>
-                  <a:outerShdw blurRad="55000" dist="18000" dir="5400000" algn="tl" rotWithShape="0">
-                    <a:srgbClr val="000000">
-                      <a:alpha val="40000"/>
-                    </a:srgbClr>
-                  </a:outerShdw>
-                </a:effectLst>
-                <a:scene3d>
-                  <a:camera prst="orthographicFront"/>
-                  <a:lightRig rig="twoPt" dir="t">
-                    <a:rot lat="0" lon="0" rev="7200000"/>
-                  </a:lightRig>
-                </a:scene3d>
-                <a:sp3d>
-                  <a:bevelT w="25400" h="19050"/>
-                  <a:contourClr>
-                    <a:srgbClr val="FFFFFF"/>
-                  </a:contourClr>
-                </a:sp3d>
-              </p:spPr>
-            </p:pic>
-            <p:pic>
-              <p:nvPicPr>
-                <p:cNvPr id="15614" name="Picture 15613" descr="A grey square with a person's head&#10;&#10;Description automatically generated">
-                  <a:extLst>
-                    <a:ext uri="{FF2B5EF4-FFF2-40B4-BE49-F238E27FC236}">
-                      <a16:creationId xmlns:a16="http://schemas.microsoft.com/office/drawing/2014/main" id="{2172C1AD-5BEC-2CFE-FCB3-472B60E2C225}"/>
-                    </a:ext>
-                  </a:extLst>
-                </p:cNvPr>
-                <p:cNvPicPr>
-                  <a:picLocks noChangeAspect="1"/>
-                </p:cNvPicPr>
-                <p:nvPr/>
-              </p:nvPicPr>
-              <p:blipFill>
-                <a:blip r:embed="rId10"/>
-                <a:stretch>
-                  <a:fillRect/>
-                </a:stretch>
-              </p:blipFill>
-              <p:spPr>
-                <a:xfrm>
-                  <a:off x="4717835" y="206684"/>
-                  <a:ext cx="982991" cy="995434"/>
-                </a:xfrm>
-                <a:prstGeom prst="rect">
-                  <a:avLst/>
-                </a:prstGeom>
-                <a:solidFill>
-                  <a:srgbClr val="FFFFFF">
-                    <a:shade val="85000"/>
-                  </a:srgbClr>
-                </a:solidFill>
-                <a:ln w="88900" cap="sq">
-                  <a:solidFill>
-                    <a:srgbClr val="C00000"/>
-                  </a:solidFill>
-                  <a:miter lim="800000"/>
-                </a:ln>
-                <a:effectLst>
-                  <a:outerShdw blurRad="55000" dist="18000" dir="5400000" algn="tl" rotWithShape="0">
-                    <a:srgbClr val="000000">
-                      <a:alpha val="40000"/>
-                    </a:srgbClr>
-                  </a:outerShdw>
-                </a:effectLst>
-                <a:scene3d>
-                  <a:camera prst="orthographicFront"/>
-                  <a:lightRig rig="twoPt" dir="t">
-                    <a:rot lat="0" lon="0" rev="7200000"/>
-                  </a:lightRig>
-                </a:scene3d>
-                <a:sp3d>
-                  <a:bevelT w="25400" h="19050"/>
-                  <a:contourClr>
-                    <a:srgbClr val="FFFFFF"/>
-                  </a:contourClr>
-                </a:sp3d>
-              </p:spPr>
-            </p:pic>
-            <p:pic>
-              <p:nvPicPr>
-                <p:cNvPr id="15615" name="Picture 15614" descr="A person with a smile on his face&#10;&#10;Description automatically generated">
-                  <a:extLst>
-                    <a:ext uri="{FF2B5EF4-FFF2-40B4-BE49-F238E27FC236}">
-                      <a16:creationId xmlns:a16="http://schemas.microsoft.com/office/drawing/2014/main" id="{7957BC4D-151A-EB1E-5CAE-777FF2B16B20}"/>
-                    </a:ext>
-                  </a:extLst>
-                </p:cNvPr>
-                <p:cNvPicPr>
-                  <a:picLocks noChangeAspect="1"/>
-                </p:cNvPicPr>
-                <p:nvPr/>
-              </p:nvPicPr>
-              <p:blipFill>
-                <a:blip r:embed="rId11"/>
-                <a:stretch>
-                  <a:fillRect/>
-                </a:stretch>
-              </p:blipFill>
-              <p:spPr>
-                <a:xfrm>
-                  <a:off x="5883817" y="206684"/>
-                  <a:ext cx="990673" cy="990673"/>
-                </a:xfrm>
-                <a:prstGeom prst="rect">
-                  <a:avLst/>
-                </a:prstGeom>
-                <a:solidFill>
-                  <a:srgbClr val="FFFFFF">
-                    <a:shade val="85000"/>
-                  </a:srgbClr>
-                </a:solidFill>
-                <a:ln w="88900" cap="sq">
-                  <a:solidFill>
-                    <a:srgbClr val="C00000"/>
-                  </a:solidFill>
-                  <a:miter lim="800000"/>
-                </a:ln>
-                <a:effectLst>
-                  <a:outerShdw blurRad="55000" dist="18000" dir="5400000" algn="tl" rotWithShape="0">
-                    <a:srgbClr val="000000">
-                      <a:alpha val="40000"/>
-                    </a:srgbClr>
-                  </a:outerShdw>
-                </a:effectLst>
-                <a:scene3d>
-                  <a:camera prst="orthographicFront"/>
-                  <a:lightRig rig="twoPt" dir="t">
-                    <a:rot lat="0" lon="0" rev="7200000"/>
-                  </a:lightRig>
-                </a:scene3d>
-                <a:sp3d>
-                  <a:bevelT w="25400" h="19050"/>
-                  <a:contourClr>
-                    <a:srgbClr val="FFFFFF"/>
-                  </a:contourClr>
-                </a:sp3d>
-              </p:spPr>
-            </p:pic>
-          </p:grpSp>
-        </p:grpSp>
-        <p:sp>
-          <p:nvSpPr>
-            <p:cNvPr id="15616" name="Rectangle 15615">
-              <a:extLst>
-                <a:ext uri="{FF2B5EF4-FFF2-40B4-BE49-F238E27FC236}">
-                  <a16:creationId xmlns:a16="http://schemas.microsoft.com/office/drawing/2014/main" id="{946783DC-D597-2C29-6191-5B3893CFCF5D}"/>
-                </a:ext>
-              </a:extLst>
-            </p:cNvPr>
-            <p:cNvSpPr/>
-            <p:nvPr/>
-          </p:nvSpPr>
-          <p:spPr bwMode="auto">
-            <a:xfrm>
-              <a:off x="4019981" y="18563950"/>
-              <a:ext cx="1803026" cy="552682"/>
-            </a:xfrm>
-            <a:prstGeom prst="rect">
-              <a:avLst/>
-            </a:prstGeom>
-            <a:solidFill>
-              <a:srgbClr val="848484"/>
-            </a:solidFill>
-            <a:ln w="9525" cap="flat" cmpd="sng" algn="ctr">
-              <a:noFill/>
-              <a:prstDash val="solid"/>
-              <a:round/>
-              <a:headEnd type="none" w="med" len="med"/>
-              <a:tailEnd type="none" w="med" len="med"/>
-            </a:ln>
-            <a:effectLst/>
-          </p:spPr>
-          <p:txBody>
-            <a:bodyPr vert="horz" wrap="square" lIns="91440" tIns="45720" rIns="91440" bIns="45720" numCol="1" rtlCol="0" anchor="t" anchorCtr="0" compatLnSpc="1">
-              <a:prstTxWarp prst="textNoShape">
-                <a:avLst/>
-              </a:prstTxWarp>
-            </a:bodyPr>
-            <a:lstStyle/>
-            <a:p>
-              <a:pPr marL="0" marR="0" indent="0" algn="l" defTabSz="4389438" rtl="0" eaLnBrk="1" fontAlgn="base" latinLnBrk="0" hangingPunct="1">
-                <a:lnSpc>
-                  <a:spcPct val="100000"/>
-                </a:lnSpc>
-                <a:spcBef>
-                  <a:spcPct val="0"/>
-                </a:spcBef>
-                <a:spcAft>
-                  <a:spcPct val="0"/>
-                </a:spcAft>
-                <a:buClrTx/>
-                <a:buSzTx/>
-                <a:buFontTx/>
-                <a:buNone/>
-                <a:tabLst/>
-              </a:pPr>
-              <a:r>
-                <a:rPr kumimoji="0" lang="en-US" sz="3000" b="0" i="0" u="none" strike="noStrike" cap="none" normalizeH="0" baseline="0" dirty="0">
-                  <a:ln>
-                    <a:noFill/>
-                  </a:ln>
-                  <a:solidFill>
-                    <a:schemeClr val="bg1"/>
-                  </a:solidFill>
-                  <a:effectLst/>
-                  <a:latin typeface="Arial" charset="0"/>
-                  <a:cs typeface="Arial" charset="0"/>
-                </a:rPr>
-                <a:t>Share $8</a:t>
-              </a:r>
-            </a:p>
-          </p:txBody>
-        </p:sp>
-        <p:sp>
-          <p:nvSpPr>
-            <p:cNvPr id="15618" name="Rectangle 15617">
-              <a:extLst>
-                <a:ext uri="{FF2B5EF4-FFF2-40B4-BE49-F238E27FC236}">
-                  <a16:creationId xmlns:a16="http://schemas.microsoft.com/office/drawing/2014/main" id="{C6024063-9D2C-50D8-70B5-FC3D7C6F49F8}"/>
-                </a:ext>
-              </a:extLst>
-            </p:cNvPr>
-            <p:cNvSpPr/>
-            <p:nvPr/>
-          </p:nvSpPr>
-          <p:spPr bwMode="auto">
-            <a:xfrm>
-              <a:off x="6502102" y="18568097"/>
-              <a:ext cx="1803026" cy="552682"/>
-            </a:xfrm>
-            <a:prstGeom prst="rect">
-              <a:avLst/>
-            </a:prstGeom>
-            <a:solidFill>
-              <a:srgbClr val="848484"/>
-            </a:solidFill>
-            <a:ln w="9525" cap="flat" cmpd="sng" algn="ctr">
-              <a:noFill/>
-              <a:prstDash val="solid"/>
-              <a:round/>
-              <a:headEnd type="none" w="med" len="med"/>
-              <a:tailEnd type="none" w="med" len="med"/>
-            </a:ln>
-            <a:effectLst/>
-          </p:spPr>
-          <p:txBody>
-            <a:bodyPr vert="horz" wrap="square" lIns="91440" tIns="45720" rIns="91440" bIns="45720" numCol="1" rtlCol="0" anchor="t" anchorCtr="0" compatLnSpc="1">
-              <a:prstTxWarp prst="textNoShape">
-                <a:avLst/>
-              </a:prstTxWarp>
-            </a:bodyPr>
-            <a:lstStyle/>
-            <a:p>
-              <a:pPr marL="0" marR="0" indent="0" algn="l" defTabSz="4389438" rtl="0" eaLnBrk="1" fontAlgn="base" latinLnBrk="0" hangingPunct="1">
-                <a:lnSpc>
-                  <a:spcPct val="100000"/>
-                </a:lnSpc>
-                <a:spcBef>
-                  <a:spcPct val="0"/>
-                </a:spcBef>
-                <a:spcAft>
-                  <a:spcPct val="0"/>
-                </a:spcAft>
-                <a:buClrTx/>
-                <a:buSzTx/>
-                <a:buFontTx/>
-                <a:buNone/>
-                <a:tabLst/>
-              </a:pPr>
-              <a:r>
-                <a:rPr kumimoji="0" lang="en-US" sz="3000" b="0" i="0" u="none" strike="noStrike" cap="none" normalizeH="0" baseline="0" dirty="0">
-                  <a:ln>
-                    <a:noFill/>
-                  </a:ln>
-                  <a:solidFill>
-                    <a:schemeClr val="bg1"/>
-                  </a:solidFill>
-                  <a:effectLst/>
-                  <a:latin typeface="Arial" charset="0"/>
-                  <a:cs typeface="Arial" charset="0"/>
-                </a:rPr>
-                <a:t>Share $2</a:t>
-              </a:r>
-            </a:p>
-          </p:txBody>
-        </p:sp>
-        <p:sp>
-          <p:nvSpPr>
-            <p:cNvPr id="15619" name="Rectangle 15618">
-              <a:extLst>
-                <a:ext uri="{FF2B5EF4-FFF2-40B4-BE49-F238E27FC236}">
-                  <a16:creationId xmlns:a16="http://schemas.microsoft.com/office/drawing/2014/main" id="{8EBB5886-1680-B3C7-DEC7-CD388B0CA60C}"/>
-                </a:ext>
-              </a:extLst>
-            </p:cNvPr>
-            <p:cNvSpPr/>
-            <p:nvPr/>
-          </p:nvSpPr>
-          <p:spPr bwMode="auto">
-            <a:xfrm>
-              <a:off x="7005674" y="19674283"/>
-              <a:ext cx="1978245" cy="552682"/>
-            </a:xfrm>
-            <a:prstGeom prst="rect">
-              <a:avLst/>
-            </a:prstGeom>
-            <a:solidFill>
-              <a:srgbClr val="848484"/>
-            </a:solidFill>
-            <a:ln w="9525" cap="flat" cmpd="sng" algn="ctr">
-              <a:noFill/>
-              <a:prstDash val="solid"/>
-              <a:round/>
-              <a:headEnd type="none" w="med" len="med"/>
-              <a:tailEnd type="none" w="med" len="med"/>
-            </a:ln>
-            <a:effectLst/>
-          </p:spPr>
-          <p:txBody>
-            <a:bodyPr vert="horz" wrap="square" lIns="91440" tIns="45720" rIns="91440" bIns="45720" numCol="1" rtlCol="0" anchor="t" anchorCtr="0" compatLnSpc="1">
-              <a:prstTxWarp prst="textNoShape">
-                <a:avLst/>
-              </a:prstTxWarp>
-            </a:bodyPr>
-            <a:lstStyle/>
-            <a:p>
-              <a:pPr marL="0" marR="0" indent="0" algn="l" defTabSz="4389438" rtl="0" eaLnBrk="1" fontAlgn="base" latinLnBrk="0" hangingPunct="1">
-                <a:lnSpc>
-                  <a:spcPct val="100000"/>
-                </a:lnSpc>
-                <a:spcBef>
-                  <a:spcPct val="0"/>
-                </a:spcBef>
-                <a:spcAft>
-                  <a:spcPct val="0"/>
-                </a:spcAft>
-                <a:buClrTx/>
-                <a:buSzTx/>
-                <a:buFontTx/>
-                <a:buNone/>
-                <a:tabLst/>
-              </a:pPr>
-              <a:r>
-                <a:rPr kumimoji="0" lang="en-US" sz="3000" b="0" i="0" u="none" strike="noStrike" cap="none" normalizeH="0" baseline="0" dirty="0">
-                  <a:ln>
-                    <a:noFill/>
-                  </a:ln>
-                  <a:solidFill>
-                    <a:schemeClr val="bg1"/>
-                  </a:solidFill>
-                  <a:effectLst/>
-                  <a:latin typeface="Arial" charset="0"/>
-                  <a:cs typeface="Arial" charset="0"/>
-                </a:rPr>
-                <a:t>Loading…</a:t>
-              </a:r>
-            </a:p>
-          </p:txBody>
-        </p:sp>
-        <p:sp>
-          <p:nvSpPr>
-            <p:cNvPr id="15620" name="Rectangle 15619">
-              <a:extLst>
-                <a:ext uri="{FF2B5EF4-FFF2-40B4-BE49-F238E27FC236}">
-                  <a16:creationId xmlns:a16="http://schemas.microsoft.com/office/drawing/2014/main" id="{98A52E85-D70D-5398-4E75-D523A6EBBF49}"/>
-                </a:ext>
-              </a:extLst>
-            </p:cNvPr>
-            <p:cNvSpPr/>
-            <p:nvPr/>
-          </p:nvSpPr>
-          <p:spPr bwMode="auto">
-            <a:xfrm>
-              <a:off x="9139048" y="21549198"/>
-              <a:ext cx="704737" cy="718761"/>
-            </a:xfrm>
-            <a:prstGeom prst="rect">
-              <a:avLst/>
-            </a:prstGeom>
-            <a:solidFill>
-              <a:srgbClr val="848484"/>
-            </a:solidFill>
-            <a:ln w="9525" cap="flat" cmpd="sng" algn="ctr">
-              <a:noFill/>
-              <a:prstDash val="solid"/>
-              <a:round/>
-              <a:headEnd type="none" w="med" len="med"/>
-              <a:tailEnd type="none" w="med" len="med"/>
-            </a:ln>
-            <a:effectLst/>
-          </p:spPr>
-          <p:txBody>
-            <a:bodyPr vert="horz" wrap="square" lIns="91440" tIns="45720" rIns="91440" bIns="45720" numCol="1" rtlCol="0" anchor="t" anchorCtr="0" compatLnSpc="1">
-              <a:prstTxWarp prst="textNoShape">
-                <a:avLst/>
-              </a:prstTxWarp>
-            </a:bodyPr>
-            <a:lstStyle/>
-            <a:p>
-              <a:pPr marL="0" marR="0" indent="0" algn="ctr" defTabSz="4389438" rtl="0" eaLnBrk="1" fontAlgn="base" latinLnBrk="0" hangingPunct="1">
-                <a:lnSpc>
-                  <a:spcPct val="100000"/>
-                </a:lnSpc>
-                <a:spcBef>
-                  <a:spcPct val="0"/>
-                </a:spcBef>
-                <a:spcAft>
-                  <a:spcPct val="0"/>
-                </a:spcAft>
-                <a:buClrTx/>
-                <a:buSzTx/>
-                <a:buFontTx/>
-                <a:buNone/>
-                <a:tabLst/>
-              </a:pPr>
-              <a:r>
-                <a:rPr kumimoji="0" lang="en-US" sz="5000" b="0" i="0" u="none" strike="noStrike" cap="none" normalizeH="0" baseline="0" dirty="0">
-                  <a:ln>
-                    <a:noFill/>
-                  </a:ln>
-                  <a:solidFill>
-                    <a:schemeClr val="bg1"/>
-                  </a:solidFill>
-                  <a:effectLst/>
-                  <a:latin typeface="Arial" charset="0"/>
-                  <a:cs typeface="Arial" charset="0"/>
-                </a:rPr>
-                <a:t>+</a:t>
-              </a:r>
-            </a:p>
-          </p:txBody>
-        </p:sp>
-      </p:grpSp>
-      <p:grpSp>
-        <p:nvGrpSpPr>
           <p:cNvPr id="15428" name="Group 15427">
             <a:extLst>
               <a:ext uri="{FF2B5EF4-FFF2-40B4-BE49-F238E27FC236}">
@@ -5278,10 +4447,10 @@
         </p:nvGrpSpPr>
         <p:grpSpPr>
           <a:xfrm>
-            <a:off x="10524474" y="18375577"/>
-            <a:ext cx="4086526" cy="4565394"/>
-            <a:chOff x="10579516" y="17749339"/>
-            <a:chExt cx="4086526" cy="4565394"/>
+            <a:off x="-12351685" y="24748572"/>
+            <a:ext cx="27124037" cy="5855069"/>
+            <a:chOff x="-13075441" y="16557233"/>
+            <a:chExt cx="27124037" cy="5855069"/>
           </a:xfrm>
         </p:grpSpPr>
         <p:grpSp>
@@ -5298,10 +4467,10 @@
           </p:nvGrpSpPr>
           <p:grpSpPr>
             <a:xfrm>
-              <a:off x="10579516" y="17749339"/>
-              <a:ext cx="3543576" cy="1716829"/>
-              <a:chOff x="10597863" y="17642945"/>
-              <a:chExt cx="3543576" cy="1716829"/>
+              <a:off x="-13075441" y="16557233"/>
+              <a:ext cx="7981099" cy="1956293"/>
+              <a:chOff x="-13057094" y="16450839"/>
+              <a:chExt cx="7981099" cy="1956293"/>
             </a:xfrm>
           </p:grpSpPr>
           <p:sp>
@@ -5318,7 +4487,7 @@
             </p:nvSpPr>
             <p:spPr bwMode="auto">
               <a:xfrm>
-                <a:off x="10597863" y="17642945"/>
+                <a:off x="-13057094" y="16450839"/>
                 <a:ext cx="3543576" cy="1716829"/>
               </a:xfrm>
               <a:prstGeom prst="rect">
@@ -5392,7 +4561,7 @@
             </p:nvSpPr>
             <p:spPr>
               <a:xfrm>
-                <a:off x="10597863" y="17717299"/>
+                <a:off x="-8462360" y="16837472"/>
                 <a:ext cx="3386365" cy="1569660"/>
               </a:xfrm>
               <a:prstGeom prst="rect">
@@ -5448,15 +4617,15 @@
             <p:nvPr/>
           </p:nvPicPr>
           <p:blipFill>
-            <a:blip r:embed="rId12"/>
+            <a:blip r:embed="rId4"/>
             <a:stretch>
               <a:fillRect/>
             </a:stretch>
           </p:blipFill>
           <p:spPr>
             <a:xfrm>
-              <a:off x="12246737" y="19903601"/>
-              <a:ext cx="2419305" cy="2411132"/>
+              <a:off x="11004958" y="19378946"/>
+              <a:ext cx="3043638" cy="3033356"/>
             </a:xfrm>
             <a:prstGeom prst="rect">
               <a:avLst/>
@@ -5627,7 +4796,7 @@
         <p:spPr bwMode="auto">
           <a:xfrm>
             <a:off x="15456311" y="4238464"/>
-            <a:ext cx="14842502" cy="9451143"/>
+            <a:ext cx="14842502" cy="17487949"/>
           </a:xfrm>
           <a:prstGeom prst="rect">
             <a:avLst/>
@@ -6533,42 +5702,6 @@
       </p:sp>
       <p:sp>
         <p:nvSpPr>
-          <p:cNvPr id="13" name="TextBox 12">
-            <a:extLst>
-              <a:ext uri="{FF2B5EF4-FFF2-40B4-BE49-F238E27FC236}">
-                <a16:creationId xmlns:a16="http://schemas.microsoft.com/office/drawing/2014/main" id="{52042A99-5FFC-0E4E-8C20-72304DDA44FF}"/>
-              </a:ext>
-            </a:extLst>
-          </p:cNvPr>
-          <p:cNvSpPr txBox="1"/>
-          <p:nvPr/>
-        </p:nvSpPr>
-        <p:spPr>
-          <a:xfrm>
-            <a:off x="521283" y="13175940"/>
-            <a:ext cx="14016335" cy="1569660"/>
-          </a:xfrm>
-          <a:prstGeom prst="rect">
-            <a:avLst/>
-          </a:prstGeom>
-          <a:noFill/>
-        </p:spPr>
-        <p:txBody>
-          <a:bodyPr wrap="square" rtlCol="0">
-            <a:spAutoFit/>
-          </a:bodyPr>
-          <a:lstStyle/>
-          <a:p>
-            <a:pPr algn="ctr"/>
-            <a:r>
-              <a:rPr lang="en-US" sz="3200" i="1" dirty="0"/>
-              <a:t>The Ultimatum (UG) and Dictator (DG) Games were used to assess neural and behavioral responses to perceived fairness. We defined strategic behavior as the difference in offers (high vs. low) in the proposer conditions.</a:t>
-            </a:r>
-          </a:p>
-        </p:txBody>
-      </p:sp>
-      <p:sp>
-        <p:nvSpPr>
           <p:cNvPr id="45" name="Rectangle 162">
             <a:extLst>
               <a:ext uri="{FF2B5EF4-FFF2-40B4-BE49-F238E27FC236}">
@@ -6875,7 +6008,7 @@
                 <a:latin typeface="Trebuchet MS"/>
                 <a:ea typeface="MS PGothic"/>
               </a:rPr>
-              <a:t>6. Age Related Differences in Partner Response </a:t>
+              <a:t>5. Age Related Differences in Partner Response </a:t>
             </a:r>
             <a:endParaRPr lang="en-US" altLang="en-US" sz="4250" dirty="0">
               <a:solidFill>
@@ -6902,8 +6035,8 @@
         </p:nvSpPr>
         <p:spPr bwMode="auto">
           <a:xfrm>
-            <a:off x="15470883" y="14071787"/>
-            <a:ext cx="14827930" cy="18612720"/>
+            <a:off x="15470883" y="22267959"/>
+            <a:ext cx="14827930" cy="10416548"/>
           </a:xfrm>
           <a:prstGeom prst="rect">
             <a:avLst/>
@@ -7060,8 +6193,8 @@
         </p:nvSpPr>
         <p:spPr bwMode="auto">
           <a:xfrm>
-            <a:off x="17792340" y="13743817"/>
-            <a:ext cx="10223153" cy="1400383"/>
+            <a:off x="16469573" y="21922063"/>
+            <a:ext cx="12868688" cy="748988"/>
           </a:xfrm>
           <a:prstGeom prst="rect">
             <a:avLst/>
@@ -7187,70 +6320,14 @@
           <a:p>
             <a:pPr algn="ctr"/>
             <a:r>
-              <a:rPr lang="en-US" altLang="en-US" sz="4250" b="1" dirty="0">
+              <a:rPr lang="en-US" altLang="en-US" sz="4267" b="1" dirty="0">
                 <a:solidFill>
                   <a:srgbClr val="C00000"/>
                 </a:solidFill>
-                <a:latin typeface="Trebuchet MS"/>
-                <a:ea typeface="MS PGothic"/>
+                <a:latin typeface="Trebuchet MS" panose="020B0603020202020204" pitchFamily="34" charset="0"/>
               </a:rPr>
-              <a:t>4. Ventral Striatal Activation Is not Associated with Age </a:t>
+              <a:t>4. Age Differences in Ventral Striatum Responses? </a:t>
             </a:r>
-            <a:endParaRPr lang="en-US" altLang="en-US" sz="4267" b="1" dirty="0">
-              <a:solidFill>
-                <a:srgbClr val="C00000"/>
-              </a:solidFill>
-              <a:latin typeface="Trebuchet MS" panose="020B0603020202020204" pitchFamily="34" charset="0"/>
-            </a:endParaRPr>
-          </a:p>
-        </p:txBody>
-      </p:sp>
-      <p:sp>
-        <p:nvSpPr>
-          <p:cNvPr id="26" name="Rectangle 25">
-            <a:extLst>
-              <a:ext uri="{FF2B5EF4-FFF2-40B4-BE49-F238E27FC236}">
-                <a16:creationId xmlns:a16="http://schemas.microsoft.com/office/drawing/2014/main" id="{A472AF7A-C3B6-5B44-9093-FB3FB96D32E8}"/>
-              </a:ext>
-            </a:extLst>
-          </p:cNvPr>
-          <p:cNvSpPr/>
-          <p:nvPr/>
-        </p:nvSpPr>
-        <p:spPr>
-          <a:xfrm>
-            <a:off x="15753891" y="15011657"/>
-            <a:ext cx="14650695" cy="584775"/>
-          </a:xfrm>
-          <a:prstGeom prst="rect">
-            <a:avLst/>
-          </a:prstGeom>
-        </p:spPr>
-        <p:txBody>
-          <a:bodyPr wrap="square" lIns="91440" tIns="45720" rIns="91440" bIns="45720" anchor="t">
-            <a:spAutoFit/>
-          </a:bodyPr>
-          <a:lstStyle/>
-          <a:p>
-            <a:pPr>
-              <a:spcBef>
-                <a:spcPts val="0"/>
-              </a:spcBef>
-              <a:spcAft>
-                <a:spcPts val="1200"/>
-              </a:spcAft>
-            </a:pPr>
-            <a:r>
-              <a:rPr lang="en-US" sz="3200" i="1" dirty="0">
-                <a:latin typeface="Helvetica"/>
-                <a:ea typeface="MS PGothic"/>
-                <a:cs typeface="Helvetica"/>
-              </a:rPr>
-              <a:t>We found Ventral Striatum (VS) activation for Reciprocate &gt; Defect outcomes</a:t>
-            </a:r>
-            <a:endParaRPr lang="en-US" sz="3200" i="1" dirty="0">
-              <a:cs typeface="Helvetica" panose="020B0604020202020204" pitchFamily="34" charset="0"/>
-            </a:endParaRPr>
           </a:p>
         </p:txBody>
       </p:sp>
@@ -7268,7 +6345,7 @@
         </p:nvSpPr>
         <p:spPr>
           <a:xfrm>
-            <a:off x="15658143" y="22548386"/>
+            <a:off x="15288515" y="31054326"/>
             <a:ext cx="14650695" cy="1077218"/>
           </a:xfrm>
           <a:prstGeom prst="rect">
@@ -7633,7 +6710,19 @@
                 <a:spcAft>
                   <a:spcPts val="0"/>
                 </a:spcAft>
+                <a:buFont typeface="Arial" panose="020B0604020202020204" pitchFamily="34" charset="0"/>
+                <a:buChar char="•"/>
               </a:pPr>
+              <a:r>
+                <a:rPr lang="en-US" sz="4000" b="0" dirty="0">
+                  <a:solidFill>
+                    <a:srgbClr val="000000"/>
+                  </a:solidFill>
+                  <a:effectLst/>
+                  <a:latin typeface="Helvetica" pitchFamily="2" charset="0"/>
+                </a:rPr>
+                <a:t> It remains unclear whether age-related differences in responses to trust are associated with maladaptive outcomes such as financial exploitation.</a:t>
+              </a:r>
               <a:endParaRPr lang="en-US" sz="4000" dirty="0">
                 <a:latin typeface="Helvetica" pitchFamily="2" charset="0"/>
                 <a:ea typeface="MS PGothic"/>
@@ -7649,17 +6738,7 @@
                   <a:spcPts val="0"/>
                 </a:spcAft>
               </a:pPr>
-              <a:r>
-                <a:rPr lang="en-US" sz="4000" b="0" i="1" dirty="0">
-                  <a:solidFill>
-                    <a:srgbClr val="000000"/>
-                  </a:solidFill>
-                  <a:effectLst/>
-                  <a:latin typeface="Helvetica" pitchFamily="2" charset="0"/>
-                </a:rPr>
-                <a:t>It remains unclear whether age-related differences in responses to trust are associated with maladaptive outcomes such as financial exploitation.</a:t>
-              </a:r>
-              <a:endParaRPr lang="en-US" sz="4000" i="1" dirty="0">
+              <a:endParaRPr lang="en-US" sz="4000" dirty="0">
                 <a:latin typeface="Helvetica" pitchFamily="2" charset="0"/>
                 <a:ea typeface="MS PGothic"/>
                 <a:cs typeface="Helvetica"/>
@@ -7985,7 +7064,7 @@
           </p:nvSpPr>
           <p:spPr>
             <a:xfrm>
-              <a:off x="333765" y="9945451"/>
+              <a:off x="251798" y="9507352"/>
               <a:ext cx="14639262" cy="2031325"/>
             </a:xfrm>
             <a:prstGeom prst="rect">
@@ -8053,8 +7132,8 @@
         </p:nvGrpSpPr>
         <p:grpSpPr>
           <a:xfrm>
-            <a:off x="16601267" y="16040170"/>
-            <a:ext cx="6012596" cy="5359483"/>
+            <a:off x="15818565" y="23900244"/>
+            <a:ext cx="6012596" cy="5358384"/>
             <a:chOff x="14976740" y="15406812"/>
             <a:chExt cx="6810930" cy="6071098"/>
           </a:xfrm>
@@ -8074,7 +7153,7 @@
             <p:nvPr/>
           </p:nvPicPr>
           <p:blipFill>
-            <a:blip r:embed="rId13"/>
+            <a:blip r:embed="rId5"/>
             <a:stretch>
               <a:fillRect/>
             </a:stretch>
@@ -8178,45 +7257,6 @@
       </p:grpSp>
       <p:sp>
         <p:nvSpPr>
-          <p:cNvPr id="15398" name="TextBox 15397">
-            <a:extLst>
-              <a:ext uri="{FF2B5EF4-FFF2-40B4-BE49-F238E27FC236}">
-                <a16:creationId xmlns:a16="http://schemas.microsoft.com/office/drawing/2014/main" id="{525D5E19-4B3C-AFF6-A95E-21518D8D505D}"/>
-              </a:ext>
-            </a:extLst>
-          </p:cNvPr>
-          <p:cNvSpPr txBox="1"/>
-          <p:nvPr/>
-        </p:nvSpPr>
-        <p:spPr>
-          <a:xfrm>
-            <a:off x="16564741" y="12143124"/>
-            <a:ext cx="12586455" cy="1077218"/>
-          </a:xfrm>
-          <a:prstGeom prst="rect">
-            <a:avLst/>
-          </a:prstGeom>
-          <a:noFill/>
-        </p:spPr>
-        <p:txBody>
-          <a:bodyPr wrap="square" lIns="91440" tIns="45720" rIns="91440" bIns="45720" anchor="t">
-            <a:spAutoFit/>
-          </a:bodyPr>
-          <a:lstStyle/>
-          <a:p>
-            <a:pPr algn="ctr"/>
-            <a:r>
-              <a:rPr lang="en-US" altLang="en-US" sz="3200" dirty="0">
-                <a:latin typeface="Helvetica"/>
-                <a:ea typeface="MS PGothic"/>
-              </a:rPr>
-              <a:t>Participants were asked to rate their closeness with the three partners before the task on a 7-point Likert Scale</a:t>
-            </a:r>
-          </a:p>
-        </p:txBody>
-      </p:sp>
-      <p:sp>
-        <p:nvSpPr>
           <p:cNvPr id="15400" name="Rectangle 54"/>
           <p:cNvSpPr>
             <a:spLocks noChangeArrowheads="1"/>
@@ -8516,7 +7556,7 @@
                 </a:solidFill>
                 <a:latin typeface="Trebuchet MS" panose="020B0603020202020204" pitchFamily="34" charset="0"/>
               </a:rPr>
-              <a:t>7. Conclusions and Future Directions</a:t>
+              <a:t>6. Conclusions and Future Directions</a:t>
             </a:r>
           </a:p>
         </p:txBody>
@@ -8536,7 +7576,7 @@
         <p:spPr>
           <a:xfrm>
             <a:off x="30912367" y="25351882"/>
-            <a:ext cx="12914399" cy="6832640"/>
+            <a:ext cx="12914399" cy="1938992"/>
           </a:xfrm>
           <a:prstGeom prst="rect">
             <a:avLst/>
@@ -8559,550 +7599,16 @@
               <a:buChar char="•"/>
             </a:pPr>
             <a:r>
-              <a:rPr lang="en-US" sz="3200" dirty="0">
+              <a:rPr lang="en-US" sz="4000" dirty="0">
                 <a:latin typeface="Helvetica"/>
                 <a:ea typeface="MS PGothic"/>
                 <a:cs typeface="Helvetica"/>
               </a:rPr>
-              <a:t> </a:t>
-            </a:r>
-            <a:r>
-              <a:rPr lang="en-US" sz="3400" dirty="0">
-                <a:latin typeface="Helvetica"/>
-                <a:ea typeface="MS PGothic"/>
-                <a:cs typeface="Helvetica"/>
-              </a:rPr>
-              <a:t>Experiencing reciprocation elicited VS activation</a:t>
-            </a:r>
-          </a:p>
-          <a:p>
-            <a:pPr>
-              <a:spcBef>
-                <a:spcPts val="360"/>
-              </a:spcBef>
-              <a:spcAft>
-                <a:spcPts val="0"/>
-              </a:spcAft>
-              <a:buFont typeface="Arial" panose="020B0604020202020204" pitchFamily="34" charset="0"/>
-              <a:buChar char="•"/>
-            </a:pPr>
-            <a:endParaRPr lang="en-US" sz="3400" dirty="0">
-              <a:latin typeface="Helvetica"/>
-              <a:ea typeface="MS PGothic"/>
-              <a:cs typeface="Helvetica"/>
-            </a:endParaRPr>
-          </a:p>
-          <a:p>
-            <a:pPr>
-              <a:spcBef>
-                <a:spcPts val="360"/>
-              </a:spcBef>
-              <a:spcAft>
-                <a:spcPts val="0"/>
-              </a:spcAft>
-              <a:buFont typeface="Arial" panose="020B0604020202020204" pitchFamily="34" charset="0"/>
-              <a:buChar char="•"/>
-            </a:pPr>
-            <a:r>
-              <a:rPr lang="en-US" sz="3400" dirty="0">
-                <a:latin typeface="Helvetica"/>
-                <a:ea typeface="MS PGothic"/>
-                <a:cs typeface="Helvetica"/>
-              </a:rPr>
-              <a:t> There were no age-related effects in the VS</a:t>
-            </a:r>
-          </a:p>
-          <a:p>
-            <a:pPr>
-              <a:spcBef>
-                <a:spcPts val="360"/>
-              </a:spcBef>
-              <a:spcAft>
-                <a:spcPts val="0"/>
-              </a:spcAft>
-              <a:buFont typeface="Arial" panose="020B0604020202020204" pitchFamily="34" charset="0"/>
-              <a:buChar char="•"/>
-            </a:pPr>
-            <a:endParaRPr lang="en-US" sz="3400" dirty="0">
-              <a:latin typeface="Helvetica"/>
-              <a:ea typeface="MS PGothic"/>
-              <a:cs typeface="Helvetica"/>
-            </a:endParaRPr>
-          </a:p>
-          <a:p>
-            <a:pPr>
-              <a:spcBef>
-                <a:spcPts val="360"/>
-              </a:spcBef>
-              <a:spcAft>
-                <a:spcPts val="0"/>
-              </a:spcAft>
-              <a:buFont typeface="Arial" panose="020B0604020202020204" pitchFamily="34" charset="0"/>
-              <a:buChar char="•"/>
-            </a:pPr>
-            <a:r>
-              <a:rPr lang="en-US" sz="3400" dirty="0">
-                <a:latin typeface="Helvetica"/>
-                <a:ea typeface="MS PGothic"/>
-                <a:cs typeface="Helvetica"/>
-              </a:rPr>
-              <a:t> Increase in age was associated with increase in MFG activation during the friend condition relative to the computer condition</a:t>
-            </a:r>
-          </a:p>
-          <a:p>
-            <a:pPr>
-              <a:spcBef>
-                <a:spcPts val="360"/>
-              </a:spcBef>
-              <a:spcAft>
-                <a:spcPts val="0"/>
-              </a:spcAft>
-              <a:buFont typeface="Arial" panose="020B0604020202020204" pitchFamily="34" charset="0"/>
-              <a:buChar char="•"/>
-            </a:pPr>
-            <a:endParaRPr lang="en-US" sz="3400" dirty="0">
-              <a:latin typeface="Helvetica"/>
-              <a:ea typeface="MS PGothic"/>
-              <a:cs typeface="Helvetica"/>
-            </a:endParaRPr>
-          </a:p>
-          <a:p>
-            <a:pPr>
-              <a:spcBef>
-                <a:spcPts val="360"/>
-              </a:spcBef>
-              <a:spcAft>
-                <a:spcPts val="0"/>
-              </a:spcAft>
-              <a:buFont typeface="Arial" panose="020B0604020202020204" pitchFamily="34" charset="0"/>
-              <a:buChar char="•"/>
-            </a:pPr>
-            <a:r>
-              <a:rPr lang="en-US" sz="3400" dirty="0">
-                <a:latin typeface="Helvetica"/>
-                <a:ea typeface="MS PGothic"/>
-                <a:cs typeface="Helvetica"/>
-              </a:rPr>
-              <a:t> Increase in age was associated with decrease in ACC activation during the friend condition relative to the computer condition</a:t>
-            </a:r>
-          </a:p>
-          <a:p>
-            <a:pPr>
-              <a:spcBef>
-                <a:spcPts val="360"/>
-              </a:spcBef>
-              <a:spcAft>
-                <a:spcPts val="0"/>
-              </a:spcAft>
-            </a:pPr>
-            <a:endParaRPr lang="en-US" sz="3400" dirty="0">
-              <a:latin typeface="Helvetica"/>
-              <a:ea typeface="MS PGothic"/>
-              <a:cs typeface="Helvetica"/>
-            </a:endParaRPr>
-          </a:p>
-          <a:p>
-            <a:pPr>
-              <a:spcBef>
-                <a:spcPts val="360"/>
-              </a:spcBef>
-              <a:spcAft>
-                <a:spcPts val="0"/>
-              </a:spcAft>
-              <a:buFont typeface="Arial" panose="020B0604020202020204" pitchFamily="34" charset="0"/>
-              <a:buChar char="•"/>
-            </a:pPr>
-            <a:endParaRPr lang="en-US" sz="3400" b="1" dirty="0">
-              <a:latin typeface="Helvetica"/>
-              <a:ea typeface="MS PGothic"/>
-              <a:cs typeface="Helvetica"/>
-            </a:endParaRPr>
-          </a:p>
-          <a:p>
-            <a:pPr>
-              <a:spcBef>
-                <a:spcPts val="360"/>
-              </a:spcBef>
-              <a:spcAft>
-                <a:spcPts val="0"/>
-              </a:spcAft>
-            </a:pPr>
-            <a:r>
-              <a:rPr lang="en-US" sz="3400" b="1" dirty="0">
-                <a:latin typeface="Helvetica"/>
-                <a:ea typeface="MS PGothic"/>
-                <a:cs typeface="Helvetica"/>
-              </a:rPr>
-              <a:t>*Results are preliminary </a:t>
+              <a:t> Our preliminary results indicate that reciprocation elicited activation in the ventral striatum. Additionally, we find that during the </a:t>
             </a:r>
           </a:p>
         </p:txBody>
       </p:sp>
-      <p:sp>
-        <p:nvSpPr>
-          <p:cNvPr id="15429" name="Rounded Rectangle 15428">
-            <a:extLst>
-              <a:ext uri="{FF2B5EF4-FFF2-40B4-BE49-F238E27FC236}">
-                <a16:creationId xmlns:a16="http://schemas.microsoft.com/office/drawing/2014/main" id="{4B7D9A17-B83C-E5E9-1709-3AF83FDD5AD6}"/>
-              </a:ext>
-            </a:extLst>
-          </p:cNvPr>
-          <p:cNvSpPr/>
-          <p:nvPr/>
-        </p:nvSpPr>
-        <p:spPr bwMode="auto">
-          <a:xfrm>
-            <a:off x="681129" y="15250685"/>
-            <a:ext cx="6101659" cy="707229"/>
-          </a:xfrm>
-          <a:prstGeom prst="roundRect">
-            <a:avLst/>
-          </a:prstGeom>
-          <a:solidFill>
-            <a:schemeClr val="accent1"/>
-          </a:solidFill>
-          <a:ln w="50800" cap="flat" cmpd="sng" algn="ctr">
-            <a:solidFill>
-              <a:schemeClr val="tx1"/>
-            </a:solidFill>
-            <a:prstDash val="solid"/>
-            <a:round/>
-            <a:headEnd type="none" w="med" len="med"/>
-            <a:tailEnd type="none" w="med" len="med"/>
-          </a:ln>
-          <a:effectLst/>
-        </p:spPr>
-        <p:txBody>
-          <a:bodyPr vert="horz" wrap="square" lIns="91440" tIns="45720" rIns="91440" bIns="45720" numCol="1" rtlCol="0" anchor="t" anchorCtr="0" compatLnSpc="1">
-            <a:prstTxWarp prst="textNoShape">
-              <a:avLst/>
-            </a:prstTxWarp>
-          </a:bodyPr>
-          <a:lstStyle/>
-          <a:p>
-            <a:pPr defTabSz="4389438" eaLnBrk="1" hangingPunct="1"/>
-            <a:r>
-              <a:rPr lang="en-US" sz="3500" u="sng" dirty="0"/>
-              <a:t>You are given </a:t>
-            </a:r>
-            <a:r>
-              <a:rPr lang="en-US" sz="3500" b="1" u="sng" dirty="0"/>
-              <a:t>$8</a:t>
-            </a:r>
-            <a:r>
-              <a:rPr lang="en-US" sz="3500" u="sng" dirty="0"/>
-              <a:t> for the trial. </a:t>
-            </a:r>
-          </a:p>
-          <a:p>
-            <a:pPr marL="0" marR="0" indent="0" algn="l" defTabSz="4389438" rtl="0" eaLnBrk="1" fontAlgn="base" latinLnBrk="0" hangingPunct="1">
-              <a:lnSpc>
-                <a:spcPct val="100000"/>
-              </a:lnSpc>
-              <a:spcBef>
-                <a:spcPct val="0"/>
-              </a:spcBef>
-              <a:spcAft>
-                <a:spcPct val="0"/>
-              </a:spcAft>
-              <a:buClrTx/>
-              <a:buSzTx/>
-              <a:buFontTx/>
-              <a:buNone/>
-              <a:tabLst/>
-            </a:pPr>
-            <a:endParaRPr kumimoji="0" lang="en-US" sz="1800" b="0" i="0" u="none" strike="noStrike" cap="none" normalizeH="0" baseline="0" dirty="0">
-              <a:ln>
-                <a:noFill/>
-              </a:ln>
-              <a:solidFill>
-                <a:schemeClr val="tx1"/>
-              </a:solidFill>
-              <a:effectLst/>
-              <a:latin typeface="Arial" charset="0"/>
-              <a:cs typeface="Arial" charset="0"/>
-            </a:endParaRPr>
-          </a:p>
-        </p:txBody>
-      </p:sp>
-      <p:grpSp>
-        <p:nvGrpSpPr>
-          <p:cNvPr id="15592" name="Group 15591">
-            <a:extLst>
-              <a:ext uri="{FF2B5EF4-FFF2-40B4-BE49-F238E27FC236}">
-                <a16:creationId xmlns:a16="http://schemas.microsoft.com/office/drawing/2014/main" id="{415B0EBC-8379-F485-6113-E5DF57F87E19}"/>
-              </a:ext>
-            </a:extLst>
-          </p:cNvPr>
-          <p:cNvGrpSpPr/>
-          <p:nvPr/>
-        </p:nvGrpSpPr>
-        <p:grpSpPr>
-          <a:xfrm>
-            <a:off x="2182475" y="21738507"/>
-            <a:ext cx="4667290" cy="1325771"/>
-            <a:chOff x="1804103" y="21738507"/>
-            <a:chExt cx="4667290" cy="1325771"/>
-          </a:xfrm>
-        </p:grpSpPr>
-        <p:sp>
-          <p:nvSpPr>
-            <p:cNvPr id="52" name="TextBox 51">
-              <a:extLst>
-                <a:ext uri="{FF2B5EF4-FFF2-40B4-BE49-F238E27FC236}">
-                  <a16:creationId xmlns:a16="http://schemas.microsoft.com/office/drawing/2014/main" id="{4707B45F-027B-576B-4808-66F0A5D95489}"/>
-                </a:ext>
-              </a:extLst>
-            </p:cNvPr>
-            <p:cNvSpPr txBox="1"/>
-            <p:nvPr/>
-          </p:nvSpPr>
-          <p:spPr>
-            <a:xfrm>
-              <a:off x="5031575" y="21740839"/>
-              <a:ext cx="1439818" cy="1323439"/>
-            </a:xfrm>
-            <a:prstGeom prst="rect">
-              <a:avLst/>
-            </a:prstGeom>
-            <a:noFill/>
-          </p:spPr>
-          <p:txBody>
-            <a:bodyPr wrap="none" rtlCol="0">
-              <a:spAutoFit/>
-            </a:bodyPr>
-            <a:lstStyle/>
-            <a:p>
-              <a:r>
-                <a:rPr lang="en-US" sz="8000" b="1" dirty="0">
-                  <a:solidFill>
-                    <a:srgbClr val="03DF04"/>
-                  </a:solidFill>
-                </a:rPr>
-                <a:t>X3</a:t>
-              </a:r>
-            </a:p>
-          </p:txBody>
-        </p:sp>
-        <p:sp>
-          <p:nvSpPr>
-            <p:cNvPr id="15433" name="Rounded Rectangle 15432">
-              <a:extLst>
-                <a:ext uri="{FF2B5EF4-FFF2-40B4-BE49-F238E27FC236}">
-                  <a16:creationId xmlns:a16="http://schemas.microsoft.com/office/drawing/2014/main" id="{9D770554-0135-2E8B-9BC3-8228F9631C8A}"/>
-                </a:ext>
-              </a:extLst>
-            </p:cNvPr>
-            <p:cNvSpPr/>
-            <p:nvPr/>
-          </p:nvSpPr>
-          <p:spPr bwMode="auto">
-            <a:xfrm>
-              <a:off x="1804103" y="21738507"/>
-              <a:ext cx="2967279" cy="1168944"/>
-            </a:xfrm>
-            <a:prstGeom prst="roundRect">
-              <a:avLst/>
-            </a:prstGeom>
-            <a:solidFill>
-              <a:schemeClr val="accent1"/>
-            </a:solidFill>
-            <a:ln w="50800" cap="flat" cmpd="sng" algn="ctr">
-              <a:solidFill>
-                <a:schemeClr val="tx1"/>
-              </a:solidFill>
-              <a:prstDash val="solid"/>
-              <a:round/>
-              <a:headEnd type="none" w="med" len="med"/>
-              <a:tailEnd type="none" w="med" len="med"/>
-            </a:ln>
-            <a:effectLst/>
-          </p:spPr>
-          <p:txBody>
-            <a:bodyPr vert="horz" wrap="square" lIns="91440" tIns="45720" rIns="91440" bIns="45720" numCol="1" rtlCol="0" anchor="t" anchorCtr="0" compatLnSpc="1">
-              <a:prstTxWarp prst="textNoShape">
-                <a:avLst/>
-              </a:prstTxWarp>
-            </a:bodyPr>
-            <a:lstStyle/>
-            <a:p>
-              <a:pPr defTabSz="4389438" eaLnBrk="1" hangingPunct="1"/>
-              <a:r>
-                <a:rPr lang="en-US" sz="3000" dirty="0"/>
-                <a:t>The money you  sent is tripled</a:t>
-              </a:r>
-            </a:p>
-            <a:p>
-              <a:pPr marL="0" marR="0" indent="0" algn="l" defTabSz="4389438" rtl="0" eaLnBrk="1" fontAlgn="base" latinLnBrk="0" hangingPunct="1">
-                <a:lnSpc>
-                  <a:spcPct val="100000"/>
-                </a:lnSpc>
-                <a:spcBef>
-                  <a:spcPct val="0"/>
-                </a:spcBef>
-                <a:spcAft>
-                  <a:spcPct val="0"/>
-                </a:spcAft>
-                <a:buClrTx/>
-                <a:buSzTx/>
-                <a:buFontTx/>
-                <a:buNone/>
-                <a:tabLst/>
-              </a:pPr>
-              <a:endParaRPr kumimoji="0" lang="en-US" sz="1800" b="0" i="0" u="none" strike="noStrike" cap="none" normalizeH="0" baseline="0" dirty="0">
-                <a:ln>
-                  <a:noFill/>
-                </a:ln>
-                <a:solidFill>
-                  <a:schemeClr val="tx1"/>
-                </a:solidFill>
-                <a:effectLst/>
-                <a:latin typeface="Arial" charset="0"/>
-                <a:cs typeface="Arial" charset="0"/>
-              </a:endParaRPr>
-            </a:p>
-          </p:txBody>
-        </p:sp>
-      </p:grpSp>
-      <p:grpSp>
-        <p:nvGrpSpPr>
-          <p:cNvPr id="15490" name="Group 15489">
-            <a:extLst>
-              <a:ext uri="{FF2B5EF4-FFF2-40B4-BE49-F238E27FC236}">
-                <a16:creationId xmlns:a16="http://schemas.microsoft.com/office/drawing/2014/main" id="{26CF14B9-FE18-01D5-1A0A-E19BE8376A0A}"/>
-              </a:ext>
-            </a:extLst>
-          </p:cNvPr>
-          <p:cNvGrpSpPr/>
-          <p:nvPr/>
-        </p:nvGrpSpPr>
-        <p:grpSpPr>
-          <a:xfrm>
-            <a:off x="530502" y="18979791"/>
-            <a:ext cx="4534151" cy="2464546"/>
-            <a:chOff x="533974" y="18532980"/>
-            <a:chExt cx="4534151" cy="2464546"/>
-          </a:xfrm>
-        </p:grpSpPr>
-        <p:sp>
-          <p:nvSpPr>
-            <p:cNvPr id="15432" name="Rounded Rectangle 15431">
-              <a:extLst>
-                <a:ext uri="{FF2B5EF4-FFF2-40B4-BE49-F238E27FC236}">
-                  <a16:creationId xmlns:a16="http://schemas.microsoft.com/office/drawing/2014/main" id="{29E5F4B4-9ECB-A12A-6B3F-C0855A0CDE34}"/>
-                </a:ext>
-              </a:extLst>
-            </p:cNvPr>
-            <p:cNvSpPr/>
-            <p:nvPr/>
-          </p:nvSpPr>
-          <p:spPr bwMode="auto">
-            <a:xfrm>
-              <a:off x="533974" y="19334093"/>
-              <a:ext cx="4534151" cy="1663433"/>
-            </a:xfrm>
-            <a:prstGeom prst="roundRect">
-              <a:avLst/>
-            </a:prstGeom>
-            <a:solidFill>
-              <a:schemeClr val="accent1"/>
-            </a:solidFill>
-            <a:ln w="50800" cap="flat" cmpd="sng" algn="ctr">
-              <a:solidFill>
-                <a:schemeClr val="tx1"/>
-              </a:solidFill>
-              <a:prstDash val="solid"/>
-              <a:round/>
-              <a:headEnd type="none" w="med" len="med"/>
-              <a:tailEnd type="none" w="med" len="med"/>
-            </a:ln>
-            <a:effectLst/>
-          </p:spPr>
-          <p:txBody>
-            <a:bodyPr vert="horz" wrap="square" lIns="91440" tIns="45720" rIns="91440" bIns="45720" numCol="1" rtlCol="0" anchor="t" anchorCtr="0" compatLnSpc="1">
-              <a:prstTxWarp prst="textNoShape">
-                <a:avLst/>
-              </a:prstTxWarp>
-            </a:bodyPr>
-            <a:lstStyle/>
-            <a:p>
-              <a:pPr defTabSz="4389438" eaLnBrk="1" hangingPunct="1"/>
-              <a:r>
-                <a:rPr lang="en-US" sz="3000" dirty="0"/>
-                <a:t>You choose a higher or lower amount to share with your partner.</a:t>
-              </a:r>
-            </a:p>
-            <a:p>
-              <a:pPr marL="0" marR="0" indent="0" algn="l" defTabSz="4389438" rtl="0" eaLnBrk="1" fontAlgn="base" latinLnBrk="0" hangingPunct="1">
-                <a:lnSpc>
-                  <a:spcPct val="100000"/>
-                </a:lnSpc>
-                <a:spcBef>
-                  <a:spcPct val="0"/>
-                </a:spcBef>
-                <a:spcAft>
-                  <a:spcPct val="0"/>
-                </a:spcAft>
-                <a:buClrTx/>
-                <a:buSzTx/>
-                <a:buFontTx/>
-                <a:buNone/>
-                <a:tabLst/>
-              </a:pPr>
-              <a:endParaRPr kumimoji="0" lang="en-US" sz="1800" b="0" i="0" u="none" strike="noStrike" cap="none" normalizeH="0" baseline="0" dirty="0">
-                <a:ln>
-                  <a:noFill/>
-                </a:ln>
-                <a:solidFill>
-                  <a:schemeClr val="tx1"/>
-                </a:solidFill>
-                <a:effectLst/>
-                <a:latin typeface="Arial" charset="0"/>
-                <a:cs typeface="Arial" charset="0"/>
-              </a:endParaRPr>
-            </a:p>
-          </p:txBody>
-        </p:sp>
-        <p:cxnSp>
-          <p:nvCxnSpPr>
-            <p:cNvPr id="15442" name="Elbow Connector 15441">
-              <a:extLst>
-                <a:ext uri="{FF2B5EF4-FFF2-40B4-BE49-F238E27FC236}">
-                  <a16:creationId xmlns:a16="http://schemas.microsoft.com/office/drawing/2014/main" id="{FD357802-D2BB-A2AC-2582-D36E431D92F1}"/>
-                </a:ext>
-              </a:extLst>
-            </p:cNvPr>
-            <p:cNvCxnSpPr>
-              <a:cxnSpLocks/>
-            </p:cNvCxnSpPr>
-            <p:nvPr/>
-          </p:nvCxnSpPr>
-          <p:spPr bwMode="auto">
-            <a:xfrm flipV="1">
-              <a:off x="2361558" y="18532980"/>
-              <a:ext cx="953880" cy="801113"/>
-            </a:xfrm>
-            <a:prstGeom prst="bentConnector3">
-              <a:avLst>
-                <a:gd name="adj1" fmla="val -3922"/>
-              </a:avLst>
-            </a:prstGeom>
-            <a:solidFill>
-              <a:schemeClr val="accent1"/>
-            </a:solidFill>
-            <a:ln w="50800" cap="flat" cmpd="sng" algn="ctr">
-              <a:solidFill>
-                <a:schemeClr val="tx1"/>
-              </a:solidFill>
-              <a:prstDash val="solid"/>
-              <a:round/>
-              <a:headEnd type="none" w="med" len="med"/>
-              <a:tailEnd type="triangle"/>
-            </a:ln>
-            <a:effectLst/>
-          </p:spPr>
-        </p:cxnSp>
-      </p:grpSp>
       <p:grpSp>
         <p:nvGrpSpPr>
           <p:cNvPr id="15524" name="Group 15523">
@@ -9355,223 +7861,6 @@
       </p:grpSp>
       <p:grpSp>
         <p:nvGrpSpPr>
-          <p:cNvPr id="15538" name="Group 15537">
-            <a:extLst>
-              <a:ext uri="{FF2B5EF4-FFF2-40B4-BE49-F238E27FC236}">
-                <a16:creationId xmlns:a16="http://schemas.microsoft.com/office/drawing/2014/main" id="{4ABA81B2-5B67-77D2-5517-08033E19241B}"/>
-              </a:ext>
-            </a:extLst>
-          </p:cNvPr>
-          <p:cNvGrpSpPr/>
-          <p:nvPr/>
-        </p:nvGrpSpPr>
-        <p:grpSpPr>
-          <a:xfrm>
-            <a:off x="1364527" y="17047384"/>
-            <a:ext cx="3578072" cy="1569660"/>
-            <a:chOff x="1398495" y="16644992"/>
-            <a:chExt cx="3578072" cy="1569660"/>
-          </a:xfrm>
-        </p:grpSpPr>
-        <p:sp>
-          <p:nvSpPr>
-            <p:cNvPr id="15528" name="Rounded Rectangle 15527">
-              <a:extLst>
-                <a:ext uri="{FF2B5EF4-FFF2-40B4-BE49-F238E27FC236}">
-                  <a16:creationId xmlns:a16="http://schemas.microsoft.com/office/drawing/2014/main" id="{AD2DBFD4-1DD0-D27D-7CB0-35408A9E32E4}"/>
-                </a:ext>
-              </a:extLst>
-            </p:cNvPr>
-            <p:cNvSpPr/>
-            <p:nvPr/>
-          </p:nvSpPr>
-          <p:spPr bwMode="auto">
-            <a:xfrm>
-              <a:off x="1398495" y="16644992"/>
-              <a:ext cx="1947439" cy="1569660"/>
-            </a:xfrm>
-            <a:prstGeom prst="roundRect">
-              <a:avLst/>
-            </a:prstGeom>
-            <a:solidFill>
-              <a:schemeClr val="accent1"/>
-            </a:solidFill>
-            <a:ln w="50800" cap="flat" cmpd="sng" algn="ctr">
-              <a:solidFill>
-                <a:schemeClr val="tx1"/>
-              </a:solidFill>
-              <a:prstDash val="solid"/>
-              <a:round/>
-              <a:headEnd type="none" w="med" len="med"/>
-              <a:tailEnd type="none" w="med" len="med"/>
-            </a:ln>
-            <a:effectLst/>
-          </p:spPr>
-          <p:txBody>
-            <a:bodyPr vert="horz" wrap="square" lIns="91440" tIns="45720" rIns="91440" bIns="45720" numCol="1" rtlCol="0" anchor="t" anchorCtr="0" compatLnSpc="1">
-              <a:prstTxWarp prst="textNoShape">
-                <a:avLst/>
-              </a:prstTxWarp>
-            </a:bodyPr>
-            <a:lstStyle/>
-            <a:p>
-              <a:pPr defTabSz="4389438" eaLnBrk="1" hangingPunct="1"/>
-              <a:r>
-                <a:rPr lang="en-US" sz="3000" dirty="0"/>
-                <a:t>You are assigned a partner.</a:t>
-              </a:r>
-            </a:p>
-            <a:p>
-              <a:pPr marL="0" marR="0" indent="0" algn="l" defTabSz="4389438" rtl="0" eaLnBrk="1" fontAlgn="base" latinLnBrk="0" hangingPunct="1">
-                <a:lnSpc>
-                  <a:spcPct val="100000"/>
-                </a:lnSpc>
-                <a:spcBef>
-                  <a:spcPct val="0"/>
-                </a:spcBef>
-                <a:spcAft>
-                  <a:spcPct val="0"/>
-                </a:spcAft>
-                <a:buClrTx/>
-                <a:buSzTx/>
-                <a:buFontTx/>
-                <a:buNone/>
-                <a:tabLst/>
-              </a:pPr>
-              <a:endParaRPr kumimoji="0" lang="en-US" sz="1800" b="0" i="0" u="none" strike="noStrike" cap="none" normalizeH="0" baseline="0" dirty="0">
-                <a:ln>
-                  <a:noFill/>
-                </a:ln>
-                <a:solidFill>
-                  <a:schemeClr val="tx1"/>
-                </a:solidFill>
-                <a:effectLst/>
-                <a:latin typeface="Arial" charset="0"/>
-                <a:cs typeface="Arial" charset="0"/>
-              </a:endParaRPr>
-            </a:p>
-          </p:txBody>
-        </p:sp>
-        <p:cxnSp>
-          <p:nvCxnSpPr>
-            <p:cNvPr id="15537" name="Straight Arrow Connector 15536">
-              <a:extLst>
-                <a:ext uri="{FF2B5EF4-FFF2-40B4-BE49-F238E27FC236}">
-                  <a16:creationId xmlns:a16="http://schemas.microsoft.com/office/drawing/2014/main" id="{7A1CFB10-A83A-AA5A-7CB9-EC39B260985E}"/>
-                </a:ext>
-              </a:extLst>
-            </p:cNvPr>
-            <p:cNvCxnSpPr>
-              <a:cxnSpLocks/>
-              <a:stCxn id="15528" idx="3"/>
-            </p:cNvCxnSpPr>
-            <p:nvPr/>
-          </p:nvCxnSpPr>
-          <p:spPr bwMode="auto">
-            <a:xfrm>
-              <a:off x="3345934" y="17429822"/>
-              <a:ext cx="1630633" cy="0"/>
-            </a:xfrm>
-            <a:prstGeom prst="straightConnector1">
-              <a:avLst/>
-            </a:prstGeom>
-            <a:solidFill>
-              <a:schemeClr val="accent1"/>
-            </a:solidFill>
-            <a:ln w="50800" cap="flat" cmpd="sng" algn="ctr">
-              <a:solidFill>
-                <a:schemeClr val="tx1"/>
-              </a:solidFill>
-              <a:prstDash val="solid"/>
-              <a:round/>
-              <a:headEnd type="none" w="med" len="med"/>
-              <a:tailEnd type="triangle"/>
-            </a:ln>
-            <a:effectLst/>
-          </p:spPr>
-        </p:cxnSp>
-      </p:grpSp>
-      <p:sp>
-        <p:nvSpPr>
-          <p:cNvPr id="15542" name="Rounded Rectangle 15541">
-            <a:extLst>
-              <a:ext uri="{FF2B5EF4-FFF2-40B4-BE49-F238E27FC236}">
-                <a16:creationId xmlns:a16="http://schemas.microsoft.com/office/drawing/2014/main" id="{F919F17A-D127-CAD0-86F8-9896BB472FB5}"/>
-              </a:ext>
-            </a:extLst>
-          </p:cNvPr>
-          <p:cNvSpPr/>
-          <p:nvPr/>
-        </p:nvSpPr>
-        <p:spPr bwMode="auto">
-          <a:xfrm>
-            <a:off x="1019445" y="25306099"/>
-            <a:ext cx="2843041" cy="764088"/>
-          </a:xfrm>
-          <a:prstGeom prst="roundRect">
-            <a:avLst/>
-          </a:prstGeom>
-          <a:solidFill>
-            <a:schemeClr val="accent1"/>
-          </a:solidFill>
-          <a:ln w="50800" cap="flat" cmpd="sng" algn="ctr">
-            <a:solidFill>
-              <a:schemeClr val="tx1"/>
-            </a:solidFill>
-            <a:prstDash val="solid"/>
-            <a:round/>
-            <a:headEnd type="none" w="med" len="med"/>
-            <a:tailEnd type="none" w="med" len="med"/>
-          </a:ln>
-          <a:effectLst/>
-        </p:spPr>
-        <p:txBody>
-          <a:bodyPr vert="horz" wrap="square" lIns="91440" tIns="45720" rIns="91440" bIns="45720" numCol="1" rtlCol="0" anchor="t" anchorCtr="0" compatLnSpc="1">
-            <a:prstTxWarp prst="textNoShape">
-              <a:avLst/>
-            </a:prstTxWarp>
-          </a:bodyPr>
-          <a:lstStyle/>
-          <a:p>
-            <a:pPr defTabSz="4389438" eaLnBrk="1" hangingPunct="1"/>
-            <a:r>
-              <a:rPr lang="en-US" sz="4000" u="sng" dirty="0"/>
-              <a:t>End of trial</a:t>
-            </a:r>
-          </a:p>
-          <a:p>
-            <a:pPr marL="0" marR="0" indent="0" algn="l" defTabSz="4389438" rtl="0" eaLnBrk="1" fontAlgn="base" latinLnBrk="0" hangingPunct="1">
-              <a:lnSpc>
-                <a:spcPct val="100000"/>
-              </a:lnSpc>
-              <a:spcBef>
-                <a:spcPct val="0"/>
-              </a:spcBef>
-              <a:spcAft>
-                <a:spcPct val="0"/>
-              </a:spcAft>
-              <a:buClrTx/>
-              <a:buSzTx/>
-              <a:buFontTx/>
-              <a:buNone/>
-              <a:tabLst/>
-            </a:pPr>
-            <a:endParaRPr kumimoji="0" lang="en-US" sz="1800" b="0" i="0" u="none" strike="noStrike" cap="none" normalizeH="0" baseline="0" dirty="0">
-              <a:ln>
-                <a:noFill/>
-              </a:ln>
-              <a:solidFill>
-                <a:schemeClr val="tx1"/>
-              </a:solidFill>
-              <a:effectLst/>
-              <a:latin typeface="Arial" charset="0"/>
-              <a:cs typeface="Arial" charset="0"/>
-            </a:endParaRPr>
-          </a:p>
-        </p:txBody>
-      </p:sp>
-      <p:grpSp>
-        <p:nvGrpSpPr>
           <p:cNvPr id="15583" name="Group 15582">
             <a:extLst>
               <a:ext uri="{FF2B5EF4-FFF2-40B4-BE49-F238E27FC236}">
@@ -9605,7 +7894,7 @@
             <p:nvPr/>
           </p:nvPicPr>
           <p:blipFill rotWithShape="1">
-            <a:blip r:embed="rId14">
+            <a:blip r:embed="rId6">
               <a:extLst>
                 <a:ext uri="{28A0092B-C50C-407E-A947-70E740481C1C}">
                   <a14:useLocalDpi xmlns:a14="http://schemas.microsoft.com/office/drawing/2010/main" val="0"/>
@@ -9908,41 +8197,6 @@
       </p:grpSp>
       <p:sp>
         <p:nvSpPr>
-          <p:cNvPr id="15595" name="TextBox 15594">
-            <a:extLst>
-              <a:ext uri="{FF2B5EF4-FFF2-40B4-BE49-F238E27FC236}">
-                <a16:creationId xmlns:a16="http://schemas.microsoft.com/office/drawing/2014/main" id="{BD0DF8CA-4563-3ED7-8925-AC53B7E7547D}"/>
-              </a:ext>
-            </a:extLst>
-          </p:cNvPr>
-          <p:cNvSpPr txBox="1"/>
-          <p:nvPr/>
-        </p:nvSpPr>
-        <p:spPr>
-          <a:xfrm>
-            <a:off x="17919580" y="31349801"/>
-            <a:ext cx="10494348" cy="584775"/>
-          </a:xfrm>
-          <a:prstGeom prst="rect">
-            <a:avLst/>
-          </a:prstGeom>
-          <a:noFill/>
-        </p:spPr>
-        <p:txBody>
-          <a:bodyPr wrap="none" rtlCol="0">
-            <a:spAutoFit/>
-          </a:bodyPr>
-          <a:lstStyle/>
-          <a:p>
-            <a:r>
-              <a:rPr lang="en-US" sz="3200" dirty="0"/>
-              <a:t>We found that activation in the VS was not related to age</a:t>
-            </a:r>
-          </a:p>
-        </p:txBody>
-      </p:sp>
-      <p:sp>
-        <p:nvSpPr>
           <p:cNvPr id="15653" name="TextBox 15652">
             <a:extLst>
               <a:ext uri="{FF2B5EF4-FFF2-40B4-BE49-F238E27FC236}">
@@ -9955,7 +8209,7 @@
         </p:nvSpPr>
         <p:spPr>
           <a:xfrm>
-            <a:off x="30959587" y="22061241"/>
+            <a:off x="30838648" y="22977323"/>
             <a:ext cx="12062344" cy="1015663"/>
           </a:xfrm>
           <a:prstGeom prst="rect">
@@ -9969,13 +8223,20 @@
           </a:bodyPr>
           <a:lstStyle/>
           <a:p>
-            <a:pPr algn="l"/>
+            <a:pPr algn="ctr"/>
+            <a:r>
+              <a:rPr lang="en-US" sz="3000" i="0" dirty="0" err="1">
+                <a:effectLst/>
+                <a:latin typeface="Helvetica" pitchFamily="2" charset="0"/>
+              </a:rPr>
+              <a:t>mPFC</a:t>
+            </a:r>
             <a:r>
               <a:rPr lang="en-US" sz="3000" i="0" dirty="0">
                 <a:effectLst/>
                 <a:latin typeface="Helvetica" pitchFamily="2" charset="0"/>
               </a:rPr>
-              <a:t>We found lower ACC activation in older adults than in younger adults when experiencing friend reciprocation.</a:t>
+              <a:t> activation was negatively correlated with age during friend reciprocation</a:t>
             </a:r>
           </a:p>
         </p:txBody>
@@ -9994,8 +8255,8 @@
         </p:nvSpPr>
         <p:spPr>
           <a:xfrm>
-            <a:off x="967783" y="27288073"/>
-            <a:ext cx="13287268" cy="3877985"/>
+            <a:off x="306661" y="25149656"/>
+            <a:ext cx="9825551" cy="3062377"/>
           </a:xfrm>
           <a:prstGeom prst="rect">
             <a:avLst/>
@@ -10110,28 +8371,6 @@
               </a:rPr>
               <a:t> at Z &gt; 3.1 and Family Wise Error corrected at p &gt; .05</a:t>
             </a:r>
-          </a:p>
-          <a:p>
-            <a:pPr algn="ctr"/>
-            <a:endParaRPr lang="en-US" sz="2800" dirty="0">
-              <a:latin typeface="Helvetica"/>
-              <a:ea typeface="MS PGothic"/>
-              <a:cs typeface="Helvetica"/>
-            </a:endParaRPr>
-          </a:p>
-          <a:p>
-            <a:pPr algn="ctr"/>
-            <a:r>
-              <a:rPr lang="en-US" sz="2800" dirty="0">
-                <a:latin typeface="Helvetica"/>
-                <a:ea typeface="MS PGothic"/>
-                <a:cs typeface="Helvetica"/>
-              </a:rPr>
-              <a:t>Masks were extracted from Harvard–Oxford and Mars atlases.</a:t>
-            </a:r>
-            <a:endParaRPr lang="en-US" sz="2800" dirty="0"/>
-          </a:p>
-          <a:p>
             <a:endParaRPr lang="en-US" sz="2500" dirty="0">
               <a:effectLst/>
               <a:latin typeface="Helvetica"/>
@@ -10158,8 +8397,8 @@
         </p:nvGrpSpPr>
         <p:grpSpPr>
           <a:xfrm>
-            <a:off x="16354965" y="5047450"/>
-            <a:ext cx="5514207" cy="5891751"/>
+            <a:off x="16034879" y="4731272"/>
+            <a:ext cx="6499677" cy="7043851"/>
             <a:chOff x="16270767" y="4773172"/>
             <a:chExt cx="4112536" cy="4273122"/>
           </a:xfrm>
@@ -10179,13 +8418,13 @@
             <p:nvPr/>
           </p:nvPicPr>
           <p:blipFill rotWithShape="1">
-            <a:blip r:embed="rId15">
+            <a:blip r:embed="rId7">
               <a:extLst>
                 <a:ext uri="{28A0092B-C50C-407E-A947-70E740481C1C}">
                   <a14:useLocalDpi xmlns:a14="http://schemas.microsoft.com/office/drawing/2010/main" val="0"/>
                 </a:ext>
                 <a:ext uri="{96DAC541-7B7A-43D3-8B79-37D633B846F1}">
-                  <asvg:svgBlip xmlns:asvg="http://schemas.microsoft.com/office/drawing/2016/SVG/main" r:embed="rId16"/>
+                  <asvg:svgBlip xmlns:asvg="http://schemas.microsoft.com/office/drawing/2016/SVG/main" r:embed="rId8"/>
                 </a:ext>
               </a:extLst>
             </a:blip>
@@ -10415,85 +8654,1519 @@
           </p:txBody>
         </p:sp>
       </p:grpSp>
-      <p:sp>
-        <p:nvSpPr>
-          <p:cNvPr id="15667" name="Rounded Rectangle 15666">
+      <p:grpSp>
+        <p:nvGrpSpPr>
+          <p:cNvPr id="3" name="Group 2">
             <a:extLst>
               <a:ext uri="{FF2B5EF4-FFF2-40B4-BE49-F238E27FC236}">
-                <a16:creationId xmlns:a16="http://schemas.microsoft.com/office/drawing/2014/main" id="{A04AF92B-DBCA-68B5-49E1-F021F79663D4}"/>
+                <a16:creationId xmlns:a16="http://schemas.microsoft.com/office/drawing/2014/main" id="{FE925EB6-326B-8343-87E7-5F037676B4C3}"/>
               </a:ext>
             </a:extLst>
           </p:cNvPr>
-          <p:cNvSpPr/>
+          <p:cNvGrpSpPr/>
           <p:nvPr/>
-        </p:nvSpPr>
-        <p:spPr bwMode="auto">
+        </p:nvGrpSpPr>
+        <p:grpSpPr>
           <a:xfrm>
-            <a:off x="882727" y="23499130"/>
-            <a:ext cx="3102910" cy="655177"/>
+            <a:off x="485487" y="13108557"/>
+            <a:ext cx="13946934" cy="10995653"/>
+            <a:chOff x="530502" y="15050793"/>
+            <a:chExt cx="13946934" cy="10995653"/>
           </a:xfrm>
-          <a:prstGeom prst="roundRect">
-            <a:avLst/>
-          </a:prstGeom>
-          <a:solidFill>
-            <a:schemeClr val="accent1"/>
-          </a:solidFill>
-          <a:ln w="50800" cap="flat" cmpd="sng" algn="ctr">
+        </p:grpSpPr>
+        <p:grpSp>
+          <p:nvGrpSpPr>
+            <p:cNvPr id="15621" name="Group 15620">
+              <a:extLst>
+                <a:ext uri="{FF2B5EF4-FFF2-40B4-BE49-F238E27FC236}">
+                  <a16:creationId xmlns:a16="http://schemas.microsoft.com/office/drawing/2014/main" id="{5C45E275-5A15-8C98-B9C5-16C75C23860A}"/>
+                </a:ext>
+              </a:extLst>
+            </p:cNvPr>
+            <p:cNvGrpSpPr/>
+            <p:nvPr/>
+          </p:nvGrpSpPr>
+          <p:grpSpPr>
+            <a:xfrm>
+              <a:off x="3779671" y="15989696"/>
+              <a:ext cx="10697765" cy="10056750"/>
+              <a:chOff x="3779671" y="16218296"/>
+              <a:chExt cx="10697765" cy="10056750"/>
+            </a:xfrm>
+          </p:grpSpPr>
+          <p:grpSp>
+            <p:nvGrpSpPr>
+              <p:cNvPr id="15606" name="Group 15605">
+                <a:extLst>
+                  <a:ext uri="{FF2B5EF4-FFF2-40B4-BE49-F238E27FC236}">
+                    <a16:creationId xmlns:a16="http://schemas.microsoft.com/office/drawing/2014/main" id="{B0CC5957-EC01-CDC2-ADAF-5A0141831C57}"/>
+                  </a:ext>
+                </a:extLst>
+              </p:cNvPr>
+              <p:cNvGrpSpPr/>
+              <p:nvPr/>
+            </p:nvGrpSpPr>
+            <p:grpSpPr>
+              <a:xfrm>
+                <a:off x="3779671" y="16218296"/>
+                <a:ext cx="10697765" cy="10056750"/>
+                <a:chOff x="18887859" y="360968"/>
+                <a:chExt cx="6543891" cy="6151778"/>
+              </a:xfrm>
+            </p:grpSpPr>
+            <p:pic>
+              <p:nvPicPr>
+                <p:cNvPr id="15607" name="Picture 15606" descr="A green check mark on a grey background&#10;&#10;Description automatically generated">
+                  <a:extLst>
+                    <a:ext uri="{FF2B5EF4-FFF2-40B4-BE49-F238E27FC236}">
+                      <a16:creationId xmlns:a16="http://schemas.microsoft.com/office/drawing/2014/main" id="{BFD42068-273C-19B5-B61E-D2752FACB16C}"/>
+                    </a:ext>
+                  </a:extLst>
+                </p:cNvPr>
+                <p:cNvPicPr>
+                  <a:picLocks noChangeAspect="1"/>
+                </p:cNvPicPr>
+                <p:nvPr/>
+              </p:nvPicPr>
+              <p:blipFill rotWithShape="1">
+                <a:blip r:embed="rId9"/>
+                <a:srcRect l="14791" t="15087" r="12450" b="22936"/>
+                <a:stretch/>
+              </p:blipFill>
+              <p:spPr>
+                <a:xfrm>
+                  <a:off x="19244972" y="4622666"/>
+                  <a:ext cx="2991981" cy="1890080"/>
+                </a:xfrm>
+                <a:prstGeom prst="rect">
+                  <a:avLst/>
+                </a:prstGeom>
+                <a:solidFill>
+                  <a:srgbClr val="FFFFFF">
+                    <a:shade val="85000"/>
+                  </a:srgbClr>
+                </a:solidFill>
+                <a:ln w="88900" cap="sq">
+                  <a:solidFill>
+                    <a:srgbClr val="C00000"/>
+                  </a:solidFill>
+                  <a:miter lim="800000"/>
+                </a:ln>
+                <a:effectLst>
+                  <a:outerShdw blurRad="55000" dist="18000" dir="5400000" algn="tl" rotWithShape="0">
+                    <a:srgbClr val="000000">
+                      <a:alpha val="40000"/>
+                    </a:srgbClr>
+                  </a:outerShdw>
+                </a:effectLst>
+                <a:scene3d>
+                  <a:camera prst="orthographicFront"/>
+                  <a:lightRig rig="twoPt" dir="t">
+                    <a:rot lat="0" lon="0" rev="7200000"/>
+                  </a:lightRig>
+                </a:scene3d>
+                <a:sp3d>
+                  <a:bevelT w="25400" h="19050"/>
+                  <a:contourClr>
+                    <a:srgbClr val="FFFFFF"/>
+                  </a:contourClr>
+                </a:sp3d>
+              </p:spPr>
+            </p:pic>
+            <p:pic>
+              <p:nvPicPr>
+                <p:cNvPr id="15608" name="Picture 15607" descr="A computer screen shot&#10;&#10;Description automatically generated">
+                  <a:extLst>
+                    <a:ext uri="{FF2B5EF4-FFF2-40B4-BE49-F238E27FC236}">
+                      <a16:creationId xmlns:a16="http://schemas.microsoft.com/office/drawing/2014/main" id="{7AF89E18-68CC-9284-01FB-59B8ECC6A7F3}"/>
+                    </a:ext>
+                  </a:extLst>
+                </p:cNvPr>
+                <p:cNvPicPr>
+                  <a:picLocks noChangeAspect="1"/>
+                </p:cNvPicPr>
+                <p:nvPr/>
+              </p:nvPicPr>
+              <p:blipFill rotWithShape="1">
+                <a:blip r:embed="rId10"/>
+                <a:srcRect l="17658" t="18357" r="18046" b="25816"/>
+                <a:stretch/>
+              </p:blipFill>
+              <p:spPr>
+                <a:xfrm>
+                  <a:off x="22543408" y="4676154"/>
+                  <a:ext cx="2888342" cy="1819031"/>
+                </a:xfrm>
+                <a:prstGeom prst="rect">
+                  <a:avLst/>
+                </a:prstGeom>
+                <a:solidFill>
+                  <a:srgbClr val="FFFFFF">
+                    <a:shade val="85000"/>
+                  </a:srgbClr>
+                </a:solidFill>
+                <a:ln w="88900" cap="sq">
+                  <a:solidFill>
+                    <a:srgbClr val="C00000"/>
+                  </a:solidFill>
+                  <a:miter lim="800000"/>
+                </a:ln>
+                <a:effectLst>
+                  <a:outerShdw blurRad="55000" dist="18000" dir="5400000" algn="tl" rotWithShape="0">
+                    <a:srgbClr val="000000">
+                      <a:alpha val="40000"/>
+                    </a:srgbClr>
+                  </a:outerShdw>
+                </a:effectLst>
+                <a:scene3d>
+                  <a:camera prst="orthographicFront"/>
+                  <a:lightRig rig="twoPt" dir="t">
+                    <a:rot lat="0" lon="0" rev="7200000"/>
+                  </a:lightRig>
+                </a:scene3d>
+                <a:sp3d>
+                  <a:bevelT w="25400" h="19050"/>
+                  <a:contourClr>
+                    <a:srgbClr val="FFFFFF"/>
+                  </a:contourClr>
+                </a:sp3d>
+              </p:spPr>
+            </p:pic>
+            <p:pic>
+              <p:nvPicPr>
+                <p:cNvPr id="15609" name="Picture 15608" descr="A white cross on a gray background&#10;&#10;Description automatically generated">
+                  <a:extLst>
+                    <a:ext uri="{FF2B5EF4-FFF2-40B4-BE49-F238E27FC236}">
+                      <a16:creationId xmlns:a16="http://schemas.microsoft.com/office/drawing/2014/main" id="{A316990F-59C7-631E-47E9-456D55904891}"/>
+                    </a:ext>
+                  </a:extLst>
+                </p:cNvPr>
+                <p:cNvPicPr>
+                  <a:picLocks noChangeAspect="1"/>
+                </p:cNvPicPr>
+                <p:nvPr/>
+              </p:nvPicPr>
+              <p:blipFill rotWithShape="1">
+                <a:blip r:embed="rId11"/>
+                <a:srcRect l="2620" t="7420" r="2620" b="4981"/>
+                <a:stretch/>
+              </p:blipFill>
+              <p:spPr>
+                <a:xfrm>
+                  <a:off x="20965957" y="2971697"/>
+                  <a:ext cx="2848448" cy="1890080"/>
+                </a:xfrm>
+                <a:prstGeom prst="rect">
+                  <a:avLst/>
+                </a:prstGeom>
+                <a:solidFill>
+                  <a:srgbClr val="FFFFFF">
+                    <a:shade val="85000"/>
+                  </a:srgbClr>
+                </a:solidFill>
+                <a:ln w="88900" cap="sq">
+                  <a:solidFill>
+                    <a:srgbClr val="C00000"/>
+                  </a:solidFill>
+                  <a:miter lim="800000"/>
+                </a:ln>
+                <a:effectLst>
+                  <a:outerShdw blurRad="55000" dist="18000" dir="5400000" algn="tl" rotWithShape="0">
+                    <a:srgbClr val="000000">
+                      <a:alpha val="40000"/>
+                    </a:srgbClr>
+                  </a:outerShdw>
+                </a:effectLst>
+                <a:scene3d>
+                  <a:camera prst="orthographicFront"/>
+                  <a:lightRig rig="twoPt" dir="t">
+                    <a:rot lat="0" lon="0" rev="7200000"/>
+                  </a:lightRig>
+                </a:scene3d>
+                <a:sp3d>
+                  <a:bevelT w="25400" h="19050"/>
+                  <a:contourClr>
+                    <a:srgbClr val="FFFFFF"/>
+                  </a:contourClr>
+                </a:sp3d>
+              </p:spPr>
+            </p:pic>
+            <p:pic>
+              <p:nvPicPr>
+                <p:cNvPr id="15610" name="Picture 15609" descr="A grey background with white text&#10;&#10;Description automatically generated">
+                  <a:extLst>
+                    <a:ext uri="{FF2B5EF4-FFF2-40B4-BE49-F238E27FC236}">
+                      <a16:creationId xmlns:a16="http://schemas.microsoft.com/office/drawing/2014/main" id="{E95A9EFF-122D-C651-FDF5-564B82E90BBA}"/>
+                    </a:ext>
+                  </a:extLst>
+                </p:cNvPr>
+                <p:cNvPicPr>
+                  <a:picLocks noChangeAspect="1"/>
+                </p:cNvPicPr>
+                <p:nvPr/>
+              </p:nvPicPr>
+              <p:blipFill>
+                <a:blip r:embed="rId12"/>
+                <a:stretch>
+                  <a:fillRect/>
+                </a:stretch>
+              </p:blipFill>
+              <p:spPr>
+                <a:xfrm>
+                  <a:off x="19926908" y="1639461"/>
+                  <a:ext cx="2848448" cy="1943823"/>
+                </a:xfrm>
+                <a:prstGeom prst="rect">
+                  <a:avLst/>
+                </a:prstGeom>
+                <a:solidFill>
+                  <a:srgbClr val="FFFFFF">
+                    <a:shade val="85000"/>
+                  </a:srgbClr>
+                </a:solidFill>
+                <a:ln w="88900" cap="sq">
+                  <a:solidFill>
+                    <a:srgbClr val="C00000"/>
+                  </a:solidFill>
+                  <a:miter lim="800000"/>
+                </a:ln>
+                <a:effectLst>
+                  <a:outerShdw blurRad="55000" dist="18000" dir="5400000" algn="tl" rotWithShape="0">
+                    <a:srgbClr val="000000">
+                      <a:alpha val="40000"/>
+                    </a:srgbClr>
+                  </a:outerShdw>
+                </a:effectLst>
+                <a:scene3d>
+                  <a:camera prst="orthographicFront"/>
+                  <a:lightRig rig="twoPt" dir="t">
+                    <a:rot lat="0" lon="0" rev="7200000"/>
+                  </a:lightRig>
+                </a:scene3d>
+                <a:sp3d>
+                  <a:bevelT w="25400" h="19050"/>
+                  <a:contourClr>
+                    <a:srgbClr val="FFFFFF"/>
+                  </a:contourClr>
+                </a:sp3d>
+              </p:spPr>
+            </p:pic>
+            <p:pic>
+              <p:nvPicPr>
+                <p:cNvPr id="15611" name="Picture 15610" descr="A computer and a keyboard&#10;&#10;Description automatically generated with medium confidence">
+                  <a:extLst>
+                    <a:ext uri="{FF2B5EF4-FFF2-40B4-BE49-F238E27FC236}">
+                      <a16:creationId xmlns:a16="http://schemas.microsoft.com/office/drawing/2014/main" id="{BD10086D-C152-9AEB-CD34-13177C8F6D4A}"/>
+                    </a:ext>
+                  </a:extLst>
+                </p:cNvPr>
+                <p:cNvPicPr>
+                  <a:picLocks noChangeAspect="1"/>
+                </p:cNvPicPr>
+                <p:nvPr/>
+              </p:nvPicPr>
+              <p:blipFill rotWithShape="1">
+                <a:blip r:embed="rId13"/>
+                <a:srcRect l="2378" t="5420" r="2378" b="9853"/>
+                <a:stretch/>
+              </p:blipFill>
+              <p:spPr>
+                <a:xfrm>
+                  <a:off x="18887859" y="360968"/>
+                  <a:ext cx="2848448" cy="1919430"/>
+                </a:xfrm>
+                <a:prstGeom prst="rect">
+                  <a:avLst/>
+                </a:prstGeom>
+                <a:solidFill>
+                  <a:srgbClr val="FFFFFF">
+                    <a:shade val="85000"/>
+                  </a:srgbClr>
+                </a:solidFill>
+                <a:ln w="88900" cap="sq">
+                  <a:solidFill>
+                    <a:srgbClr val="C00000"/>
+                  </a:solidFill>
+                  <a:miter lim="800000"/>
+                </a:ln>
+                <a:effectLst>
+                  <a:outerShdw blurRad="55000" dist="18000" dir="5400000" algn="tl" rotWithShape="0">
+                    <a:srgbClr val="000000">
+                      <a:alpha val="40000"/>
+                    </a:srgbClr>
+                  </a:outerShdw>
+                </a:effectLst>
+                <a:scene3d>
+                  <a:camera prst="orthographicFront"/>
+                  <a:lightRig rig="twoPt" dir="t">
+                    <a:rot lat="0" lon="0" rev="7200000"/>
+                  </a:lightRig>
+                </a:scene3d>
+                <a:sp3d>
+                  <a:bevelT w="25400" h="19050"/>
+                  <a:contourClr>
+                    <a:srgbClr val="FFFFFF"/>
+                  </a:contourClr>
+                </a:sp3d>
+              </p:spPr>
+            </p:pic>
+            <p:grpSp>
+              <p:nvGrpSpPr>
+                <p:cNvPr id="15612" name="Group 15611">
+                  <a:extLst>
+                    <a:ext uri="{FF2B5EF4-FFF2-40B4-BE49-F238E27FC236}">
+                      <a16:creationId xmlns:a16="http://schemas.microsoft.com/office/drawing/2014/main" id="{60B2107B-4199-FD0C-4076-CA2B2F109B20}"/>
+                    </a:ext>
+                  </a:extLst>
+                </p:cNvPr>
+                <p:cNvGrpSpPr/>
+                <p:nvPr/>
+              </p:nvGrpSpPr>
+              <p:grpSpPr>
+                <a:xfrm>
+                  <a:off x="22071524" y="360968"/>
+                  <a:ext cx="3360226" cy="995434"/>
+                  <a:chOff x="3514264" y="206684"/>
+                  <a:chExt cx="3360226" cy="995434"/>
+                </a:xfrm>
+              </p:grpSpPr>
+              <p:pic>
+                <p:nvPicPr>
+                  <p:cNvPr id="15613" name="Picture 15612">
+                    <a:extLst>
+                      <a:ext uri="{FF2B5EF4-FFF2-40B4-BE49-F238E27FC236}">
+                        <a16:creationId xmlns:a16="http://schemas.microsoft.com/office/drawing/2014/main" id="{8F1F804F-2F4C-1C69-0ED4-456A517A34F3}"/>
+                      </a:ext>
+                    </a:extLst>
+                  </p:cNvPr>
+                  <p:cNvPicPr>
+                    <a:picLocks noChangeAspect="1"/>
+                  </p:cNvPicPr>
+                  <p:nvPr/>
+                </p:nvPicPr>
+                <p:blipFill>
+                  <a:blip r:embed="rId14"/>
+                  <a:stretch>
+                    <a:fillRect/>
+                  </a:stretch>
+                </p:blipFill>
+                <p:spPr>
+                  <a:xfrm>
+                    <a:off x="3514264" y="206684"/>
+                    <a:ext cx="1027916" cy="990673"/>
+                  </a:xfrm>
+                  <a:prstGeom prst="rect">
+                    <a:avLst/>
+                  </a:prstGeom>
+                  <a:solidFill>
+                    <a:srgbClr val="FFFFFF">
+                      <a:shade val="85000"/>
+                    </a:srgbClr>
+                  </a:solidFill>
+                  <a:ln w="88900" cap="sq">
+                    <a:solidFill>
+                      <a:srgbClr val="C00000"/>
+                    </a:solidFill>
+                    <a:miter lim="800000"/>
+                  </a:ln>
+                  <a:effectLst>
+                    <a:outerShdw blurRad="55000" dist="18000" dir="5400000" algn="tl" rotWithShape="0">
+                      <a:srgbClr val="000000">
+                        <a:alpha val="40000"/>
+                      </a:srgbClr>
+                    </a:outerShdw>
+                  </a:effectLst>
+                  <a:scene3d>
+                    <a:camera prst="orthographicFront"/>
+                    <a:lightRig rig="twoPt" dir="t">
+                      <a:rot lat="0" lon="0" rev="7200000"/>
+                    </a:lightRig>
+                  </a:scene3d>
+                  <a:sp3d>
+                    <a:bevelT w="25400" h="19050"/>
+                    <a:contourClr>
+                      <a:srgbClr val="FFFFFF"/>
+                    </a:contourClr>
+                  </a:sp3d>
+                </p:spPr>
+              </p:pic>
+              <p:pic>
+                <p:nvPicPr>
+                  <p:cNvPr id="15614" name="Picture 15613" descr="A grey square with a person's head&#10;&#10;Description automatically generated">
+                    <a:extLst>
+                      <a:ext uri="{FF2B5EF4-FFF2-40B4-BE49-F238E27FC236}">
+                        <a16:creationId xmlns:a16="http://schemas.microsoft.com/office/drawing/2014/main" id="{2172C1AD-5BEC-2CFE-FCB3-472B60E2C225}"/>
+                      </a:ext>
+                    </a:extLst>
+                  </p:cNvPr>
+                  <p:cNvPicPr>
+                    <a:picLocks noChangeAspect="1"/>
+                  </p:cNvPicPr>
+                  <p:nvPr/>
+                </p:nvPicPr>
+                <p:blipFill>
+                  <a:blip r:embed="rId15"/>
+                  <a:stretch>
+                    <a:fillRect/>
+                  </a:stretch>
+                </p:blipFill>
+                <p:spPr>
+                  <a:xfrm>
+                    <a:off x="4717835" y="206684"/>
+                    <a:ext cx="982991" cy="995434"/>
+                  </a:xfrm>
+                  <a:prstGeom prst="rect">
+                    <a:avLst/>
+                  </a:prstGeom>
+                  <a:solidFill>
+                    <a:srgbClr val="FFFFFF">
+                      <a:shade val="85000"/>
+                    </a:srgbClr>
+                  </a:solidFill>
+                  <a:ln w="88900" cap="sq">
+                    <a:solidFill>
+                      <a:srgbClr val="C00000"/>
+                    </a:solidFill>
+                    <a:miter lim="800000"/>
+                  </a:ln>
+                  <a:effectLst>
+                    <a:outerShdw blurRad="55000" dist="18000" dir="5400000" algn="tl" rotWithShape="0">
+                      <a:srgbClr val="000000">
+                        <a:alpha val="40000"/>
+                      </a:srgbClr>
+                    </a:outerShdw>
+                  </a:effectLst>
+                  <a:scene3d>
+                    <a:camera prst="orthographicFront"/>
+                    <a:lightRig rig="twoPt" dir="t">
+                      <a:rot lat="0" lon="0" rev="7200000"/>
+                    </a:lightRig>
+                  </a:scene3d>
+                  <a:sp3d>
+                    <a:bevelT w="25400" h="19050"/>
+                    <a:contourClr>
+                      <a:srgbClr val="FFFFFF"/>
+                    </a:contourClr>
+                  </a:sp3d>
+                </p:spPr>
+              </p:pic>
+              <p:pic>
+                <p:nvPicPr>
+                  <p:cNvPr id="15615" name="Picture 15614" descr="A person with a smile on his face&#10;&#10;Description automatically generated">
+                    <a:extLst>
+                      <a:ext uri="{FF2B5EF4-FFF2-40B4-BE49-F238E27FC236}">
+                        <a16:creationId xmlns:a16="http://schemas.microsoft.com/office/drawing/2014/main" id="{7957BC4D-151A-EB1E-5CAE-777FF2B16B20}"/>
+                      </a:ext>
+                    </a:extLst>
+                  </p:cNvPr>
+                  <p:cNvPicPr>
+                    <a:picLocks noChangeAspect="1"/>
+                  </p:cNvPicPr>
+                  <p:nvPr/>
+                </p:nvPicPr>
+                <p:blipFill>
+                  <a:blip r:embed="rId16"/>
+                  <a:stretch>
+                    <a:fillRect/>
+                  </a:stretch>
+                </p:blipFill>
+                <p:spPr>
+                  <a:xfrm>
+                    <a:off x="5883817" y="206684"/>
+                    <a:ext cx="990673" cy="990673"/>
+                  </a:xfrm>
+                  <a:prstGeom prst="rect">
+                    <a:avLst/>
+                  </a:prstGeom>
+                  <a:solidFill>
+                    <a:srgbClr val="FFFFFF">
+                      <a:shade val="85000"/>
+                    </a:srgbClr>
+                  </a:solidFill>
+                  <a:ln w="88900" cap="sq">
+                    <a:solidFill>
+                      <a:srgbClr val="C00000"/>
+                    </a:solidFill>
+                    <a:miter lim="800000"/>
+                  </a:ln>
+                  <a:effectLst>
+                    <a:outerShdw blurRad="55000" dist="18000" dir="5400000" algn="tl" rotWithShape="0">
+                      <a:srgbClr val="000000">
+                        <a:alpha val="40000"/>
+                      </a:srgbClr>
+                    </a:outerShdw>
+                  </a:effectLst>
+                  <a:scene3d>
+                    <a:camera prst="orthographicFront"/>
+                    <a:lightRig rig="twoPt" dir="t">
+                      <a:rot lat="0" lon="0" rev="7200000"/>
+                    </a:lightRig>
+                  </a:scene3d>
+                  <a:sp3d>
+                    <a:bevelT w="25400" h="19050"/>
+                    <a:contourClr>
+                      <a:srgbClr val="FFFFFF"/>
+                    </a:contourClr>
+                  </a:sp3d>
+                </p:spPr>
+              </p:pic>
+            </p:grpSp>
+          </p:grpSp>
+          <p:sp>
+            <p:nvSpPr>
+              <p:cNvPr id="15616" name="Rectangle 15615">
+                <a:extLst>
+                  <a:ext uri="{FF2B5EF4-FFF2-40B4-BE49-F238E27FC236}">
+                    <a16:creationId xmlns:a16="http://schemas.microsoft.com/office/drawing/2014/main" id="{946783DC-D597-2C29-6191-5B3893CFCF5D}"/>
+                  </a:ext>
+                </a:extLst>
+              </p:cNvPr>
+              <p:cNvSpPr/>
+              <p:nvPr/>
+            </p:nvSpPr>
+            <p:spPr bwMode="auto">
+              <a:xfrm>
+                <a:off x="4019981" y="18563950"/>
+                <a:ext cx="1803026" cy="552682"/>
+              </a:xfrm>
+              <a:prstGeom prst="rect">
+                <a:avLst/>
+              </a:prstGeom>
+              <a:solidFill>
+                <a:srgbClr val="848484"/>
+              </a:solidFill>
+              <a:ln w="9525" cap="flat" cmpd="sng" algn="ctr">
+                <a:noFill/>
+                <a:prstDash val="solid"/>
+                <a:round/>
+                <a:headEnd type="none" w="med" len="med"/>
+                <a:tailEnd type="none" w="med" len="med"/>
+              </a:ln>
+              <a:effectLst/>
+            </p:spPr>
+            <p:txBody>
+              <a:bodyPr vert="horz" wrap="square" lIns="91440" tIns="45720" rIns="91440" bIns="45720" numCol="1" rtlCol="0" anchor="t" anchorCtr="0" compatLnSpc="1">
+                <a:prstTxWarp prst="textNoShape">
+                  <a:avLst/>
+                </a:prstTxWarp>
+              </a:bodyPr>
+              <a:lstStyle/>
+              <a:p>
+                <a:pPr marL="0" marR="0" indent="0" algn="l" defTabSz="4389438" rtl="0" eaLnBrk="1" fontAlgn="base" latinLnBrk="0" hangingPunct="1">
+                  <a:lnSpc>
+                    <a:spcPct val="100000"/>
+                  </a:lnSpc>
+                  <a:spcBef>
+                    <a:spcPct val="0"/>
+                  </a:spcBef>
+                  <a:spcAft>
+                    <a:spcPct val="0"/>
+                  </a:spcAft>
+                  <a:buClrTx/>
+                  <a:buSzTx/>
+                  <a:buFontTx/>
+                  <a:buNone/>
+                  <a:tabLst/>
+                </a:pPr>
+                <a:r>
+                  <a:rPr kumimoji="0" lang="en-US" sz="3000" b="0" i="0" u="none" strike="noStrike" cap="none" normalizeH="0" baseline="0" dirty="0">
+                    <a:ln>
+                      <a:noFill/>
+                    </a:ln>
+                    <a:solidFill>
+                      <a:schemeClr val="bg1"/>
+                    </a:solidFill>
+                    <a:effectLst/>
+                    <a:latin typeface="Arial" charset="0"/>
+                    <a:cs typeface="Arial" charset="0"/>
+                  </a:rPr>
+                  <a:t>Share $8</a:t>
+                </a:r>
+              </a:p>
+            </p:txBody>
+          </p:sp>
+          <p:sp>
+            <p:nvSpPr>
+              <p:cNvPr id="15618" name="Rectangle 15617">
+                <a:extLst>
+                  <a:ext uri="{FF2B5EF4-FFF2-40B4-BE49-F238E27FC236}">
+                    <a16:creationId xmlns:a16="http://schemas.microsoft.com/office/drawing/2014/main" id="{C6024063-9D2C-50D8-70B5-FC3D7C6F49F8}"/>
+                  </a:ext>
+                </a:extLst>
+              </p:cNvPr>
+              <p:cNvSpPr/>
+              <p:nvPr/>
+            </p:nvSpPr>
+            <p:spPr bwMode="auto">
+              <a:xfrm>
+                <a:off x="6502102" y="18568097"/>
+                <a:ext cx="1803026" cy="552682"/>
+              </a:xfrm>
+              <a:prstGeom prst="rect">
+                <a:avLst/>
+              </a:prstGeom>
+              <a:solidFill>
+                <a:srgbClr val="848484"/>
+              </a:solidFill>
+              <a:ln w="9525" cap="flat" cmpd="sng" algn="ctr">
+                <a:noFill/>
+                <a:prstDash val="solid"/>
+                <a:round/>
+                <a:headEnd type="none" w="med" len="med"/>
+                <a:tailEnd type="none" w="med" len="med"/>
+              </a:ln>
+              <a:effectLst/>
+            </p:spPr>
+            <p:txBody>
+              <a:bodyPr vert="horz" wrap="square" lIns="91440" tIns="45720" rIns="91440" bIns="45720" numCol="1" rtlCol="0" anchor="t" anchorCtr="0" compatLnSpc="1">
+                <a:prstTxWarp prst="textNoShape">
+                  <a:avLst/>
+                </a:prstTxWarp>
+              </a:bodyPr>
+              <a:lstStyle/>
+              <a:p>
+                <a:pPr marL="0" marR="0" indent="0" algn="l" defTabSz="4389438" rtl="0" eaLnBrk="1" fontAlgn="base" latinLnBrk="0" hangingPunct="1">
+                  <a:lnSpc>
+                    <a:spcPct val="100000"/>
+                  </a:lnSpc>
+                  <a:spcBef>
+                    <a:spcPct val="0"/>
+                  </a:spcBef>
+                  <a:spcAft>
+                    <a:spcPct val="0"/>
+                  </a:spcAft>
+                  <a:buClrTx/>
+                  <a:buSzTx/>
+                  <a:buFontTx/>
+                  <a:buNone/>
+                  <a:tabLst/>
+                </a:pPr>
+                <a:r>
+                  <a:rPr kumimoji="0" lang="en-US" sz="3000" b="0" i="0" u="none" strike="noStrike" cap="none" normalizeH="0" baseline="0" dirty="0">
+                    <a:ln>
+                      <a:noFill/>
+                    </a:ln>
+                    <a:solidFill>
+                      <a:schemeClr val="bg1"/>
+                    </a:solidFill>
+                    <a:effectLst/>
+                    <a:latin typeface="Arial" charset="0"/>
+                    <a:cs typeface="Arial" charset="0"/>
+                  </a:rPr>
+                  <a:t>Share $2</a:t>
+                </a:r>
+              </a:p>
+            </p:txBody>
+          </p:sp>
+          <p:sp>
+            <p:nvSpPr>
+              <p:cNvPr id="15619" name="Rectangle 15618">
+                <a:extLst>
+                  <a:ext uri="{FF2B5EF4-FFF2-40B4-BE49-F238E27FC236}">
+                    <a16:creationId xmlns:a16="http://schemas.microsoft.com/office/drawing/2014/main" id="{8EBB5886-1680-B3C7-DEC7-CD388B0CA60C}"/>
+                  </a:ext>
+                </a:extLst>
+              </p:cNvPr>
+              <p:cNvSpPr/>
+              <p:nvPr/>
+            </p:nvSpPr>
+            <p:spPr bwMode="auto">
+              <a:xfrm>
+                <a:off x="7005674" y="19674283"/>
+                <a:ext cx="1978245" cy="552682"/>
+              </a:xfrm>
+              <a:prstGeom prst="rect">
+                <a:avLst/>
+              </a:prstGeom>
+              <a:solidFill>
+                <a:srgbClr val="848484"/>
+              </a:solidFill>
+              <a:ln w="9525" cap="flat" cmpd="sng" algn="ctr">
+                <a:noFill/>
+                <a:prstDash val="solid"/>
+                <a:round/>
+                <a:headEnd type="none" w="med" len="med"/>
+                <a:tailEnd type="none" w="med" len="med"/>
+              </a:ln>
+              <a:effectLst/>
+            </p:spPr>
+            <p:txBody>
+              <a:bodyPr vert="horz" wrap="square" lIns="91440" tIns="45720" rIns="91440" bIns="45720" numCol="1" rtlCol="0" anchor="t" anchorCtr="0" compatLnSpc="1">
+                <a:prstTxWarp prst="textNoShape">
+                  <a:avLst/>
+                </a:prstTxWarp>
+              </a:bodyPr>
+              <a:lstStyle/>
+              <a:p>
+                <a:pPr marL="0" marR="0" indent="0" algn="l" defTabSz="4389438" rtl="0" eaLnBrk="1" fontAlgn="base" latinLnBrk="0" hangingPunct="1">
+                  <a:lnSpc>
+                    <a:spcPct val="100000"/>
+                  </a:lnSpc>
+                  <a:spcBef>
+                    <a:spcPct val="0"/>
+                  </a:spcBef>
+                  <a:spcAft>
+                    <a:spcPct val="0"/>
+                  </a:spcAft>
+                  <a:buClrTx/>
+                  <a:buSzTx/>
+                  <a:buFontTx/>
+                  <a:buNone/>
+                  <a:tabLst/>
+                </a:pPr>
+                <a:r>
+                  <a:rPr kumimoji="0" lang="en-US" sz="3000" b="0" i="0" u="none" strike="noStrike" cap="none" normalizeH="0" baseline="0" dirty="0">
+                    <a:ln>
+                      <a:noFill/>
+                    </a:ln>
+                    <a:solidFill>
+                      <a:schemeClr val="bg1"/>
+                    </a:solidFill>
+                    <a:effectLst/>
+                    <a:latin typeface="Arial" charset="0"/>
+                    <a:cs typeface="Arial" charset="0"/>
+                  </a:rPr>
+                  <a:t>Loading…</a:t>
+                </a:r>
+              </a:p>
+            </p:txBody>
+          </p:sp>
+          <p:sp>
+            <p:nvSpPr>
+              <p:cNvPr id="15620" name="Rectangle 15619">
+                <a:extLst>
+                  <a:ext uri="{FF2B5EF4-FFF2-40B4-BE49-F238E27FC236}">
+                    <a16:creationId xmlns:a16="http://schemas.microsoft.com/office/drawing/2014/main" id="{98A52E85-D70D-5398-4E75-D523A6EBBF49}"/>
+                  </a:ext>
+                </a:extLst>
+              </p:cNvPr>
+              <p:cNvSpPr/>
+              <p:nvPr/>
+            </p:nvSpPr>
+            <p:spPr bwMode="auto">
+              <a:xfrm>
+                <a:off x="9139048" y="21549198"/>
+                <a:ext cx="704737" cy="718761"/>
+              </a:xfrm>
+              <a:prstGeom prst="rect">
+                <a:avLst/>
+              </a:prstGeom>
+              <a:solidFill>
+                <a:srgbClr val="848484"/>
+              </a:solidFill>
+              <a:ln w="9525" cap="flat" cmpd="sng" algn="ctr">
+                <a:noFill/>
+                <a:prstDash val="solid"/>
+                <a:round/>
+                <a:headEnd type="none" w="med" len="med"/>
+                <a:tailEnd type="none" w="med" len="med"/>
+              </a:ln>
+              <a:effectLst/>
+            </p:spPr>
+            <p:txBody>
+              <a:bodyPr vert="horz" wrap="square" lIns="91440" tIns="45720" rIns="91440" bIns="45720" numCol="1" rtlCol="0" anchor="t" anchorCtr="0" compatLnSpc="1">
+                <a:prstTxWarp prst="textNoShape">
+                  <a:avLst/>
+                </a:prstTxWarp>
+              </a:bodyPr>
+              <a:lstStyle/>
+              <a:p>
+                <a:pPr marL="0" marR="0" indent="0" algn="ctr" defTabSz="4389438" rtl="0" eaLnBrk="1" fontAlgn="base" latinLnBrk="0" hangingPunct="1">
+                  <a:lnSpc>
+                    <a:spcPct val="100000"/>
+                  </a:lnSpc>
+                  <a:spcBef>
+                    <a:spcPct val="0"/>
+                  </a:spcBef>
+                  <a:spcAft>
+                    <a:spcPct val="0"/>
+                  </a:spcAft>
+                  <a:buClrTx/>
+                  <a:buSzTx/>
+                  <a:buFontTx/>
+                  <a:buNone/>
+                  <a:tabLst/>
+                </a:pPr>
+                <a:r>
+                  <a:rPr kumimoji="0" lang="en-US" sz="5000" b="0" i="0" u="none" strike="noStrike" cap="none" normalizeH="0" baseline="0" dirty="0">
+                    <a:ln>
+                      <a:noFill/>
+                    </a:ln>
+                    <a:solidFill>
+                      <a:schemeClr val="bg1"/>
+                    </a:solidFill>
+                    <a:effectLst/>
+                    <a:latin typeface="Arial" charset="0"/>
+                    <a:cs typeface="Arial" charset="0"/>
+                  </a:rPr>
+                  <a:t>+</a:t>
+                </a:r>
+              </a:p>
+            </p:txBody>
+          </p:sp>
+        </p:grpSp>
+        <p:sp>
+          <p:nvSpPr>
+            <p:cNvPr id="15429" name="Rounded Rectangle 15428">
+              <a:extLst>
+                <a:ext uri="{FF2B5EF4-FFF2-40B4-BE49-F238E27FC236}">
+                  <a16:creationId xmlns:a16="http://schemas.microsoft.com/office/drawing/2014/main" id="{4B7D9A17-B83C-E5E9-1709-3AF83FDD5AD6}"/>
+                </a:ext>
+              </a:extLst>
+            </p:cNvPr>
+            <p:cNvSpPr/>
+            <p:nvPr/>
+          </p:nvSpPr>
+          <p:spPr bwMode="auto">
+            <a:xfrm>
+              <a:off x="530502" y="15050793"/>
+              <a:ext cx="6101659" cy="707229"/>
+            </a:xfrm>
+            <a:prstGeom prst="roundRect">
+              <a:avLst/>
+            </a:prstGeom>
             <a:solidFill>
-              <a:schemeClr val="tx1"/>
+              <a:schemeClr val="accent1"/>
             </a:solidFill>
-            <a:prstDash val="solid"/>
-            <a:round/>
-            <a:headEnd type="none" w="med" len="med"/>
-            <a:tailEnd type="none" w="med" len="med"/>
-          </a:ln>
-          <a:effectLst/>
-        </p:spPr>
-        <p:txBody>
-          <a:bodyPr vert="horz" wrap="square" lIns="91440" tIns="45720" rIns="91440" bIns="45720" numCol="1" rtlCol="0" anchor="t" anchorCtr="0" compatLnSpc="1">
-            <a:prstTxWarp prst="textNoShape">
-              <a:avLst/>
-            </a:prstTxWarp>
-          </a:bodyPr>
-          <a:lstStyle/>
-          <a:p>
-            <a:pPr defTabSz="4389438" eaLnBrk="1" hangingPunct="1"/>
-            <a:r>
-              <a:rPr lang="en-US" sz="3000" dirty="0"/>
-              <a:t>Outcome Phase</a:t>
-            </a:r>
-          </a:p>
-          <a:p>
-            <a:pPr marL="0" marR="0" indent="0" algn="l" defTabSz="4389438" rtl="0" eaLnBrk="1" fontAlgn="base" latinLnBrk="0" hangingPunct="1">
-              <a:lnSpc>
-                <a:spcPct val="100000"/>
-              </a:lnSpc>
-              <a:spcBef>
-                <a:spcPct val="0"/>
-              </a:spcBef>
-              <a:spcAft>
-                <a:spcPct val="0"/>
-              </a:spcAft>
-              <a:buClrTx/>
-              <a:buSzTx/>
-              <a:buFontTx/>
-              <a:buNone/>
-              <a:tabLst/>
-            </a:pPr>
-            <a:endParaRPr kumimoji="0" lang="en-US" sz="1800" b="0" i="0" u="none" strike="noStrike" cap="none" normalizeH="0" baseline="0" dirty="0">
-              <a:ln>
-                <a:noFill/>
-              </a:ln>
+            <a:ln w="50800" cap="flat" cmpd="sng" algn="ctr">
               <a:solidFill>
                 <a:schemeClr val="tx1"/>
               </a:solidFill>
+              <a:prstDash val="solid"/>
+              <a:round/>
+              <a:headEnd type="none" w="med" len="med"/>
+              <a:tailEnd type="none" w="med" len="med"/>
+            </a:ln>
+            <a:effectLst/>
+          </p:spPr>
+          <p:txBody>
+            <a:bodyPr vert="horz" wrap="square" lIns="91440" tIns="45720" rIns="91440" bIns="45720" numCol="1" rtlCol="0" anchor="t" anchorCtr="0" compatLnSpc="1">
+              <a:prstTxWarp prst="textNoShape">
+                <a:avLst/>
+              </a:prstTxWarp>
+            </a:bodyPr>
+            <a:lstStyle/>
+            <a:p>
+              <a:pPr algn="ctr" defTabSz="4389438" eaLnBrk="1" hangingPunct="1"/>
+              <a:r>
+                <a:rPr lang="en-US" sz="3500" u="sng" dirty="0"/>
+                <a:t>You are given </a:t>
+              </a:r>
+              <a:r>
+                <a:rPr lang="en-US" sz="3500" b="1" u="sng" dirty="0"/>
+                <a:t>$8</a:t>
+              </a:r>
+              <a:r>
+                <a:rPr lang="en-US" sz="3500" u="sng" dirty="0"/>
+                <a:t> for the trial. </a:t>
+              </a:r>
+            </a:p>
+            <a:p>
+              <a:pPr marL="0" marR="0" indent="0" algn="l" defTabSz="4389438" rtl="0" eaLnBrk="1" fontAlgn="base" latinLnBrk="0" hangingPunct="1">
+                <a:lnSpc>
+                  <a:spcPct val="100000"/>
+                </a:lnSpc>
+                <a:spcBef>
+                  <a:spcPct val="0"/>
+                </a:spcBef>
+                <a:spcAft>
+                  <a:spcPct val="0"/>
+                </a:spcAft>
+                <a:buClrTx/>
+                <a:buSzTx/>
+                <a:buFontTx/>
+                <a:buNone/>
+                <a:tabLst/>
+              </a:pPr>
+              <a:endParaRPr kumimoji="0" lang="en-US" sz="1800" b="0" i="0" u="none" strike="noStrike" cap="none" normalizeH="0" baseline="0" dirty="0">
+                <a:ln>
+                  <a:noFill/>
+                </a:ln>
+                <a:solidFill>
+                  <a:schemeClr val="tx1"/>
+                </a:solidFill>
+                <a:effectLst/>
+                <a:latin typeface="Arial" charset="0"/>
+                <a:cs typeface="Arial" charset="0"/>
+              </a:endParaRPr>
+            </a:p>
+          </p:txBody>
+        </p:sp>
+        <p:grpSp>
+          <p:nvGrpSpPr>
+            <p:cNvPr id="15592" name="Group 15591">
+              <a:extLst>
+                <a:ext uri="{FF2B5EF4-FFF2-40B4-BE49-F238E27FC236}">
+                  <a16:creationId xmlns:a16="http://schemas.microsoft.com/office/drawing/2014/main" id="{415B0EBC-8379-F485-6113-E5DF57F87E19}"/>
+                </a:ext>
+              </a:extLst>
+            </p:cNvPr>
+            <p:cNvGrpSpPr/>
+            <p:nvPr/>
+          </p:nvGrpSpPr>
+          <p:grpSpPr>
+            <a:xfrm>
+              <a:off x="1977783" y="21512239"/>
+              <a:ext cx="4758168" cy="1323439"/>
+              <a:chOff x="1599411" y="21740839"/>
+              <a:chExt cx="4758168" cy="1323439"/>
+            </a:xfrm>
+          </p:grpSpPr>
+          <p:sp>
+            <p:nvSpPr>
+              <p:cNvPr id="52" name="TextBox 51">
+                <a:extLst>
+                  <a:ext uri="{FF2B5EF4-FFF2-40B4-BE49-F238E27FC236}">
+                    <a16:creationId xmlns:a16="http://schemas.microsoft.com/office/drawing/2014/main" id="{4707B45F-027B-576B-4808-66F0A5D95489}"/>
+                  </a:ext>
+                </a:extLst>
+              </p:cNvPr>
+              <p:cNvSpPr txBox="1"/>
+              <p:nvPr/>
+            </p:nvSpPr>
+            <p:spPr>
+              <a:xfrm>
+                <a:off x="5031575" y="21740839"/>
+                <a:ext cx="1326004" cy="1323439"/>
+              </a:xfrm>
+              <a:prstGeom prst="rect">
+                <a:avLst/>
+              </a:prstGeom>
+              <a:noFill/>
+            </p:spPr>
+            <p:txBody>
+              <a:bodyPr wrap="none" rtlCol="0">
+                <a:spAutoFit/>
+              </a:bodyPr>
+              <a:lstStyle/>
+              <a:p>
+                <a:r>
+                  <a:rPr lang="en-US" sz="8000" b="1" dirty="0">
+                    <a:solidFill>
+                      <a:srgbClr val="03DF04"/>
+                    </a:solidFill>
+                  </a:rPr>
+                  <a:t>x3</a:t>
+                </a:r>
+              </a:p>
+            </p:txBody>
+          </p:sp>
+          <p:sp>
+            <p:nvSpPr>
+              <p:cNvPr id="15433" name="Rounded Rectangle 15432">
+                <a:extLst>
+                  <a:ext uri="{FF2B5EF4-FFF2-40B4-BE49-F238E27FC236}">
+                    <a16:creationId xmlns:a16="http://schemas.microsoft.com/office/drawing/2014/main" id="{9D770554-0135-2E8B-9BC3-8228F9631C8A}"/>
+                  </a:ext>
+                </a:extLst>
+              </p:cNvPr>
+              <p:cNvSpPr/>
+              <p:nvPr/>
+            </p:nvSpPr>
+            <p:spPr bwMode="auto">
+              <a:xfrm>
+                <a:off x="1599411" y="21817902"/>
+                <a:ext cx="2967279" cy="1168944"/>
+              </a:xfrm>
+              <a:prstGeom prst="roundRect">
+                <a:avLst/>
+              </a:prstGeom>
+              <a:solidFill>
+                <a:schemeClr val="accent1"/>
+              </a:solidFill>
+              <a:ln w="50800" cap="flat" cmpd="sng" algn="ctr">
+                <a:solidFill>
+                  <a:schemeClr val="tx1"/>
+                </a:solidFill>
+                <a:prstDash val="solid"/>
+                <a:round/>
+                <a:headEnd type="none" w="med" len="med"/>
+                <a:tailEnd type="none" w="med" len="med"/>
+              </a:ln>
               <a:effectLst/>
-              <a:latin typeface="Arial" charset="0"/>
-              <a:cs typeface="Arial" charset="0"/>
-            </a:endParaRPr>
-          </a:p>
-        </p:txBody>
-      </p:sp>
+            </p:spPr>
+            <p:txBody>
+              <a:bodyPr vert="horz" wrap="square" lIns="91440" tIns="45720" rIns="91440" bIns="45720" numCol="1" rtlCol="0" anchor="t" anchorCtr="0" compatLnSpc="1">
+                <a:prstTxWarp prst="textNoShape">
+                  <a:avLst/>
+                </a:prstTxWarp>
+              </a:bodyPr>
+              <a:lstStyle/>
+              <a:p>
+                <a:pPr algn="ctr" defTabSz="4389438" eaLnBrk="1" hangingPunct="1"/>
+                <a:r>
+                  <a:rPr lang="en-US" sz="3000" dirty="0"/>
+                  <a:t>The money you  sent is tripled</a:t>
+                </a:r>
+              </a:p>
+              <a:p>
+                <a:pPr marL="0" marR="0" indent="0" algn="l" defTabSz="4389438" rtl="0" eaLnBrk="1" fontAlgn="base" latinLnBrk="0" hangingPunct="1">
+                  <a:lnSpc>
+                    <a:spcPct val="100000"/>
+                  </a:lnSpc>
+                  <a:spcBef>
+                    <a:spcPct val="0"/>
+                  </a:spcBef>
+                  <a:spcAft>
+                    <a:spcPct val="0"/>
+                  </a:spcAft>
+                  <a:buClrTx/>
+                  <a:buSzTx/>
+                  <a:buFontTx/>
+                  <a:buNone/>
+                  <a:tabLst/>
+                </a:pPr>
+                <a:endParaRPr kumimoji="0" lang="en-US" sz="1800" b="0" i="0" u="none" strike="noStrike" cap="none" normalizeH="0" baseline="0" dirty="0">
+                  <a:ln>
+                    <a:noFill/>
+                  </a:ln>
+                  <a:solidFill>
+                    <a:schemeClr val="tx1"/>
+                  </a:solidFill>
+                  <a:effectLst/>
+                  <a:latin typeface="Arial" charset="0"/>
+                  <a:cs typeface="Arial" charset="0"/>
+                </a:endParaRPr>
+              </a:p>
+            </p:txBody>
+          </p:sp>
+        </p:grpSp>
+        <p:grpSp>
+          <p:nvGrpSpPr>
+            <p:cNvPr id="15490" name="Group 15489">
+              <a:extLst>
+                <a:ext uri="{FF2B5EF4-FFF2-40B4-BE49-F238E27FC236}">
+                  <a16:creationId xmlns:a16="http://schemas.microsoft.com/office/drawing/2014/main" id="{26CF14B9-FE18-01D5-1A0A-E19BE8376A0A}"/>
+                </a:ext>
+              </a:extLst>
+            </p:cNvPr>
+            <p:cNvGrpSpPr/>
+            <p:nvPr/>
+          </p:nvGrpSpPr>
+          <p:grpSpPr>
+            <a:xfrm>
+              <a:off x="530502" y="18979791"/>
+              <a:ext cx="4534151" cy="2464546"/>
+              <a:chOff x="533974" y="18532980"/>
+              <a:chExt cx="4534151" cy="2464546"/>
+            </a:xfrm>
+          </p:grpSpPr>
+          <p:sp>
+            <p:nvSpPr>
+              <p:cNvPr id="15432" name="Rounded Rectangle 15431">
+                <a:extLst>
+                  <a:ext uri="{FF2B5EF4-FFF2-40B4-BE49-F238E27FC236}">
+                    <a16:creationId xmlns:a16="http://schemas.microsoft.com/office/drawing/2014/main" id="{29E5F4B4-9ECB-A12A-6B3F-C0855A0CDE34}"/>
+                  </a:ext>
+                </a:extLst>
+              </p:cNvPr>
+              <p:cNvSpPr/>
+              <p:nvPr/>
+            </p:nvSpPr>
+            <p:spPr bwMode="auto">
+              <a:xfrm>
+                <a:off x="533974" y="19334093"/>
+                <a:ext cx="4534151" cy="1663433"/>
+              </a:xfrm>
+              <a:prstGeom prst="roundRect">
+                <a:avLst/>
+              </a:prstGeom>
+              <a:solidFill>
+                <a:schemeClr val="accent1"/>
+              </a:solidFill>
+              <a:ln w="50800" cap="flat" cmpd="sng" algn="ctr">
+                <a:solidFill>
+                  <a:schemeClr val="tx1"/>
+                </a:solidFill>
+                <a:prstDash val="solid"/>
+                <a:round/>
+                <a:headEnd type="none" w="med" len="med"/>
+                <a:tailEnd type="none" w="med" len="med"/>
+              </a:ln>
+              <a:effectLst/>
+            </p:spPr>
+            <p:txBody>
+              <a:bodyPr vert="horz" wrap="square" lIns="91440" tIns="45720" rIns="91440" bIns="45720" numCol="1" rtlCol="0" anchor="t" anchorCtr="0" compatLnSpc="1">
+                <a:prstTxWarp prst="textNoShape">
+                  <a:avLst/>
+                </a:prstTxWarp>
+              </a:bodyPr>
+              <a:lstStyle/>
+              <a:p>
+                <a:pPr algn="ctr" defTabSz="4389438" eaLnBrk="1" hangingPunct="1"/>
+                <a:r>
+                  <a:rPr lang="en-US" sz="3000" dirty="0"/>
+                  <a:t>You choose a higher or lower amount to share with your partner.</a:t>
+                </a:r>
+              </a:p>
+              <a:p>
+                <a:pPr marL="0" marR="0" indent="0" algn="l" defTabSz="4389438" rtl="0" eaLnBrk="1" fontAlgn="base" latinLnBrk="0" hangingPunct="1">
+                  <a:lnSpc>
+                    <a:spcPct val="100000"/>
+                  </a:lnSpc>
+                  <a:spcBef>
+                    <a:spcPct val="0"/>
+                  </a:spcBef>
+                  <a:spcAft>
+                    <a:spcPct val="0"/>
+                  </a:spcAft>
+                  <a:buClrTx/>
+                  <a:buSzTx/>
+                  <a:buFontTx/>
+                  <a:buNone/>
+                  <a:tabLst/>
+                </a:pPr>
+                <a:endParaRPr kumimoji="0" lang="en-US" sz="1800" b="0" i="0" u="none" strike="noStrike" cap="none" normalizeH="0" baseline="0" dirty="0">
+                  <a:ln>
+                    <a:noFill/>
+                  </a:ln>
+                  <a:solidFill>
+                    <a:schemeClr val="tx1"/>
+                  </a:solidFill>
+                  <a:effectLst/>
+                  <a:latin typeface="Arial" charset="0"/>
+                  <a:cs typeface="Arial" charset="0"/>
+                </a:endParaRPr>
+              </a:p>
+            </p:txBody>
+          </p:sp>
+          <p:cxnSp>
+            <p:nvCxnSpPr>
+              <p:cNvPr id="15442" name="Elbow Connector 15441">
+                <a:extLst>
+                  <a:ext uri="{FF2B5EF4-FFF2-40B4-BE49-F238E27FC236}">
+                    <a16:creationId xmlns:a16="http://schemas.microsoft.com/office/drawing/2014/main" id="{FD357802-D2BB-A2AC-2582-D36E431D92F1}"/>
+                  </a:ext>
+                </a:extLst>
+              </p:cNvPr>
+              <p:cNvCxnSpPr>
+                <a:cxnSpLocks/>
+              </p:cNvCxnSpPr>
+              <p:nvPr/>
+            </p:nvCxnSpPr>
+            <p:spPr bwMode="auto">
+              <a:xfrm flipV="1">
+                <a:off x="2361558" y="18532980"/>
+                <a:ext cx="953880" cy="801113"/>
+              </a:xfrm>
+              <a:prstGeom prst="bentConnector3">
+                <a:avLst>
+                  <a:gd name="adj1" fmla="val -3922"/>
+                </a:avLst>
+              </a:prstGeom>
+              <a:solidFill>
+                <a:schemeClr val="accent1"/>
+              </a:solidFill>
+              <a:ln w="50800" cap="flat" cmpd="sng" algn="ctr">
+                <a:solidFill>
+                  <a:schemeClr val="tx1"/>
+                </a:solidFill>
+                <a:prstDash val="solid"/>
+                <a:round/>
+                <a:headEnd type="none" w="med" len="med"/>
+                <a:tailEnd type="triangle"/>
+              </a:ln>
+              <a:effectLst/>
+            </p:spPr>
+          </p:cxnSp>
+        </p:grpSp>
+        <p:grpSp>
+          <p:nvGrpSpPr>
+            <p:cNvPr id="15538" name="Group 15537">
+              <a:extLst>
+                <a:ext uri="{FF2B5EF4-FFF2-40B4-BE49-F238E27FC236}">
+                  <a16:creationId xmlns:a16="http://schemas.microsoft.com/office/drawing/2014/main" id="{4ABA81B2-5B67-77D2-5517-08033E19241B}"/>
+                </a:ext>
+              </a:extLst>
+            </p:cNvPr>
+            <p:cNvGrpSpPr/>
+            <p:nvPr/>
+          </p:nvGrpSpPr>
+          <p:grpSpPr>
+            <a:xfrm>
+              <a:off x="1364527" y="16818784"/>
+              <a:ext cx="3578072" cy="1569660"/>
+              <a:chOff x="1398495" y="16644992"/>
+              <a:chExt cx="3578072" cy="1569660"/>
+            </a:xfrm>
+          </p:grpSpPr>
+          <p:sp>
+            <p:nvSpPr>
+              <p:cNvPr id="15528" name="Rounded Rectangle 15527">
+                <a:extLst>
+                  <a:ext uri="{FF2B5EF4-FFF2-40B4-BE49-F238E27FC236}">
+                    <a16:creationId xmlns:a16="http://schemas.microsoft.com/office/drawing/2014/main" id="{AD2DBFD4-1DD0-D27D-7CB0-35408A9E32E4}"/>
+                  </a:ext>
+                </a:extLst>
+              </p:cNvPr>
+              <p:cNvSpPr/>
+              <p:nvPr/>
+            </p:nvSpPr>
+            <p:spPr bwMode="auto">
+              <a:xfrm>
+                <a:off x="1398495" y="16644992"/>
+                <a:ext cx="1947439" cy="1569660"/>
+              </a:xfrm>
+              <a:prstGeom prst="roundRect">
+                <a:avLst/>
+              </a:prstGeom>
+              <a:solidFill>
+                <a:schemeClr val="accent1"/>
+              </a:solidFill>
+              <a:ln w="50800" cap="flat" cmpd="sng" algn="ctr">
+                <a:solidFill>
+                  <a:schemeClr val="tx1"/>
+                </a:solidFill>
+                <a:prstDash val="solid"/>
+                <a:round/>
+                <a:headEnd type="none" w="med" len="med"/>
+                <a:tailEnd type="none" w="med" len="med"/>
+              </a:ln>
+              <a:effectLst/>
+            </p:spPr>
+            <p:txBody>
+              <a:bodyPr vert="horz" wrap="square" lIns="91440" tIns="45720" rIns="91440" bIns="45720" numCol="1" rtlCol="0" anchor="t" anchorCtr="0" compatLnSpc="1">
+                <a:prstTxWarp prst="textNoShape">
+                  <a:avLst/>
+                </a:prstTxWarp>
+              </a:bodyPr>
+              <a:lstStyle/>
+              <a:p>
+                <a:pPr algn="ctr" defTabSz="4389438" eaLnBrk="1" hangingPunct="1"/>
+                <a:r>
+                  <a:rPr lang="en-US" sz="3000" dirty="0"/>
+                  <a:t>You are assigned a partner.</a:t>
+                </a:r>
+              </a:p>
+              <a:p>
+                <a:pPr marL="0" marR="0" indent="0" algn="l" defTabSz="4389438" rtl="0" eaLnBrk="1" fontAlgn="base" latinLnBrk="0" hangingPunct="1">
+                  <a:lnSpc>
+                    <a:spcPct val="100000"/>
+                  </a:lnSpc>
+                  <a:spcBef>
+                    <a:spcPct val="0"/>
+                  </a:spcBef>
+                  <a:spcAft>
+                    <a:spcPct val="0"/>
+                  </a:spcAft>
+                  <a:buClrTx/>
+                  <a:buSzTx/>
+                  <a:buFontTx/>
+                  <a:buNone/>
+                  <a:tabLst/>
+                </a:pPr>
+                <a:endParaRPr kumimoji="0" lang="en-US" sz="1800" b="0" i="0" u="none" strike="noStrike" cap="none" normalizeH="0" baseline="0" dirty="0">
+                  <a:ln>
+                    <a:noFill/>
+                  </a:ln>
+                  <a:solidFill>
+                    <a:schemeClr val="tx1"/>
+                  </a:solidFill>
+                  <a:effectLst/>
+                  <a:latin typeface="Arial" charset="0"/>
+                  <a:cs typeface="Arial" charset="0"/>
+                </a:endParaRPr>
+              </a:p>
+            </p:txBody>
+          </p:sp>
+          <p:cxnSp>
+            <p:nvCxnSpPr>
+              <p:cNvPr id="15537" name="Straight Arrow Connector 15536">
+                <a:extLst>
+                  <a:ext uri="{FF2B5EF4-FFF2-40B4-BE49-F238E27FC236}">
+                    <a16:creationId xmlns:a16="http://schemas.microsoft.com/office/drawing/2014/main" id="{7A1CFB10-A83A-AA5A-7CB9-EC39B260985E}"/>
+                  </a:ext>
+                </a:extLst>
+              </p:cNvPr>
+              <p:cNvCxnSpPr>
+                <a:cxnSpLocks/>
+                <a:stCxn id="15528" idx="3"/>
+              </p:cNvCxnSpPr>
+              <p:nvPr/>
+            </p:nvCxnSpPr>
+            <p:spPr bwMode="auto">
+              <a:xfrm>
+                <a:off x="3345934" y="17429822"/>
+                <a:ext cx="1630633" cy="0"/>
+              </a:xfrm>
+              <a:prstGeom prst="straightConnector1">
+                <a:avLst/>
+              </a:prstGeom>
+              <a:solidFill>
+                <a:schemeClr val="accent1"/>
+              </a:solidFill>
+              <a:ln w="50800" cap="flat" cmpd="sng" algn="ctr">
+                <a:solidFill>
+                  <a:schemeClr val="tx1"/>
+                </a:solidFill>
+                <a:prstDash val="solid"/>
+                <a:round/>
+                <a:headEnd type="none" w="med" len="med"/>
+                <a:tailEnd type="triangle"/>
+              </a:ln>
+              <a:effectLst/>
+            </p:spPr>
+          </p:cxnSp>
+        </p:grpSp>
+        <p:sp>
+          <p:nvSpPr>
+            <p:cNvPr id="15542" name="Rounded Rectangle 15541">
+              <a:extLst>
+                <a:ext uri="{FF2B5EF4-FFF2-40B4-BE49-F238E27FC236}">
+                  <a16:creationId xmlns:a16="http://schemas.microsoft.com/office/drawing/2014/main" id="{F919F17A-D127-CAD0-86F8-9896BB472FB5}"/>
+                </a:ext>
+              </a:extLst>
+            </p:cNvPr>
+            <p:cNvSpPr/>
+            <p:nvPr/>
+          </p:nvSpPr>
+          <p:spPr bwMode="auto">
+            <a:xfrm>
+              <a:off x="1019445" y="25077499"/>
+              <a:ext cx="2843041" cy="764088"/>
+            </a:xfrm>
+            <a:prstGeom prst="roundRect">
+              <a:avLst/>
+            </a:prstGeom>
+            <a:solidFill>
+              <a:schemeClr val="accent1"/>
+            </a:solidFill>
+            <a:ln w="50800" cap="flat" cmpd="sng" algn="ctr">
+              <a:solidFill>
+                <a:schemeClr val="tx1"/>
+              </a:solidFill>
+              <a:prstDash val="solid"/>
+              <a:round/>
+              <a:headEnd type="none" w="med" len="med"/>
+              <a:tailEnd type="none" w="med" len="med"/>
+            </a:ln>
+            <a:effectLst/>
+          </p:spPr>
+          <p:txBody>
+            <a:bodyPr vert="horz" wrap="square" lIns="91440" tIns="45720" rIns="91440" bIns="45720" numCol="1" rtlCol="0" anchor="t" anchorCtr="0" compatLnSpc="1">
+              <a:prstTxWarp prst="textNoShape">
+                <a:avLst/>
+              </a:prstTxWarp>
+            </a:bodyPr>
+            <a:lstStyle/>
+            <a:p>
+              <a:pPr algn="ctr" defTabSz="4389438" eaLnBrk="1" hangingPunct="1"/>
+              <a:r>
+                <a:rPr lang="en-US" sz="4000" u="sng" dirty="0"/>
+                <a:t>End of trial</a:t>
+              </a:r>
+            </a:p>
+            <a:p>
+              <a:pPr marL="0" marR="0" indent="0" algn="l" defTabSz="4389438" rtl="0" eaLnBrk="1" fontAlgn="base" latinLnBrk="0" hangingPunct="1">
+                <a:lnSpc>
+                  <a:spcPct val="100000"/>
+                </a:lnSpc>
+                <a:spcBef>
+                  <a:spcPct val="0"/>
+                </a:spcBef>
+                <a:spcAft>
+                  <a:spcPct val="0"/>
+                </a:spcAft>
+                <a:buClrTx/>
+                <a:buSzTx/>
+                <a:buFontTx/>
+                <a:buNone/>
+                <a:tabLst/>
+              </a:pPr>
+              <a:endParaRPr kumimoji="0" lang="en-US" sz="1800" b="0" i="0" u="none" strike="noStrike" cap="none" normalizeH="0" baseline="0" dirty="0">
+                <a:ln>
+                  <a:noFill/>
+                </a:ln>
+                <a:solidFill>
+                  <a:schemeClr val="tx1"/>
+                </a:solidFill>
+                <a:effectLst/>
+                <a:latin typeface="Arial" charset="0"/>
+                <a:cs typeface="Arial" charset="0"/>
+              </a:endParaRPr>
+            </a:p>
+          </p:txBody>
+        </p:sp>
+        <p:sp>
+          <p:nvSpPr>
+            <p:cNvPr id="15667" name="Rounded Rectangle 15666">
+              <a:extLst>
+                <a:ext uri="{FF2B5EF4-FFF2-40B4-BE49-F238E27FC236}">
+                  <a16:creationId xmlns:a16="http://schemas.microsoft.com/office/drawing/2014/main" id="{A04AF92B-DBCA-68B5-49E1-F021F79663D4}"/>
+                </a:ext>
+              </a:extLst>
+            </p:cNvPr>
+            <p:cNvSpPr/>
+            <p:nvPr/>
+          </p:nvSpPr>
+          <p:spPr bwMode="auto">
+            <a:xfrm>
+              <a:off x="882727" y="23270530"/>
+              <a:ext cx="3102910" cy="655177"/>
+            </a:xfrm>
+            <a:prstGeom prst="roundRect">
+              <a:avLst/>
+            </a:prstGeom>
+            <a:solidFill>
+              <a:schemeClr val="accent1"/>
+            </a:solidFill>
+            <a:ln w="50800" cap="flat" cmpd="sng" algn="ctr">
+              <a:solidFill>
+                <a:schemeClr val="tx1"/>
+              </a:solidFill>
+              <a:prstDash val="solid"/>
+              <a:round/>
+              <a:headEnd type="none" w="med" len="med"/>
+              <a:tailEnd type="none" w="med" len="med"/>
+            </a:ln>
+            <a:effectLst/>
+          </p:spPr>
+          <p:txBody>
+            <a:bodyPr vert="horz" wrap="square" lIns="91440" tIns="45720" rIns="91440" bIns="45720" numCol="1" rtlCol="0" anchor="t" anchorCtr="0" compatLnSpc="1">
+              <a:prstTxWarp prst="textNoShape">
+                <a:avLst/>
+              </a:prstTxWarp>
+            </a:bodyPr>
+            <a:lstStyle/>
+            <a:p>
+              <a:pPr algn="ctr" defTabSz="4389438" eaLnBrk="1" hangingPunct="1"/>
+              <a:r>
+                <a:rPr lang="en-US" sz="3000" dirty="0"/>
+                <a:t>Outcome Phase</a:t>
+              </a:r>
+            </a:p>
+            <a:p>
+              <a:pPr marL="0" marR="0" indent="0" algn="l" defTabSz="4389438" rtl="0" eaLnBrk="1" fontAlgn="base" latinLnBrk="0" hangingPunct="1">
+                <a:lnSpc>
+                  <a:spcPct val="100000"/>
+                </a:lnSpc>
+                <a:spcBef>
+                  <a:spcPct val="0"/>
+                </a:spcBef>
+                <a:spcAft>
+                  <a:spcPct val="0"/>
+                </a:spcAft>
+                <a:buClrTx/>
+                <a:buSzTx/>
+                <a:buFontTx/>
+                <a:buNone/>
+                <a:tabLst/>
+              </a:pPr>
+              <a:endParaRPr kumimoji="0" lang="en-US" sz="1800" b="0" i="0" u="none" strike="noStrike" cap="none" normalizeH="0" baseline="0" dirty="0">
+                <a:ln>
+                  <a:noFill/>
+                </a:ln>
+                <a:solidFill>
+                  <a:schemeClr val="tx1"/>
+                </a:solidFill>
+                <a:effectLst/>
+                <a:latin typeface="Arial" charset="0"/>
+                <a:cs typeface="Arial" charset="0"/>
+              </a:endParaRPr>
+            </a:p>
+          </p:txBody>
+        </p:sp>
+      </p:grpSp>
       <p:sp>
         <p:nvSpPr>
           <p:cNvPr id="15668" name="Rectangle 15667">
@@ -10508,7 +10181,7 @@
         </p:nvSpPr>
         <p:spPr bwMode="auto">
           <a:xfrm>
-            <a:off x="5259549" y="17607220"/>
+            <a:off x="5104022" y="15429243"/>
             <a:ext cx="1984189" cy="552682"/>
           </a:xfrm>
           <a:prstGeom prst="rect">
@@ -10581,10 +10254,10 @@
         </p:nvGrpSpPr>
         <p:grpSpPr>
           <a:xfrm>
-            <a:off x="30977262" y="15791162"/>
-            <a:ext cx="6023828" cy="5608210"/>
-            <a:chOff x="30686058" y="13981673"/>
-            <a:chExt cx="6377623" cy="5937595"/>
+            <a:off x="30819542" y="17309793"/>
+            <a:ext cx="4527522" cy="4489996"/>
+            <a:chOff x="30483851" y="13427301"/>
+            <a:chExt cx="6579830" cy="7050823"/>
           </a:xfrm>
         </p:grpSpPr>
         <p:pic>
@@ -10637,8 +10310,8 @@
           </p:nvSpPr>
           <p:spPr>
             <a:xfrm>
-              <a:off x="30756135" y="13981673"/>
-              <a:ext cx="1539204" cy="707886"/>
+              <a:off x="30697537" y="13427301"/>
+              <a:ext cx="1827439" cy="987985"/>
             </a:xfrm>
             <a:prstGeom prst="rect">
               <a:avLst/>
@@ -10653,7 +10326,7 @@
             <a:p>
               <a:r>
                 <a:rPr lang="en-US" sz="4000" dirty="0"/>
-                <a:t>X= 83</a:t>
+                <a:t>X= -8</a:t>
               </a:r>
             </a:p>
           </p:txBody>
@@ -10672,8 +10345,8 @@
           </p:nvSpPr>
           <p:spPr>
             <a:xfrm>
-              <a:off x="30741892" y="19334493"/>
-              <a:ext cx="1253639" cy="584775"/>
+              <a:off x="30483851" y="19661963"/>
+              <a:ext cx="2587045" cy="816161"/>
             </a:xfrm>
             <a:prstGeom prst="rect">
               <a:avLst/>
@@ -10687,11 +10360,10 @@
             <a:lstStyle/>
             <a:p>
               <a:r>
-                <a:rPr lang="en-US" sz="3200" b="1" dirty="0">
+                <a:rPr lang="en-US" sz="3200" b="1" dirty="0" err="1">
                   <a:latin typeface="Helvetica"/>
-                  <a:ea typeface="MS PGothic"/>
                 </a:rPr>
-                <a:t>ACC</a:t>
+                <a:t>mPFC</a:t>
               </a:r>
               <a:endParaRPr lang="en-US" sz="3200" b="1" dirty="0">
                 <a:latin typeface="Helvetica"/>
@@ -10714,10 +10386,10 @@
         </p:nvGrpSpPr>
         <p:grpSpPr>
           <a:xfrm>
-            <a:off x="30895084" y="6346347"/>
-            <a:ext cx="6343779" cy="6015975"/>
-            <a:chOff x="30935268" y="5248472"/>
-            <a:chExt cx="5920597" cy="5456124"/>
+            <a:off x="30900627" y="6464838"/>
+            <a:ext cx="4333451" cy="4397738"/>
+            <a:chOff x="30936691" y="4524097"/>
+            <a:chExt cx="5919174" cy="6592361"/>
           </a:xfrm>
         </p:grpSpPr>
         <p:pic>
@@ -10770,7 +10442,7 @@
           </p:nvSpPr>
           <p:spPr>
             <a:xfrm>
-              <a:off x="30935268" y="5248472"/>
+              <a:off x="30952727" y="4524097"/>
               <a:ext cx="1539203" cy="707886"/>
             </a:xfrm>
             <a:prstGeom prst="rect">
@@ -10805,8 +10477,8 @@
           </p:nvSpPr>
           <p:spPr>
             <a:xfrm>
-              <a:off x="31039479" y="10119821"/>
-              <a:ext cx="1253639" cy="584775"/>
+              <a:off x="30936691" y="10239860"/>
+              <a:ext cx="2517094" cy="876598"/>
             </a:xfrm>
             <a:prstGeom prst="rect">
               <a:avLst/>
@@ -10820,11 +10492,10 @@
             <a:lstStyle/>
             <a:p>
               <a:r>
-                <a:rPr lang="en-US" sz="3200" b="1" dirty="0">
+                <a:rPr lang="en-US" sz="3200" b="1" dirty="0" err="1">
                   <a:latin typeface="Helvetica"/>
-                  <a:ea typeface="MS PGothic"/>
                 </a:rPr>
-                <a:t>MFG</a:t>
+                <a:t>dlPFC</a:t>
               </a:r>
               <a:endParaRPr lang="en-US" sz="3200" b="1" dirty="0">
                 <a:latin typeface="Helvetica"/>
@@ -10847,7 +10518,7 @@
         </p:nvSpPr>
         <p:spPr>
           <a:xfrm>
-            <a:off x="30959587" y="5453496"/>
+            <a:off x="31019416" y="4697710"/>
             <a:ext cx="9097362" cy="584775"/>
           </a:xfrm>
           <a:prstGeom prst="rect">
@@ -10895,8 +10566,8 @@
         </p:nvSpPr>
         <p:spPr>
           <a:xfrm>
-            <a:off x="30990882" y="14863809"/>
-            <a:ext cx="8850500" cy="584775"/>
+            <a:off x="34641901" y="15025102"/>
+            <a:ext cx="9086342" cy="584775"/>
           </a:xfrm>
           <a:prstGeom prst="rect">
             <a:avLst/>
@@ -10904,7 +10575,7 @@
           <a:noFill/>
         </p:spPr>
         <p:txBody>
-          <a:bodyPr wrap="none" rtlCol="0">
+          <a:bodyPr wrap="square" rtlCol="0">
             <a:spAutoFit/>
           </a:bodyPr>
           <a:lstStyle/>
@@ -10937,7 +10608,7 @@
         </p:nvSpPr>
         <p:spPr>
           <a:xfrm>
-            <a:off x="30959587" y="12699509"/>
+            <a:off x="30959587" y="12969017"/>
             <a:ext cx="12062344" cy="1015663"/>
           </a:xfrm>
           <a:prstGeom prst="rect">
@@ -10951,7 +10622,7 @@
           </a:bodyPr>
           <a:lstStyle/>
           <a:p>
-            <a:pPr algn="l"/>
+            <a:pPr algn="ctr"/>
             <a:r>
               <a:rPr lang="en-US" sz="3000" i="0" dirty="0">
                 <a:effectLst/>
@@ -10976,8 +10647,8 @@
         </p:nvGrpSpPr>
         <p:grpSpPr>
           <a:xfrm>
-            <a:off x="23053763" y="15328939"/>
-            <a:ext cx="6729801" cy="7219447"/>
+            <a:off x="22241892" y="22389514"/>
+            <a:ext cx="7672050" cy="8491864"/>
             <a:chOff x="23053763" y="15328939"/>
             <a:chExt cx="6729801" cy="7219447"/>
           </a:xfrm>
@@ -11345,749 +11016,6 @@
       </p:grpSp>
       <p:grpSp>
         <p:nvGrpSpPr>
-          <p:cNvPr id="15735" name="Group 15734">
-            <a:extLst>
-              <a:ext uri="{FF2B5EF4-FFF2-40B4-BE49-F238E27FC236}">
-                <a16:creationId xmlns:a16="http://schemas.microsoft.com/office/drawing/2014/main" id="{26911986-CCEA-2FCE-3DA3-E5B9ED9DE211}"/>
-              </a:ext>
-            </a:extLst>
-          </p:cNvPr>
-          <p:cNvGrpSpPr/>
-          <p:nvPr/>
-        </p:nvGrpSpPr>
-        <p:grpSpPr>
-          <a:xfrm>
-            <a:off x="23087465" y="23975816"/>
-            <a:ext cx="6524991" cy="6955685"/>
-            <a:chOff x="23087465" y="23975816"/>
-            <a:chExt cx="6524991" cy="6955685"/>
-          </a:xfrm>
-        </p:grpSpPr>
-        <p:grpSp>
-          <p:nvGrpSpPr>
-            <p:cNvPr id="15706" name="Group 15705">
-              <a:extLst>
-                <a:ext uri="{FF2B5EF4-FFF2-40B4-BE49-F238E27FC236}">
-                  <a16:creationId xmlns:a16="http://schemas.microsoft.com/office/drawing/2014/main" id="{63D4B78D-7F21-5B28-EC21-6939303B0C92}"/>
-                </a:ext>
-              </a:extLst>
-            </p:cNvPr>
-            <p:cNvGrpSpPr/>
-            <p:nvPr/>
-          </p:nvGrpSpPr>
-          <p:grpSpPr>
-            <a:xfrm>
-              <a:off x="23087465" y="23975816"/>
-              <a:ext cx="6524991" cy="6955685"/>
-              <a:chOff x="23087465" y="23975816"/>
-              <a:chExt cx="6524991" cy="6955685"/>
-            </a:xfrm>
-          </p:grpSpPr>
-          <p:grpSp>
-            <p:nvGrpSpPr>
-              <p:cNvPr id="15703" name="Group 15702">
-                <a:extLst>
-                  <a:ext uri="{FF2B5EF4-FFF2-40B4-BE49-F238E27FC236}">
-                    <a16:creationId xmlns:a16="http://schemas.microsoft.com/office/drawing/2014/main" id="{2795A3AF-A7CF-294E-F9B5-08AB686B1E17}"/>
-                  </a:ext>
-                </a:extLst>
-              </p:cNvPr>
-              <p:cNvGrpSpPr/>
-              <p:nvPr/>
-            </p:nvGrpSpPr>
-            <p:grpSpPr>
-              <a:xfrm>
-                <a:off x="23087465" y="23975816"/>
-                <a:ext cx="6524991" cy="6955685"/>
-                <a:chOff x="23087465" y="23975816"/>
-                <a:chExt cx="6524991" cy="6955685"/>
-              </a:xfrm>
-            </p:grpSpPr>
-            <p:pic>
-              <p:nvPicPr>
-                <p:cNvPr id="15642" name="Graphic 15641">
-                  <a:extLst>
-                    <a:ext uri="{FF2B5EF4-FFF2-40B4-BE49-F238E27FC236}">
-                      <a16:creationId xmlns:a16="http://schemas.microsoft.com/office/drawing/2014/main" id="{38CF2D33-CDB3-BF29-CD2F-1AA0F4A194EC}"/>
-                    </a:ext>
-                  </a:extLst>
-                </p:cNvPr>
-                <p:cNvPicPr>
-                  <a:picLocks noChangeAspect="1"/>
-                </p:cNvPicPr>
-                <p:nvPr/>
-              </p:nvPicPr>
-              <p:blipFill rotWithShape="1">
-                <a:blip r:embed="rId21">
-                  <a:extLst>
-                    <a:ext uri="{28A0092B-C50C-407E-A947-70E740481C1C}">
-                      <a14:useLocalDpi xmlns:a14="http://schemas.microsoft.com/office/drawing/2010/main" val="0"/>
-                    </a:ext>
-                    <a:ext uri="{96DAC541-7B7A-43D3-8B79-37D633B846F1}">
-                      <asvg:svgBlip xmlns:asvg="http://schemas.microsoft.com/office/drawing/2016/SVG/main" r:embed="rId22"/>
-                    </a:ext>
-                  </a:extLst>
-                </a:blip>
-                <a:srcRect l="10991" t="5046" r="3126" b="7756"/>
-                <a:stretch/>
-              </p:blipFill>
-              <p:spPr>
-                <a:xfrm>
-                  <a:off x="23723984" y="23975816"/>
-                  <a:ext cx="5888472" cy="6200049"/>
-                </a:xfrm>
-                <a:prstGeom prst="rect">
-                  <a:avLst/>
-                </a:prstGeom>
-              </p:spPr>
-            </p:pic>
-            <p:sp>
-              <p:nvSpPr>
-                <p:cNvPr id="15697" name="TextBox 15696">
-                  <a:extLst>
-                    <a:ext uri="{FF2B5EF4-FFF2-40B4-BE49-F238E27FC236}">
-                      <a16:creationId xmlns:a16="http://schemas.microsoft.com/office/drawing/2014/main" id="{7E37C853-4C65-27FE-3737-304A023FEAD6}"/>
-                    </a:ext>
-                  </a:extLst>
-                </p:cNvPr>
-                <p:cNvSpPr txBox="1"/>
-                <p:nvPr/>
-              </p:nvSpPr>
-              <p:spPr>
-                <a:xfrm>
-                  <a:off x="25810594" y="30223615"/>
-                  <a:ext cx="1096775" cy="707886"/>
-                </a:xfrm>
-                <a:prstGeom prst="rect">
-                  <a:avLst/>
-                </a:prstGeom>
-                <a:noFill/>
-              </p:spPr>
-              <p:txBody>
-                <a:bodyPr wrap="square" rtlCol="0">
-                  <a:spAutoFit/>
-                </a:bodyPr>
-                <a:lstStyle/>
-                <a:p>
-                  <a:r>
-                    <a:rPr lang="en-US" sz="4000" dirty="0"/>
-                    <a:t>Age</a:t>
-                  </a:r>
-                </a:p>
-              </p:txBody>
-            </p:sp>
-            <p:sp>
-              <p:nvSpPr>
-                <p:cNvPr id="15699" name="TextBox 15698">
-                  <a:extLst>
-                    <a:ext uri="{FF2B5EF4-FFF2-40B4-BE49-F238E27FC236}">
-                      <a16:creationId xmlns:a16="http://schemas.microsoft.com/office/drawing/2014/main" id="{CFC48A4A-F5C7-919B-B216-050A47D2A73D}"/>
-                    </a:ext>
-                  </a:extLst>
-                </p:cNvPr>
-                <p:cNvSpPr txBox="1"/>
-                <p:nvPr/>
-              </p:nvSpPr>
-              <p:spPr>
-                <a:xfrm>
-                  <a:off x="23166754" y="24615337"/>
-                  <a:ext cx="651983" cy="369332"/>
-                </a:xfrm>
-                <a:prstGeom prst="rect">
-                  <a:avLst/>
-                </a:prstGeom>
-                <a:noFill/>
-              </p:spPr>
-              <p:txBody>
-                <a:bodyPr wrap="square" rtlCol="0">
-                  <a:spAutoFit/>
-                </a:bodyPr>
-                <a:lstStyle/>
-                <a:p>
-                  <a:r>
-                    <a:rPr lang="en-US" dirty="0"/>
-                    <a:t>400</a:t>
-                  </a:r>
-                </a:p>
-              </p:txBody>
-            </p:sp>
-            <p:sp>
-              <p:nvSpPr>
-                <p:cNvPr id="15700" name="TextBox 15699">
-                  <a:extLst>
-                    <a:ext uri="{FF2B5EF4-FFF2-40B4-BE49-F238E27FC236}">
-                      <a16:creationId xmlns:a16="http://schemas.microsoft.com/office/drawing/2014/main" id="{0479233A-F219-C4C1-0FAE-4E64BDC40251}"/>
-                    </a:ext>
-                  </a:extLst>
-                </p:cNvPr>
-                <p:cNvSpPr txBox="1"/>
-                <p:nvPr/>
-              </p:nvSpPr>
-              <p:spPr>
-                <a:xfrm>
-                  <a:off x="23087465" y="28711327"/>
-                  <a:ext cx="740088" cy="369332"/>
-                </a:xfrm>
-                <a:prstGeom prst="rect">
-                  <a:avLst/>
-                </a:prstGeom>
-                <a:noFill/>
-              </p:spPr>
-              <p:txBody>
-                <a:bodyPr wrap="square" rtlCol="0">
-                  <a:spAutoFit/>
-                </a:bodyPr>
-                <a:lstStyle/>
-                <a:p>
-                  <a:r>
-                    <a:rPr lang="en-US" dirty="0"/>
-                    <a:t>-200</a:t>
-                  </a:r>
-                </a:p>
-              </p:txBody>
-            </p:sp>
-            <p:sp>
-              <p:nvSpPr>
-                <p:cNvPr id="15701" name="TextBox 15700">
-                  <a:extLst>
-                    <a:ext uri="{FF2B5EF4-FFF2-40B4-BE49-F238E27FC236}">
-                      <a16:creationId xmlns:a16="http://schemas.microsoft.com/office/drawing/2014/main" id="{0037EC62-7BBF-974B-42EC-5B85E16EF20D}"/>
-                    </a:ext>
-                  </a:extLst>
-                </p:cNvPr>
-                <p:cNvSpPr txBox="1"/>
-                <p:nvPr/>
-              </p:nvSpPr>
-              <p:spPr>
-                <a:xfrm>
-                  <a:off x="23822666" y="30181392"/>
-                  <a:ext cx="505139" cy="369332"/>
-                </a:xfrm>
-                <a:prstGeom prst="rect">
-                  <a:avLst/>
-                </a:prstGeom>
-                <a:noFill/>
-              </p:spPr>
-              <p:txBody>
-                <a:bodyPr wrap="square" rtlCol="0">
-                  <a:spAutoFit/>
-                </a:bodyPr>
-                <a:lstStyle/>
-                <a:p>
-                  <a:r>
-                    <a:rPr lang="en-US" dirty="0"/>
-                    <a:t>20</a:t>
-                  </a:r>
-                </a:p>
-              </p:txBody>
-            </p:sp>
-            <p:sp>
-              <p:nvSpPr>
-                <p:cNvPr id="15702" name="TextBox 15701">
-                  <a:extLst>
-                    <a:ext uri="{FF2B5EF4-FFF2-40B4-BE49-F238E27FC236}">
-                      <a16:creationId xmlns:a16="http://schemas.microsoft.com/office/drawing/2014/main" id="{E539492E-CCBD-AEE5-A537-2A1EEB1A9F5C}"/>
-                    </a:ext>
-                  </a:extLst>
-                </p:cNvPr>
-                <p:cNvSpPr txBox="1"/>
-                <p:nvPr/>
-              </p:nvSpPr>
-              <p:spPr>
-                <a:xfrm>
-                  <a:off x="27974735" y="30181392"/>
-                  <a:ext cx="505139" cy="369332"/>
-                </a:xfrm>
-                <a:prstGeom prst="rect">
-                  <a:avLst/>
-                </a:prstGeom>
-                <a:noFill/>
-              </p:spPr>
-              <p:txBody>
-                <a:bodyPr wrap="square" rtlCol="0">
-                  <a:spAutoFit/>
-                </a:bodyPr>
-                <a:lstStyle/>
-                <a:p>
-                  <a:r>
-                    <a:rPr lang="en-US" dirty="0"/>
-                    <a:t>60</a:t>
-                  </a:r>
-                </a:p>
-              </p:txBody>
-            </p:sp>
-          </p:grpSp>
-          <p:sp>
-            <p:nvSpPr>
-              <p:cNvPr id="15705" name="TextBox 15704">
-                <a:extLst>
-                  <a:ext uri="{FF2B5EF4-FFF2-40B4-BE49-F238E27FC236}">
-                    <a16:creationId xmlns:a16="http://schemas.microsoft.com/office/drawing/2014/main" id="{6960A0F0-CDFF-ED60-A579-49BA29A21318}"/>
-                  </a:ext>
-                </a:extLst>
-              </p:cNvPr>
-              <p:cNvSpPr txBox="1"/>
-              <p:nvPr/>
-            </p:nvSpPr>
-            <p:spPr>
-              <a:xfrm rot="16200000">
-                <a:off x="21699109" y="26614219"/>
-                <a:ext cx="3420629" cy="553998"/>
-              </a:xfrm>
-              <a:prstGeom prst="rect">
-                <a:avLst/>
-              </a:prstGeom>
-              <a:noFill/>
-            </p:spPr>
-            <p:txBody>
-              <a:bodyPr wrap="square" rtlCol="0">
-                <a:spAutoFit/>
-              </a:bodyPr>
-              <a:lstStyle/>
-              <a:p>
-                <a:pPr algn="ctr"/>
-                <a:r>
-                  <a:rPr lang="en-US" sz="1500" dirty="0"/>
-                  <a:t>Friend (Reciprocate &gt; Defect) &gt; Computer (Reciprocate &gt; Defect)</a:t>
-                </a:r>
-              </a:p>
-            </p:txBody>
-          </p:sp>
-        </p:grpSp>
-        <p:sp>
-          <p:nvSpPr>
-            <p:cNvPr id="15732" name="Rectangle 15731">
-              <a:extLst>
-                <a:ext uri="{FF2B5EF4-FFF2-40B4-BE49-F238E27FC236}">
-                  <a16:creationId xmlns:a16="http://schemas.microsoft.com/office/drawing/2014/main" id="{DB9E91CB-EB75-75BF-4CD0-32893875A887}"/>
-                </a:ext>
-              </a:extLst>
-            </p:cNvPr>
-            <p:cNvSpPr/>
-            <p:nvPr/>
-          </p:nvSpPr>
-          <p:spPr bwMode="auto">
-            <a:xfrm>
-              <a:off x="23891921" y="24154307"/>
-              <a:ext cx="5627696" cy="5921353"/>
-            </a:xfrm>
-            <a:prstGeom prst="rect">
-              <a:avLst/>
-            </a:prstGeom>
-            <a:noFill/>
-            <a:ln w="38100" cap="flat" cmpd="sng" algn="ctr">
-              <a:solidFill>
-                <a:schemeClr val="tx1"/>
-              </a:solidFill>
-              <a:prstDash val="solid"/>
-              <a:round/>
-              <a:headEnd type="none" w="med" len="med"/>
-              <a:tailEnd type="none" w="med" len="med"/>
-            </a:ln>
-            <a:effectLst/>
-          </p:spPr>
-          <p:txBody>
-            <a:bodyPr vert="horz" wrap="square" lIns="91440" tIns="45720" rIns="91440" bIns="45720" numCol="1" rtlCol="0" anchor="t" anchorCtr="0" compatLnSpc="1">
-              <a:prstTxWarp prst="textNoShape">
-                <a:avLst/>
-              </a:prstTxWarp>
-            </a:bodyPr>
-            <a:lstStyle/>
-            <a:p>
-              <a:pPr marL="0" marR="0" indent="0" algn="l" defTabSz="4389438" rtl="0" eaLnBrk="1" fontAlgn="base" latinLnBrk="0" hangingPunct="1">
-                <a:lnSpc>
-                  <a:spcPct val="100000"/>
-                </a:lnSpc>
-                <a:spcBef>
-                  <a:spcPct val="0"/>
-                </a:spcBef>
-                <a:spcAft>
-                  <a:spcPct val="0"/>
-                </a:spcAft>
-                <a:buClrTx/>
-                <a:buSzTx/>
-                <a:buFontTx/>
-                <a:buNone/>
-                <a:tabLst/>
-              </a:pPr>
-              <a:endParaRPr kumimoji="0" lang="en-US" sz="1800" b="0" i="0" u="none" strike="noStrike" cap="none" normalizeH="0" baseline="0">
-                <a:ln>
-                  <a:noFill/>
-                </a:ln>
-                <a:solidFill>
-                  <a:schemeClr val="tx1"/>
-                </a:solidFill>
-                <a:effectLst/>
-                <a:latin typeface="Arial" charset="0"/>
-                <a:cs typeface="Arial" charset="0"/>
-              </a:endParaRPr>
-            </a:p>
-          </p:txBody>
-        </p:sp>
-      </p:grpSp>
-      <p:grpSp>
-        <p:nvGrpSpPr>
-          <p:cNvPr id="15734" name="Group 15733">
-            <a:extLst>
-              <a:ext uri="{FF2B5EF4-FFF2-40B4-BE49-F238E27FC236}">
-                <a16:creationId xmlns:a16="http://schemas.microsoft.com/office/drawing/2014/main" id="{D6329C71-02EA-73D7-8FA5-5799213EF5F4}"/>
-              </a:ext>
-            </a:extLst>
-          </p:cNvPr>
-          <p:cNvGrpSpPr/>
-          <p:nvPr/>
-        </p:nvGrpSpPr>
-        <p:grpSpPr>
-          <a:xfrm>
-            <a:off x="16026704" y="24108846"/>
-            <a:ext cx="6532972" cy="6817128"/>
-            <a:chOff x="16026704" y="24108846"/>
-            <a:chExt cx="6532972" cy="6817128"/>
-          </a:xfrm>
-        </p:grpSpPr>
-        <p:grpSp>
-          <p:nvGrpSpPr>
-            <p:cNvPr id="15704" name="Group 15703">
-              <a:extLst>
-                <a:ext uri="{FF2B5EF4-FFF2-40B4-BE49-F238E27FC236}">
-                  <a16:creationId xmlns:a16="http://schemas.microsoft.com/office/drawing/2014/main" id="{FCD1B93E-6226-3998-93E5-870A1491CB64}"/>
-                </a:ext>
-              </a:extLst>
-            </p:cNvPr>
-            <p:cNvGrpSpPr/>
-            <p:nvPr/>
-          </p:nvGrpSpPr>
-          <p:grpSpPr>
-            <a:xfrm>
-              <a:off x="16026704" y="24108846"/>
-              <a:ext cx="6532972" cy="6817128"/>
-              <a:chOff x="16026704" y="24108846"/>
-              <a:chExt cx="6532972" cy="6817128"/>
-            </a:xfrm>
-          </p:grpSpPr>
-          <p:pic>
-            <p:nvPicPr>
-              <p:cNvPr id="15639" name="Graphic 15638">
-                <a:extLst>
-                  <a:ext uri="{FF2B5EF4-FFF2-40B4-BE49-F238E27FC236}">
-                    <a16:creationId xmlns:a16="http://schemas.microsoft.com/office/drawing/2014/main" id="{D9CF084F-C433-567D-8719-A7C5D7D79D7D}"/>
-                  </a:ext>
-                </a:extLst>
-              </p:cNvPr>
-              <p:cNvPicPr>
-                <a:picLocks noChangeAspect="1"/>
-              </p:cNvPicPr>
-              <p:nvPr/>
-            </p:nvPicPr>
-            <p:blipFill rotWithShape="1">
-              <a:blip r:embed="rId23">
-                <a:extLst>
-                  <a:ext uri="{28A0092B-C50C-407E-A947-70E740481C1C}">
-                    <a14:useLocalDpi xmlns:a14="http://schemas.microsoft.com/office/drawing/2010/main" val="0"/>
-                  </a:ext>
-                  <a:ext uri="{96DAC541-7B7A-43D3-8B79-37D633B846F1}">
-                    <asvg:svgBlip xmlns:asvg="http://schemas.microsoft.com/office/drawing/2016/SVG/main" r:embed="rId24"/>
-                  </a:ext>
-                </a:extLst>
-              </a:blip>
-              <a:srcRect l="10756" t="6660" r="2865" b="7584"/>
-              <a:stretch/>
-            </p:blipFill>
-            <p:spPr>
-              <a:xfrm>
-                <a:off x="16651056" y="24108846"/>
-                <a:ext cx="5908620" cy="6083352"/>
-              </a:xfrm>
-              <a:prstGeom prst="rect">
-                <a:avLst/>
-              </a:prstGeom>
-            </p:spPr>
-          </p:pic>
-          <p:sp>
-            <p:nvSpPr>
-              <p:cNvPr id="15687" name="TextBox 15686">
-                <a:extLst>
-                  <a:ext uri="{FF2B5EF4-FFF2-40B4-BE49-F238E27FC236}">
-                    <a16:creationId xmlns:a16="http://schemas.microsoft.com/office/drawing/2014/main" id="{F662A648-B469-A9E0-776B-0B74000CC056}"/>
-                  </a:ext>
-                </a:extLst>
-              </p:cNvPr>
-              <p:cNvSpPr txBox="1"/>
-              <p:nvPr/>
-            </p:nvSpPr>
-            <p:spPr>
-              <a:xfrm>
-                <a:off x="18654011" y="30218088"/>
-                <a:ext cx="1096775" cy="707886"/>
-              </a:xfrm>
-              <a:prstGeom prst="rect">
-                <a:avLst/>
-              </a:prstGeom>
-              <a:noFill/>
-            </p:spPr>
-            <p:txBody>
-              <a:bodyPr wrap="none" rtlCol="0">
-                <a:spAutoFit/>
-              </a:bodyPr>
-              <a:lstStyle/>
-              <a:p>
-                <a:r>
-                  <a:rPr lang="en-US" sz="4000" dirty="0"/>
-                  <a:t>Age</a:t>
-                </a:r>
-              </a:p>
-            </p:txBody>
-          </p:sp>
-          <p:sp>
-            <p:nvSpPr>
-              <p:cNvPr id="15688" name="TextBox 15687">
-                <a:extLst>
-                  <a:ext uri="{FF2B5EF4-FFF2-40B4-BE49-F238E27FC236}">
-                    <a16:creationId xmlns:a16="http://schemas.microsoft.com/office/drawing/2014/main" id="{17B4D306-3BDE-F46A-B882-1F7E819C5A36}"/>
-                  </a:ext>
-                </a:extLst>
-              </p:cNvPr>
-              <p:cNvSpPr txBox="1"/>
-              <p:nvPr/>
-            </p:nvSpPr>
-            <p:spPr>
-              <a:xfrm rot="16200000">
-                <a:off x="14608848" y="26568394"/>
-                <a:ext cx="3420629" cy="553998"/>
-              </a:xfrm>
-              <a:prstGeom prst="rect">
-                <a:avLst/>
-              </a:prstGeom>
-              <a:noFill/>
-            </p:spPr>
-            <p:txBody>
-              <a:bodyPr wrap="square" rtlCol="0">
-                <a:spAutoFit/>
-              </a:bodyPr>
-              <a:lstStyle/>
-              <a:p>
-                <a:pPr algn="ctr"/>
-                <a:r>
-                  <a:rPr lang="en-US" sz="1500" dirty="0"/>
-                  <a:t>Friend (Reciprocate &gt; Defect) &gt; Stranger (Reciprocate &gt; Defect)</a:t>
-                </a:r>
-              </a:p>
-            </p:txBody>
-          </p:sp>
-          <p:sp>
-            <p:nvSpPr>
-              <p:cNvPr id="15689" name="TextBox 15688">
-                <a:extLst>
-                  <a:ext uri="{FF2B5EF4-FFF2-40B4-BE49-F238E27FC236}">
-                    <a16:creationId xmlns:a16="http://schemas.microsoft.com/office/drawing/2014/main" id="{39181606-99D7-432F-DC98-862BFA6B35E8}"/>
-                  </a:ext>
-                </a:extLst>
-              </p:cNvPr>
-              <p:cNvSpPr txBox="1"/>
-              <p:nvPr/>
-            </p:nvSpPr>
-            <p:spPr>
-              <a:xfrm>
-                <a:off x="16115961" y="24411311"/>
-                <a:ext cx="651983" cy="424006"/>
-              </a:xfrm>
-              <a:prstGeom prst="rect">
-                <a:avLst/>
-              </a:prstGeom>
-              <a:noFill/>
-            </p:spPr>
-            <p:txBody>
-              <a:bodyPr wrap="none" rtlCol="0">
-                <a:spAutoFit/>
-              </a:bodyPr>
-              <a:lstStyle/>
-              <a:p>
-                <a:r>
-                  <a:rPr lang="en-US" dirty="0"/>
-                  <a:t>400</a:t>
-                </a:r>
-              </a:p>
-            </p:txBody>
-          </p:sp>
-          <p:sp>
-            <p:nvSpPr>
-              <p:cNvPr id="15690" name="TextBox 15689">
-                <a:extLst>
-                  <a:ext uri="{FF2B5EF4-FFF2-40B4-BE49-F238E27FC236}">
-                    <a16:creationId xmlns:a16="http://schemas.microsoft.com/office/drawing/2014/main" id="{BA9BD2BF-7849-7A5A-CF46-E64AAA2C3D8A}"/>
-                  </a:ext>
-                </a:extLst>
-              </p:cNvPr>
-              <p:cNvSpPr txBox="1"/>
-              <p:nvPr/>
-            </p:nvSpPr>
-            <p:spPr>
-              <a:xfrm>
-                <a:off x="16026704" y="28875791"/>
-                <a:ext cx="740088" cy="424006"/>
-              </a:xfrm>
-              <a:prstGeom prst="rect">
-                <a:avLst/>
-              </a:prstGeom>
-              <a:noFill/>
-            </p:spPr>
-            <p:txBody>
-              <a:bodyPr wrap="none" rtlCol="0">
-                <a:spAutoFit/>
-              </a:bodyPr>
-              <a:lstStyle/>
-              <a:p>
-                <a:r>
-                  <a:rPr lang="en-US" dirty="0"/>
-                  <a:t>-200</a:t>
-                </a:r>
-              </a:p>
-            </p:txBody>
-          </p:sp>
-          <p:sp>
-            <p:nvSpPr>
-              <p:cNvPr id="15691" name="TextBox 15690">
-                <a:extLst>
-                  <a:ext uri="{FF2B5EF4-FFF2-40B4-BE49-F238E27FC236}">
-                    <a16:creationId xmlns:a16="http://schemas.microsoft.com/office/drawing/2014/main" id="{1BD0A2A2-41F8-B866-7A17-811920106FC6}"/>
-                  </a:ext>
-                </a:extLst>
-              </p:cNvPr>
-              <p:cNvSpPr txBox="1"/>
-              <p:nvPr/>
-            </p:nvSpPr>
-            <p:spPr>
-              <a:xfrm>
-                <a:off x="16666083" y="30175865"/>
-                <a:ext cx="505139" cy="424006"/>
-              </a:xfrm>
-              <a:prstGeom prst="rect">
-                <a:avLst/>
-              </a:prstGeom>
-              <a:noFill/>
-            </p:spPr>
-            <p:txBody>
-              <a:bodyPr wrap="none" rtlCol="0">
-                <a:spAutoFit/>
-              </a:bodyPr>
-              <a:lstStyle/>
-              <a:p>
-                <a:r>
-                  <a:rPr lang="en-US" dirty="0"/>
-                  <a:t>20</a:t>
-                </a:r>
-              </a:p>
-            </p:txBody>
-          </p:sp>
-          <p:sp>
-            <p:nvSpPr>
-              <p:cNvPr id="15692" name="TextBox 15691">
-                <a:extLst>
-                  <a:ext uri="{FF2B5EF4-FFF2-40B4-BE49-F238E27FC236}">
-                    <a16:creationId xmlns:a16="http://schemas.microsoft.com/office/drawing/2014/main" id="{8B1D7E5E-F4B9-60AA-0137-EE2E8ABD15F8}"/>
-                  </a:ext>
-                </a:extLst>
-              </p:cNvPr>
-              <p:cNvSpPr txBox="1"/>
-              <p:nvPr/>
-            </p:nvSpPr>
-            <p:spPr>
-              <a:xfrm>
-                <a:off x="20818152" y="30175865"/>
-                <a:ext cx="505139" cy="424006"/>
-              </a:xfrm>
-              <a:prstGeom prst="rect">
-                <a:avLst/>
-              </a:prstGeom>
-              <a:noFill/>
-            </p:spPr>
-            <p:txBody>
-              <a:bodyPr wrap="none" rtlCol="0">
-                <a:spAutoFit/>
-              </a:bodyPr>
-              <a:lstStyle/>
-              <a:p>
-                <a:r>
-                  <a:rPr lang="en-US" dirty="0"/>
-                  <a:t>60</a:t>
-                </a:r>
-              </a:p>
-            </p:txBody>
-          </p:sp>
-        </p:grpSp>
-        <p:sp>
-          <p:nvSpPr>
-            <p:cNvPr id="15733" name="Rectangle 15732">
-              <a:extLst>
-                <a:ext uri="{FF2B5EF4-FFF2-40B4-BE49-F238E27FC236}">
-                  <a16:creationId xmlns:a16="http://schemas.microsoft.com/office/drawing/2014/main" id="{16C66349-C6D5-5B03-6B55-2EB7D1D282E3}"/>
-                </a:ext>
-              </a:extLst>
-            </p:cNvPr>
-            <p:cNvSpPr/>
-            <p:nvPr/>
-          </p:nvSpPr>
-          <p:spPr bwMode="auto">
-            <a:xfrm>
-              <a:off x="16871673" y="24149410"/>
-              <a:ext cx="5627696" cy="5921353"/>
-            </a:xfrm>
-            <a:prstGeom prst="rect">
-              <a:avLst/>
-            </a:prstGeom>
-            <a:noFill/>
-            <a:ln w="38100" cap="flat" cmpd="sng" algn="ctr">
-              <a:solidFill>
-                <a:schemeClr val="tx1"/>
-              </a:solidFill>
-              <a:prstDash val="solid"/>
-              <a:round/>
-              <a:headEnd type="none" w="med" len="med"/>
-              <a:tailEnd type="none" w="med" len="med"/>
-            </a:ln>
-            <a:effectLst/>
-          </p:spPr>
-          <p:txBody>
-            <a:bodyPr vert="horz" wrap="square" lIns="91440" tIns="45720" rIns="91440" bIns="45720" numCol="1" rtlCol="0" anchor="t" anchorCtr="0" compatLnSpc="1">
-              <a:prstTxWarp prst="textNoShape">
-                <a:avLst/>
-              </a:prstTxWarp>
-            </a:bodyPr>
-            <a:lstStyle/>
-            <a:p>
-              <a:pPr marL="0" marR="0" indent="0" algn="l" defTabSz="4389438" rtl="0" eaLnBrk="1" fontAlgn="base" latinLnBrk="0" hangingPunct="1">
-                <a:lnSpc>
-                  <a:spcPct val="100000"/>
-                </a:lnSpc>
-                <a:spcBef>
-                  <a:spcPct val="0"/>
-                </a:spcBef>
-                <a:spcAft>
-                  <a:spcPct val="0"/>
-                </a:spcAft>
-                <a:buClrTx/>
-                <a:buSzTx/>
-                <a:buFontTx/>
-                <a:buNone/>
-                <a:tabLst/>
-              </a:pPr>
-              <a:endParaRPr kumimoji="0" lang="en-US" sz="1800" b="0" i="0" u="none" strike="noStrike" cap="none" normalizeH="0" baseline="0">
-                <a:ln>
-                  <a:noFill/>
-                </a:ln>
-                <a:solidFill>
-                  <a:schemeClr val="tx1"/>
-                </a:solidFill>
-                <a:effectLst/>
-                <a:latin typeface="Arial" charset="0"/>
-                <a:cs typeface="Arial" charset="0"/>
-              </a:endParaRPr>
-            </a:p>
-          </p:txBody>
-        </p:sp>
-      </p:grpSp>
-      <p:grpSp>
-        <p:nvGrpSpPr>
           <p:cNvPr id="2" name="Group 1">
             <a:extLst>
               <a:ext uri="{FF2B5EF4-FFF2-40B4-BE49-F238E27FC236}">
@@ -12100,8 +11028,8 @@
         </p:nvGrpSpPr>
         <p:grpSpPr>
           <a:xfrm>
-            <a:off x="37053827" y="15189671"/>
-            <a:ext cx="6030525" cy="6738219"/>
+            <a:off x="35440249" y="15080821"/>
+            <a:ext cx="7581682" cy="8191817"/>
             <a:chOff x="37324753" y="15097157"/>
             <a:chExt cx="6030525" cy="6738219"/>
           </a:xfrm>
@@ -12141,13 +11069,13 @@
               <p:nvPr/>
             </p:nvPicPr>
             <p:blipFill rotWithShape="1">
-              <a:blip r:embed="rId25">
+              <a:blip r:embed="rId21">
                 <a:extLst>
                   <a:ext uri="{28A0092B-C50C-407E-A947-70E740481C1C}">
                     <a14:useLocalDpi xmlns:a14="http://schemas.microsoft.com/office/drawing/2010/main" val="0"/>
                   </a:ext>
                   <a:ext uri="{96DAC541-7B7A-43D3-8B79-37D633B846F1}">
-                    <asvg:svgBlip xmlns:asvg="http://schemas.microsoft.com/office/drawing/2016/SVG/main" r:embed="rId26"/>
+                    <asvg:svgBlip xmlns:asvg="http://schemas.microsoft.com/office/drawing/2016/SVG/main" r:embed="rId22"/>
                   </a:ext>
                 </a:extLst>
               </a:blip>
@@ -12248,8 +11176,8 @@
             </p:nvSpPr>
             <p:spPr>
               <a:xfrm rot="16200000">
-                <a:off x="36381836" y="18642457"/>
-                <a:ext cx="2770310" cy="553998"/>
+                <a:off x="36531370" y="18699129"/>
+                <a:ext cx="2471242" cy="440654"/>
               </a:xfrm>
               <a:prstGeom prst="rect">
                 <a:avLst/>
@@ -12263,8 +11191,12 @@
               <a:lstStyle/>
               <a:p>
                 <a:r>
+                  <a:rPr lang="en-US" sz="3000" dirty="0" err="1"/>
+                  <a:t>mPFC</a:t>
+                </a:r>
+                <a:r>
                   <a:rPr lang="en-US" sz="3000" dirty="0"/>
-                  <a:t>MFG activation</a:t>
+                  <a:t> activation</a:t>
                 </a:r>
               </a:p>
             </p:txBody>
@@ -12460,8 +11392,8 @@
         </p:nvGrpSpPr>
         <p:grpSpPr>
           <a:xfrm>
-            <a:off x="37189097" y="5921245"/>
-            <a:ext cx="6139033" cy="6439521"/>
+            <a:off x="35322155" y="5111358"/>
+            <a:ext cx="8025077" cy="7927695"/>
             <a:chOff x="37564868" y="5920531"/>
             <a:chExt cx="6139033" cy="6439521"/>
           </a:xfrm>
@@ -12656,13 +11588,13 @@
             <p:nvPr/>
           </p:nvPicPr>
           <p:blipFill rotWithShape="1">
-            <a:blip r:embed="rId27">
+            <a:blip r:embed="rId23">
               <a:extLst>
                 <a:ext uri="{28A0092B-C50C-407E-A947-70E740481C1C}">
                   <a14:useLocalDpi xmlns:a14="http://schemas.microsoft.com/office/drawing/2010/main" val="0"/>
                 </a:ext>
                 <a:ext uri="{96DAC541-7B7A-43D3-8B79-37D633B846F1}">
-                  <asvg:svgBlip xmlns:asvg="http://schemas.microsoft.com/office/drawing/2016/SVG/main" r:embed="rId28"/>
+                  <asvg:svgBlip xmlns:asvg="http://schemas.microsoft.com/office/drawing/2016/SVG/main" r:embed="rId24"/>
                 </a:ext>
               </a:extLst>
             </a:blip>
@@ -12693,8 +11625,8 @@
           </p:nvSpPr>
           <p:spPr>
             <a:xfrm rot="16200000">
-              <a:off x="36483567" y="8819300"/>
-              <a:ext cx="2770310" cy="553998"/>
+              <a:off x="36657648" y="8884400"/>
+              <a:ext cx="2422148" cy="423798"/>
             </a:xfrm>
             <a:prstGeom prst="rect">
               <a:avLst/>
@@ -12708,8 +11640,12 @@
             <a:lstStyle/>
             <a:p>
               <a:r>
+                <a:rPr lang="en-US" sz="3000" dirty="0" err="1"/>
+                <a:t>dlPFC</a:t>
+              </a:r>
+              <a:r>
                 <a:rPr lang="en-US" sz="3000" dirty="0"/>
-                <a:t>MFG activation</a:t>
+                <a:t> activation</a:t>
               </a:r>
             </a:p>
           </p:txBody>
@@ -12800,7 +11736,7 @@
           <p:nvPr/>
         </p:nvPicPr>
         <p:blipFill>
-          <a:blip r:embed="rId29">
+          <a:blip r:embed="rId25">
             <a:extLst>
               <a:ext uri="{28A0092B-C50C-407E-A947-70E740481C1C}">
                 <a14:useLocalDpi xmlns:a14="http://schemas.microsoft.com/office/drawing/2010/main" val="0"/>
@@ -12847,7 +11783,7 @@
           <p:nvPr/>
         </p:nvPicPr>
         <p:blipFill>
-          <a:blip r:embed="rId29">
+          <a:blip r:embed="rId25">
             <a:extLst>
               <a:ext uri="{28A0092B-C50C-407E-A947-70E740481C1C}">
                 <a14:useLocalDpi xmlns:a14="http://schemas.microsoft.com/office/drawing/2010/main" val="0"/>
@@ -12894,7 +11830,7 @@
           <p:nvPr/>
         </p:nvPicPr>
         <p:blipFill>
-          <a:blip r:embed="rId30">
+          <a:blip r:embed="rId26">
             <a:extLst>
               <a:ext uri="{28A0092B-C50C-407E-A947-70E740481C1C}">
                 <a14:useLocalDpi xmlns:a14="http://schemas.microsoft.com/office/drawing/2010/main" val="0"/>
@@ -12941,7 +11877,7 @@
           <p:nvPr/>
         </p:nvPicPr>
         <p:blipFill>
-          <a:blip r:embed="rId31">
+          <a:blip r:embed="rId27">
             <a:extLst>
               <a:ext uri="{28A0092B-C50C-407E-A947-70E740481C1C}">
                 <a14:useLocalDpi xmlns:a14="http://schemas.microsoft.com/office/drawing/2010/main" val="0"/>
@@ -15244,6 +14180,788 @@
           </a:prstGeom>
         </p:spPr>
       </p:pic>
+      <p:sp>
+        <p:nvSpPr>
+          <p:cNvPr id="4" name="TextBox 3">
+            <a:extLst>
+              <a:ext uri="{FF2B5EF4-FFF2-40B4-BE49-F238E27FC236}">
+                <a16:creationId xmlns:a16="http://schemas.microsoft.com/office/drawing/2014/main" id="{569D788F-1A31-5C44-8566-4F528D1785C4}"/>
+              </a:ext>
+            </a:extLst>
+          </p:cNvPr>
+          <p:cNvSpPr txBox="1"/>
+          <p:nvPr/>
+        </p:nvSpPr>
+        <p:spPr>
+          <a:xfrm>
+            <a:off x="26309510" y="21994513"/>
+            <a:ext cx="12586455" cy="1077218"/>
+          </a:xfrm>
+          <a:prstGeom prst="rect">
+            <a:avLst/>
+          </a:prstGeom>
+          <a:noFill/>
+        </p:spPr>
+        <p:txBody>
+          <a:bodyPr wrap="square" lIns="91440" tIns="45720" rIns="91440" bIns="45720" anchor="t">
+            <a:spAutoFit/>
+          </a:bodyPr>
+          <a:lstStyle/>
+          <a:p>
+            <a:pPr algn="ctr"/>
+            <a:r>
+              <a:rPr lang="en-US" altLang="en-US" sz="3200" dirty="0">
+                <a:latin typeface="Helvetica"/>
+                <a:ea typeface="MS PGothic"/>
+              </a:rPr>
+              <a:t>Participants were asked to rate their closeness with the three partners before the task on a 7-point Likert Scale</a:t>
+            </a:r>
+          </a:p>
+        </p:txBody>
+      </p:sp>
+      <p:grpSp>
+        <p:nvGrpSpPr>
+          <p:cNvPr id="6" name="Group 5">
+            <a:extLst>
+              <a:ext uri="{FF2B5EF4-FFF2-40B4-BE49-F238E27FC236}">
+                <a16:creationId xmlns:a16="http://schemas.microsoft.com/office/drawing/2014/main" id="{8C166C9F-8AFD-5144-B709-C6E7D9C77CF0}"/>
+              </a:ext>
+            </a:extLst>
+          </p:cNvPr>
+          <p:cNvGrpSpPr/>
+          <p:nvPr/>
+        </p:nvGrpSpPr>
+        <p:grpSpPr>
+          <a:xfrm>
+            <a:off x="26566310" y="4480341"/>
+            <a:ext cx="6524991" cy="6955685"/>
+            <a:chOff x="23087465" y="23975816"/>
+            <a:chExt cx="6524991" cy="6955685"/>
+          </a:xfrm>
+        </p:grpSpPr>
+        <p:grpSp>
+          <p:nvGrpSpPr>
+            <p:cNvPr id="7" name="Group 6">
+              <a:extLst>
+                <a:ext uri="{FF2B5EF4-FFF2-40B4-BE49-F238E27FC236}">
+                  <a16:creationId xmlns:a16="http://schemas.microsoft.com/office/drawing/2014/main" id="{933FE7B0-A177-6F40-9F4C-961AE0B6758A}"/>
+                </a:ext>
+              </a:extLst>
+            </p:cNvPr>
+            <p:cNvGrpSpPr/>
+            <p:nvPr/>
+          </p:nvGrpSpPr>
+          <p:grpSpPr>
+            <a:xfrm>
+              <a:off x="23087465" y="23975816"/>
+              <a:ext cx="6524991" cy="6955685"/>
+              <a:chOff x="23087465" y="23975816"/>
+              <a:chExt cx="6524991" cy="6955685"/>
+            </a:xfrm>
+          </p:grpSpPr>
+          <p:grpSp>
+            <p:nvGrpSpPr>
+              <p:cNvPr id="9" name="Group 8">
+                <a:extLst>
+                  <a:ext uri="{FF2B5EF4-FFF2-40B4-BE49-F238E27FC236}">
+                    <a16:creationId xmlns:a16="http://schemas.microsoft.com/office/drawing/2014/main" id="{F7D19EB7-28AC-B744-9ABA-310DAFD29B0A}"/>
+                  </a:ext>
+                </a:extLst>
+              </p:cNvPr>
+              <p:cNvGrpSpPr/>
+              <p:nvPr/>
+            </p:nvGrpSpPr>
+            <p:grpSpPr>
+              <a:xfrm>
+                <a:off x="23087465" y="23975816"/>
+                <a:ext cx="6524991" cy="6955685"/>
+                <a:chOff x="23087465" y="23975816"/>
+                <a:chExt cx="6524991" cy="6955685"/>
+              </a:xfrm>
+            </p:grpSpPr>
+            <p:pic>
+              <p:nvPicPr>
+                <p:cNvPr id="11" name="Graphic 10">
+                  <a:extLst>
+                    <a:ext uri="{FF2B5EF4-FFF2-40B4-BE49-F238E27FC236}">
+                      <a16:creationId xmlns:a16="http://schemas.microsoft.com/office/drawing/2014/main" id="{507378A2-7B75-EB4F-912D-685D66F7F00A}"/>
+                    </a:ext>
+                  </a:extLst>
+                </p:cNvPr>
+                <p:cNvPicPr>
+                  <a:picLocks noChangeAspect="1"/>
+                </p:cNvPicPr>
+                <p:nvPr/>
+              </p:nvPicPr>
+              <p:blipFill rotWithShape="1">
+                <a:blip r:embed="rId6">
+                  <a:extLst>
+                    <a:ext uri="{28A0092B-C50C-407E-A947-70E740481C1C}">
+                      <a14:useLocalDpi xmlns:a14="http://schemas.microsoft.com/office/drawing/2010/main" val="0"/>
+                    </a:ext>
+                    <a:ext uri="{96DAC541-7B7A-43D3-8B79-37D633B846F1}">
+                      <asvg:svgBlip xmlns:asvg="http://schemas.microsoft.com/office/drawing/2016/SVG/main" r:embed="rId7"/>
+                    </a:ext>
+                  </a:extLst>
+                </a:blip>
+                <a:srcRect l="10991" t="5046" r="3126" b="7756"/>
+                <a:stretch/>
+              </p:blipFill>
+              <p:spPr>
+                <a:xfrm>
+                  <a:off x="23723984" y="23975816"/>
+                  <a:ext cx="5888472" cy="6200049"/>
+                </a:xfrm>
+                <a:prstGeom prst="rect">
+                  <a:avLst/>
+                </a:prstGeom>
+              </p:spPr>
+            </p:pic>
+            <p:sp>
+              <p:nvSpPr>
+                <p:cNvPr id="12" name="TextBox 11">
+                  <a:extLst>
+                    <a:ext uri="{FF2B5EF4-FFF2-40B4-BE49-F238E27FC236}">
+                      <a16:creationId xmlns:a16="http://schemas.microsoft.com/office/drawing/2014/main" id="{AF64BED4-0C1E-384C-B252-76748CAC1B6C}"/>
+                    </a:ext>
+                  </a:extLst>
+                </p:cNvPr>
+                <p:cNvSpPr txBox="1"/>
+                <p:nvPr/>
+              </p:nvSpPr>
+              <p:spPr>
+                <a:xfrm>
+                  <a:off x="25810594" y="30223615"/>
+                  <a:ext cx="1096775" cy="707886"/>
+                </a:xfrm>
+                <a:prstGeom prst="rect">
+                  <a:avLst/>
+                </a:prstGeom>
+                <a:noFill/>
+              </p:spPr>
+              <p:txBody>
+                <a:bodyPr wrap="square" rtlCol="0">
+                  <a:spAutoFit/>
+                </a:bodyPr>
+                <a:lstStyle/>
+                <a:p>
+                  <a:r>
+                    <a:rPr lang="en-US" sz="4000" dirty="0"/>
+                    <a:t>Age</a:t>
+                  </a:r>
+                </a:p>
+              </p:txBody>
+            </p:sp>
+            <p:sp>
+              <p:nvSpPr>
+                <p:cNvPr id="13" name="TextBox 12">
+                  <a:extLst>
+                    <a:ext uri="{FF2B5EF4-FFF2-40B4-BE49-F238E27FC236}">
+                      <a16:creationId xmlns:a16="http://schemas.microsoft.com/office/drawing/2014/main" id="{A34BF677-2248-9642-9CB1-6ADE36E56B3C}"/>
+                    </a:ext>
+                  </a:extLst>
+                </p:cNvPr>
+                <p:cNvSpPr txBox="1"/>
+                <p:nvPr/>
+              </p:nvSpPr>
+              <p:spPr>
+                <a:xfrm>
+                  <a:off x="23166754" y="24615337"/>
+                  <a:ext cx="651983" cy="369332"/>
+                </a:xfrm>
+                <a:prstGeom prst="rect">
+                  <a:avLst/>
+                </a:prstGeom>
+                <a:noFill/>
+              </p:spPr>
+              <p:txBody>
+                <a:bodyPr wrap="square" rtlCol="0">
+                  <a:spAutoFit/>
+                </a:bodyPr>
+                <a:lstStyle/>
+                <a:p>
+                  <a:r>
+                    <a:rPr lang="en-US" dirty="0"/>
+                    <a:t>400</a:t>
+                  </a:r>
+                </a:p>
+              </p:txBody>
+            </p:sp>
+            <p:sp>
+              <p:nvSpPr>
+                <p:cNvPr id="14" name="TextBox 13">
+                  <a:extLst>
+                    <a:ext uri="{FF2B5EF4-FFF2-40B4-BE49-F238E27FC236}">
+                      <a16:creationId xmlns:a16="http://schemas.microsoft.com/office/drawing/2014/main" id="{CA2794F8-6A32-D94B-8839-99CAF4032589}"/>
+                    </a:ext>
+                  </a:extLst>
+                </p:cNvPr>
+                <p:cNvSpPr txBox="1"/>
+                <p:nvPr/>
+              </p:nvSpPr>
+              <p:spPr>
+                <a:xfrm>
+                  <a:off x="23087465" y="28711327"/>
+                  <a:ext cx="740088" cy="369332"/>
+                </a:xfrm>
+                <a:prstGeom prst="rect">
+                  <a:avLst/>
+                </a:prstGeom>
+                <a:noFill/>
+              </p:spPr>
+              <p:txBody>
+                <a:bodyPr wrap="square" rtlCol="0">
+                  <a:spAutoFit/>
+                </a:bodyPr>
+                <a:lstStyle/>
+                <a:p>
+                  <a:r>
+                    <a:rPr lang="en-US" dirty="0"/>
+                    <a:t>-200</a:t>
+                  </a:r>
+                </a:p>
+              </p:txBody>
+            </p:sp>
+            <p:sp>
+              <p:nvSpPr>
+                <p:cNvPr id="15" name="TextBox 14">
+                  <a:extLst>
+                    <a:ext uri="{FF2B5EF4-FFF2-40B4-BE49-F238E27FC236}">
+                      <a16:creationId xmlns:a16="http://schemas.microsoft.com/office/drawing/2014/main" id="{672E2E51-16E7-B342-93EF-ABF930710291}"/>
+                    </a:ext>
+                  </a:extLst>
+                </p:cNvPr>
+                <p:cNvSpPr txBox="1"/>
+                <p:nvPr/>
+              </p:nvSpPr>
+              <p:spPr>
+                <a:xfrm>
+                  <a:off x="23822666" y="30181392"/>
+                  <a:ext cx="505139" cy="369332"/>
+                </a:xfrm>
+                <a:prstGeom prst="rect">
+                  <a:avLst/>
+                </a:prstGeom>
+                <a:noFill/>
+              </p:spPr>
+              <p:txBody>
+                <a:bodyPr wrap="square" rtlCol="0">
+                  <a:spAutoFit/>
+                </a:bodyPr>
+                <a:lstStyle/>
+                <a:p>
+                  <a:r>
+                    <a:rPr lang="en-US" dirty="0"/>
+                    <a:t>20</a:t>
+                  </a:r>
+                </a:p>
+              </p:txBody>
+            </p:sp>
+            <p:sp>
+              <p:nvSpPr>
+                <p:cNvPr id="16" name="TextBox 15">
+                  <a:extLst>
+                    <a:ext uri="{FF2B5EF4-FFF2-40B4-BE49-F238E27FC236}">
+                      <a16:creationId xmlns:a16="http://schemas.microsoft.com/office/drawing/2014/main" id="{5E3C9A62-C76F-1041-B055-E2304EC80EB4}"/>
+                    </a:ext>
+                  </a:extLst>
+                </p:cNvPr>
+                <p:cNvSpPr txBox="1"/>
+                <p:nvPr/>
+              </p:nvSpPr>
+              <p:spPr>
+                <a:xfrm>
+                  <a:off x="27974735" y="30181392"/>
+                  <a:ext cx="505139" cy="369332"/>
+                </a:xfrm>
+                <a:prstGeom prst="rect">
+                  <a:avLst/>
+                </a:prstGeom>
+                <a:noFill/>
+              </p:spPr>
+              <p:txBody>
+                <a:bodyPr wrap="square" rtlCol="0">
+                  <a:spAutoFit/>
+                </a:bodyPr>
+                <a:lstStyle/>
+                <a:p>
+                  <a:r>
+                    <a:rPr lang="en-US" dirty="0"/>
+                    <a:t>60</a:t>
+                  </a:r>
+                </a:p>
+              </p:txBody>
+            </p:sp>
+          </p:grpSp>
+          <p:sp>
+            <p:nvSpPr>
+              <p:cNvPr id="10" name="TextBox 9">
+                <a:extLst>
+                  <a:ext uri="{FF2B5EF4-FFF2-40B4-BE49-F238E27FC236}">
+                    <a16:creationId xmlns:a16="http://schemas.microsoft.com/office/drawing/2014/main" id="{0BBA07AC-5E67-7848-9F24-BE968F5514E2}"/>
+                  </a:ext>
+                </a:extLst>
+              </p:cNvPr>
+              <p:cNvSpPr txBox="1"/>
+              <p:nvPr/>
+            </p:nvSpPr>
+            <p:spPr>
+              <a:xfrm rot="16200000">
+                <a:off x="21699109" y="26614219"/>
+                <a:ext cx="3420629" cy="553998"/>
+              </a:xfrm>
+              <a:prstGeom prst="rect">
+                <a:avLst/>
+              </a:prstGeom>
+              <a:noFill/>
+            </p:spPr>
+            <p:txBody>
+              <a:bodyPr wrap="square" rtlCol="0">
+                <a:spAutoFit/>
+              </a:bodyPr>
+              <a:lstStyle/>
+              <a:p>
+                <a:pPr algn="ctr"/>
+                <a:r>
+                  <a:rPr lang="en-US" sz="1500" dirty="0"/>
+                  <a:t>Friend (Reciprocate &gt; Defect) &gt; Computer (Reciprocate &gt; Defect)</a:t>
+                </a:r>
+              </a:p>
+            </p:txBody>
+          </p:sp>
+        </p:grpSp>
+        <p:sp>
+          <p:nvSpPr>
+            <p:cNvPr id="8" name="Rectangle 7">
+              <a:extLst>
+                <a:ext uri="{FF2B5EF4-FFF2-40B4-BE49-F238E27FC236}">
+                  <a16:creationId xmlns:a16="http://schemas.microsoft.com/office/drawing/2014/main" id="{D15CE9A9-886F-5747-B508-B31965E7B11B}"/>
+                </a:ext>
+              </a:extLst>
+            </p:cNvPr>
+            <p:cNvSpPr/>
+            <p:nvPr/>
+          </p:nvSpPr>
+          <p:spPr bwMode="auto">
+            <a:xfrm>
+              <a:off x="23891921" y="24154307"/>
+              <a:ext cx="5627696" cy="5921353"/>
+            </a:xfrm>
+            <a:prstGeom prst="rect">
+              <a:avLst/>
+            </a:prstGeom>
+            <a:noFill/>
+            <a:ln w="38100" cap="flat" cmpd="sng" algn="ctr">
+              <a:solidFill>
+                <a:schemeClr val="tx1"/>
+              </a:solidFill>
+              <a:prstDash val="solid"/>
+              <a:round/>
+              <a:headEnd type="none" w="med" len="med"/>
+              <a:tailEnd type="none" w="med" len="med"/>
+            </a:ln>
+            <a:effectLst/>
+          </p:spPr>
+          <p:txBody>
+            <a:bodyPr vert="horz" wrap="square" lIns="91440" tIns="45720" rIns="91440" bIns="45720" numCol="1" rtlCol="0" anchor="t" anchorCtr="0" compatLnSpc="1">
+              <a:prstTxWarp prst="textNoShape">
+                <a:avLst/>
+              </a:prstTxWarp>
+            </a:bodyPr>
+            <a:lstStyle/>
+            <a:p>
+              <a:pPr marL="0" marR="0" indent="0" algn="l" defTabSz="4389438" rtl="0" eaLnBrk="1" fontAlgn="base" latinLnBrk="0" hangingPunct="1">
+                <a:lnSpc>
+                  <a:spcPct val="100000"/>
+                </a:lnSpc>
+                <a:spcBef>
+                  <a:spcPct val="0"/>
+                </a:spcBef>
+                <a:spcAft>
+                  <a:spcPct val="0"/>
+                </a:spcAft>
+                <a:buClrTx/>
+                <a:buSzTx/>
+                <a:buFontTx/>
+                <a:buNone/>
+                <a:tabLst/>
+              </a:pPr>
+              <a:endParaRPr kumimoji="0" lang="en-US" sz="1800" b="0" i="0" u="none" strike="noStrike" cap="none" normalizeH="0" baseline="0">
+                <a:ln>
+                  <a:noFill/>
+                </a:ln>
+                <a:solidFill>
+                  <a:schemeClr val="tx1"/>
+                </a:solidFill>
+                <a:effectLst/>
+                <a:latin typeface="Arial" charset="0"/>
+                <a:cs typeface="Arial" charset="0"/>
+              </a:endParaRPr>
+            </a:p>
+          </p:txBody>
+        </p:sp>
+      </p:grpSp>
+      <p:grpSp>
+        <p:nvGrpSpPr>
+          <p:cNvPr id="17" name="Group 16">
+            <a:extLst>
+              <a:ext uri="{FF2B5EF4-FFF2-40B4-BE49-F238E27FC236}">
+                <a16:creationId xmlns:a16="http://schemas.microsoft.com/office/drawing/2014/main" id="{1F205221-E6BB-984A-80FC-B768489ECF10}"/>
+              </a:ext>
+            </a:extLst>
+          </p:cNvPr>
+          <p:cNvGrpSpPr/>
+          <p:nvPr/>
+        </p:nvGrpSpPr>
+        <p:grpSpPr>
+          <a:xfrm>
+            <a:off x="27234750" y="13488174"/>
+            <a:ext cx="6532972" cy="6817128"/>
+            <a:chOff x="16026704" y="24108846"/>
+            <a:chExt cx="6532972" cy="6817128"/>
+          </a:xfrm>
+        </p:grpSpPr>
+        <p:grpSp>
+          <p:nvGrpSpPr>
+            <p:cNvPr id="18" name="Group 17">
+              <a:extLst>
+                <a:ext uri="{FF2B5EF4-FFF2-40B4-BE49-F238E27FC236}">
+                  <a16:creationId xmlns:a16="http://schemas.microsoft.com/office/drawing/2014/main" id="{3B0433B2-F60B-4A4E-9F6A-D5A3E2F8F7FF}"/>
+                </a:ext>
+              </a:extLst>
+            </p:cNvPr>
+            <p:cNvGrpSpPr/>
+            <p:nvPr/>
+          </p:nvGrpSpPr>
+          <p:grpSpPr>
+            <a:xfrm>
+              <a:off x="16026704" y="24108846"/>
+              <a:ext cx="6532972" cy="6817128"/>
+              <a:chOff x="16026704" y="24108846"/>
+              <a:chExt cx="6532972" cy="6817128"/>
+            </a:xfrm>
+          </p:grpSpPr>
+          <p:pic>
+            <p:nvPicPr>
+              <p:cNvPr id="20" name="Graphic 19">
+                <a:extLst>
+                  <a:ext uri="{FF2B5EF4-FFF2-40B4-BE49-F238E27FC236}">
+                    <a16:creationId xmlns:a16="http://schemas.microsoft.com/office/drawing/2014/main" id="{CFB3CE83-290B-E54C-965D-A1F022D2AD58}"/>
+                  </a:ext>
+                </a:extLst>
+              </p:cNvPr>
+              <p:cNvPicPr>
+                <a:picLocks noChangeAspect="1"/>
+              </p:cNvPicPr>
+              <p:nvPr/>
+            </p:nvPicPr>
+            <p:blipFill rotWithShape="1">
+              <a:blip r:embed="rId8">
+                <a:extLst>
+                  <a:ext uri="{28A0092B-C50C-407E-A947-70E740481C1C}">
+                    <a14:useLocalDpi xmlns:a14="http://schemas.microsoft.com/office/drawing/2010/main" val="0"/>
+                  </a:ext>
+                  <a:ext uri="{96DAC541-7B7A-43D3-8B79-37D633B846F1}">
+                    <asvg:svgBlip xmlns:asvg="http://schemas.microsoft.com/office/drawing/2016/SVG/main" r:embed="rId9"/>
+                  </a:ext>
+                </a:extLst>
+              </a:blip>
+              <a:srcRect l="10756" t="6660" r="2865" b="7584"/>
+              <a:stretch/>
+            </p:blipFill>
+            <p:spPr>
+              <a:xfrm>
+                <a:off x="16651056" y="24108846"/>
+                <a:ext cx="5908620" cy="6083352"/>
+              </a:xfrm>
+              <a:prstGeom prst="rect">
+                <a:avLst/>
+              </a:prstGeom>
+            </p:spPr>
+          </p:pic>
+          <p:sp>
+            <p:nvSpPr>
+              <p:cNvPr id="21" name="TextBox 20">
+                <a:extLst>
+                  <a:ext uri="{FF2B5EF4-FFF2-40B4-BE49-F238E27FC236}">
+                    <a16:creationId xmlns:a16="http://schemas.microsoft.com/office/drawing/2014/main" id="{89C31EF0-D61A-AC42-80D7-E4C2C70A86DD}"/>
+                  </a:ext>
+                </a:extLst>
+              </p:cNvPr>
+              <p:cNvSpPr txBox="1"/>
+              <p:nvPr/>
+            </p:nvSpPr>
+            <p:spPr>
+              <a:xfrm>
+                <a:off x="18654011" y="30218088"/>
+                <a:ext cx="1096775" cy="707886"/>
+              </a:xfrm>
+              <a:prstGeom prst="rect">
+                <a:avLst/>
+              </a:prstGeom>
+              <a:noFill/>
+            </p:spPr>
+            <p:txBody>
+              <a:bodyPr wrap="none" rtlCol="0">
+                <a:spAutoFit/>
+              </a:bodyPr>
+              <a:lstStyle/>
+              <a:p>
+                <a:r>
+                  <a:rPr lang="en-US" sz="4000" dirty="0"/>
+                  <a:t>Age</a:t>
+                </a:r>
+              </a:p>
+            </p:txBody>
+          </p:sp>
+          <p:sp>
+            <p:nvSpPr>
+              <p:cNvPr id="22" name="TextBox 21">
+                <a:extLst>
+                  <a:ext uri="{FF2B5EF4-FFF2-40B4-BE49-F238E27FC236}">
+                    <a16:creationId xmlns:a16="http://schemas.microsoft.com/office/drawing/2014/main" id="{CABAA111-FF13-5A4A-B69C-A3BEF7F2C2B3}"/>
+                  </a:ext>
+                </a:extLst>
+              </p:cNvPr>
+              <p:cNvSpPr txBox="1"/>
+              <p:nvPr/>
+            </p:nvSpPr>
+            <p:spPr>
+              <a:xfrm rot="16200000">
+                <a:off x="14608848" y="26568394"/>
+                <a:ext cx="3420629" cy="553998"/>
+              </a:xfrm>
+              <a:prstGeom prst="rect">
+                <a:avLst/>
+              </a:prstGeom>
+              <a:noFill/>
+            </p:spPr>
+            <p:txBody>
+              <a:bodyPr wrap="square" rtlCol="0">
+                <a:spAutoFit/>
+              </a:bodyPr>
+              <a:lstStyle/>
+              <a:p>
+                <a:pPr algn="ctr"/>
+                <a:r>
+                  <a:rPr lang="en-US" sz="1500" dirty="0"/>
+                  <a:t>Friend (Reciprocate &gt; Defect) &gt; Stranger (Reciprocate &gt; Defect)</a:t>
+                </a:r>
+              </a:p>
+            </p:txBody>
+          </p:sp>
+          <p:sp>
+            <p:nvSpPr>
+              <p:cNvPr id="23" name="TextBox 22">
+                <a:extLst>
+                  <a:ext uri="{FF2B5EF4-FFF2-40B4-BE49-F238E27FC236}">
+                    <a16:creationId xmlns:a16="http://schemas.microsoft.com/office/drawing/2014/main" id="{46916F5A-8012-EA4D-BA81-C47464F545AD}"/>
+                  </a:ext>
+                </a:extLst>
+              </p:cNvPr>
+              <p:cNvSpPr txBox="1"/>
+              <p:nvPr/>
+            </p:nvSpPr>
+            <p:spPr>
+              <a:xfrm>
+                <a:off x="16115961" y="24411311"/>
+                <a:ext cx="651983" cy="424006"/>
+              </a:xfrm>
+              <a:prstGeom prst="rect">
+                <a:avLst/>
+              </a:prstGeom>
+              <a:noFill/>
+            </p:spPr>
+            <p:txBody>
+              <a:bodyPr wrap="none" rtlCol="0">
+                <a:spAutoFit/>
+              </a:bodyPr>
+              <a:lstStyle/>
+              <a:p>
+                <a:r>
+                  <a:rPr lang="en-US" dirty="0"/>
+                  <a:t>400</a:t>
+                </a:r>
+              </a:p>
+            </p:txBody>
+          </p:sp>
+          <p:sp>
+            <p:nvSpPr>
+              <p:cNvPr id="24" name="TextBox 23">
+                <a:extLst>
+                  <a:ext uri="{FF2B5EF4-FFF2-40B4-BE49-F238E27FC236}">
+                    <a16:creationId xmlns:a16="http://schemas.microsoft.com/office/drawing/2014/main" id="{CDC5619E-A9D2-A346-9083-0B1EA81D8AF9}"/>
+                  </a:ext>
+                </a:extLst>
+              </p:cNvPr>
+              <p:cNvSpPr txBox="1"/>
+              <p:nvPr/>
+            </p:nvSpPr>
+            <p:spPr>
+              <a:xfrm>
+                <a:off x="16026704" y="28875791"/>
+                <a:ext cx="740088" cy="424006"/>
+              </a:xfrm>
+              <a:prstGeom prst="rect">
+                <a:avLst/>
+              </a:prstGeom>
+              <a:noFill/>
+            </p:spPr>
+            <p:txBody>
+              <a:bodyPr wrap="none" rtlCol="0">
+                <a:spAutoFit/>
+              </a:bodyPr>
+              <a:lstStyle/>
+              <a:p>
+                <a:r>
+                  <a:rPr lang="en-US" dirty="0"/>
+                  <a:t>-200</a:t>
+                </a:r>
+              </a:p>
+            </p:txBody>
+          </p:sp>
+          <p:sp>
+            <p:nvSpPr>
+              <p:cNvPr id="25" name="TextBox 24">
+                <a:extLst>
+                  <a:ext uri="{FF2B5EF4-FFF2-40B4-BE49-F238E27FC236}">
+                    <a16:creationId xmlns:a16="http://schemas.microsoft.com/office/drawing/2014/main" id="{2F936398-21FA-9248-BA6E-155315401154}"/>
+                  </a:ext>
+                </a:extLst>
+              </p:cNvPr>
+              <p:cNvSpPr txBox="1"/>
+              <p:nvPr/>
+            </p:nvSpPr>
+            <p:spPr>
+              <a:xfrm>
+                <a:off x="16666083" y="30175865"/>
+                <a:ext cx="505139" cy="424006"/>
+              </a:xfrm>
+              <a:prstGeom prst="rect">
+                <a:avLst/>
+              </a:prstGeom>
+              <a:noFill/>
+            </p:spPr>
+            <p:txBody>
+              <a:bodyPr wrap="none" rtlCol="0">
+                <a:spAutoFit/>
+              </a:bodyPr>
+              <a:lstStyle/>
+              <a:p>
+                <a:r>
+                  <a:rPr lang="en-US" dirty="0"/>
+                  <a:t>20</a:t>
+                </a:r>
+              </a:p>
+            </p:txBody>
+          </p:sp>
+          <p:sp>
+            <p:nvSpPr>
+              <p:cNvPr id="26" name="TextBox 25">
+                <a:extLst>
+                  <a:ext uri="{FF2B5EF4-FFF2-40B4-BE49-F238E27FC236}">
+                    <a16:creationId xmlns:a16="http://schemas.microsoft.com/office/drawing/2014/main" id="{4C84EDFF-F84E-1940-8B80-DC8DAD1049BE}"/>
+                  </a:ext>
+                </a:extLst>
+              </p:cNvPr>
+              <p:cNvSpPr txBox="1"/>
+              <p:nvPr/>
+            </p:nvSpPr>
+            <p:spPr>
+              <a:xfrm>
+                <a:off x="20818152" y="30175865"/>
+                <a:ext cx="505139" cy="424006"/>
+              </a:xfrm>
+              <a:prstGeom prst="rect">
+                <a:avLst/>
+              </a:prstGeom>
+              <a:noFill/>
+            </p:spPr>
+            <p:txBody>
+              <a:bodyPr wrap="none" rtlCol="0">
+                <a:spAutoFit/>
+              </a:bodyPr>
+              <a:lstStyle/>
+              <a:p>
+                <a:r>
+                  <a:rPr lang="en-US" dirty="0"/>
+                  <a:t>60</a:t>
+                </a:r>
+              </a:p>
+            </p:txBody>
+          </p:sp>
+        </p:grpSp>
+        <p:sp>
+          <p:nvSpPr>
+            <p:cNvPr id="19" name="Rectangle 18">
+              <a:extLst>
+                <a:ext uri="{FF2B5EF4-FFF2-40B4-BE49-F238E27FC236}">
+                  <a16:creationId xmlns:a16="http://schemas.microsoft.com/office/drawing/2014/main" id="{47323B76-BAFB-8D40-86EB-D23726D85EA0}"/>
+                </a:ext>
+              </a:extLst>
+            </p:cNvPr>
+            <p:cNvSpPr/>
+            <p:nvPr/>
+          </p:nvSpPr>
+          <p:spPr bwMode="auto">
+            <a:xfrm>
+              <a:off x="16871673" y="24149410"/>
+              <a:ext cx="5627696" cy="5921353"/>
+            </a:xfrm>
+            <a:prstGeom prst="rect">
+              <a:avLst/>
+            </a:prstGeom>
+            <a:noFill/>
+            <a:ln w="38100" cap="flat" cmpd="sng" algn="ctr">
+              <a:solidFill>
+                <a:schemeClr val="tx1"/>
+              </a:solidFill>
+              <a:prstDash val="solid"/>
+              <a:round/>
+              <a:headEnd type="none" w="med" len="med"/>
+              <a:tailEnd type="none" w="med" len="med"/>
+            </a:ln>
+            <a:effectLst/>
+          </p:spPr>
+          <p:txBody>
+            <a:bodyPr vert="horz" wrap="square" lIns="91440" tIns="45720" rIns="91440" bIns="45720" numCol="1" rtlCol="0" anchor="t" anchorCtr="0" compatLnSpc="1">
+              <a:prstTxWarp prst="textNoShape">
+                <a:avLst/>
+              </a:prstTxWarp>
+            </a:bodyPr>
+            <a:lstStyle/>
+            <a:p>
+              <a:pPr marL="0" marR="0" indent="0" algn="l" defTabSz="4389438" rtl="0" eaLnBrk="1" fontAlgn="base" latinLnBrk="0" hangingPunct="1">
+                <a:lnSpc>
+                  <a:spcPct val="100000"/>
+                </a:lnSpc>
+                <a:spcBef>
+                  <a:spcPct val="0"/>
+                </a:spcBef>
+                <a:spcAft>
+                  <a:spcPct val="0"/>
+                </a:spcAft>
+                <a:buClrTx/>
+                <a:buSzTx/>
+                <a:buFontTx/>
+                <a:buNone/>
+                <a:tabLst/>
+              </a:pPr>
+              <a:endParaRPr kumimoji="0" lang="en-US" sz="1800" b="0" i="0" u="none" strike="noStrike" cap="none" normalizeH="0" baseline="0">
+                <a:ln>
+                  <a:noFill/>
+                </a:ln>
+                <a:solidFill>
+                  <a:schemeClr val="tx1"/>
+                </a:solidFill>
+                <a:effectLst/>
+                <a:latin typeface="Arial" charset="0"/>
+                <a:cs typeface="Arial" charset="0"/>
+              </a:endParaRPr>
+            </a:p>
+          </p:txBody>
+        </p:sp>
+      </p:grpSp>
     </p:spTree>
     <p:extLst>
       <p:ext uri="{BB962C8B-B14F-4D97-AF65-F5344CB8AC3E}">

--- a/SFN/2023_SFN_trust_current.pptx
+++ b/SFN/2023_SFN_trust_current.pptx
@@ -6001,7 +6001,7 @@
           <a:p>
             <a:pPr algn="ctr"/>
             <a:r>
-              <a:rPr lang="en-US" altLang="en-US" sz="4250" dirty="0">
+              <a:rPr lang="en-US" altLang="en-US" sz="4250" b="1" dirty="0">
                 <a:solidFill>
                   <a:srgbClr val="C00000"/>
                 </a:solidFill>
@@ -6010,7 +6010,7 @@
               </a:rPr>
               <a:t>5. Age Related Differences in Partner Response </a:t>
             </a:r>
-            <a:endParaRPr lang="en-US" altLang="en-US" sz="4250" dirty="0">
+            <a:endParaRPr lang="en-US" altLang="en-US" sz="4250" b="1" dirty="0">
               <a:solidFill>
                 <a:srgbClr val="C00000"/>
               </a:solidFill>
@@ -6326,7 +6326,7 @@
                 </a:solidFill>
                 <a:latin typeface="Trebuchet MS" panose="020B0603020202020204" pitchFamily="34" charset="0"/>
               </a:rPr>
-              <a:t>4. Age Differences in Ventral Striatum Responses? </a:t>
+              <a:t>4. Age-Related Differences in Striatal Response? </a:t>
             </a:r>
           </a:p>
         </p:txBody>
@@ -6345,8 +6345,8 @@
         </p:nvSpPr>
         <p:spPr>
           <a:xfrm>
-            <a:off x="15288515" y="31054326"/>
-            <a:ext cx="14650695" cy="1077218"/>
+            <a:off x="15606227" y="30861297"/>
+            <a:ext cx="14650695" cy="1569660"/>
           </a:xfrm>
           <a:prstGeom prst="rect">
             <a:avLst/>
@@ -6365,7 +6365,7 @@
                 <a:latin typeface="Helvetica"/>
                 <a:ea typeface="MS PGothic"/>
               </a:rPr>
-              <a:t>We found activation in the VS when participants were presented with a reciprocate outcome as opposed to a defect outcome.</a:t>
+              <a:t>We found activation in the VS when participants were presented with a reciprocate outcome as opposed to a defect outcome, however, there was no significant interaction with age.  </a:t>
             </a:r>
           </a:p>
         </p:txBody>
@@ -7132,7 +7132,7 @@
         </p:nvGrpSpPr>
         <p:grpSpPr>
           <a:xfrm>
-            <a:off x="15818565" y="23900244"/>
+            <a:off x="15922551" y="24296197"/>
             <a:ext cx="6012596" cy="5358384"/>
             <a:chOff x="14976740" y="15406812"/>
             <a:chExt cx="6810930" cy="6071098"/>
@@ -7801,8 +7801,8 @@
           </p:nvSpPr>
           <p:spPr>
             <a:xfrm>
-              <a:off x="238017" y="31398445"/>
-              <a:ext cx="14865736" cy="1015663"/>
+              <a:off x="238017" y="31517716"/>
+              <a:ext cx="14865736" cy="830997"/>
             </a:xfrm>
             <a:prstGeom prst="rect">
               <a:avLst/>
@@ -7810,51 +7810,55 @@
             <a:noFill/>
           </p:spPr>
           <p:txBody>
-            <a:bodyPr wrap="none" rtlCol="0">
+            <a:bodyPr wrap="square" rtlCol="0">
               <a:spAutoFit/>
             </a:bodyPr>
             <a:lstStyle/>
             <a:p>
               <a:pPr algn="ctr"/>
               <a:r>
-                <a:rPr lang="en-US" sz="2900" b="0" i="0" dirty="0">
+                <a:rPr lang="en-US" sz="2400" b="0" i="0" dirty="0">
                   <a:effectLst/>
-                  <a:latin typeface="Slack-Lato"/>
+                  <a:latin typeface="Helvetica" pitchFamily="2" charset="0"/>
                 </a:rPr>
                 <a:t>This study was supported by National Institutes of Health grant RF1-AG67011 (David V. Smith).</a:t>
               </a:r>
               <a:br>
-                <a:rPr lang="en-US" sz="2900" dirty="0"/>
+                <a:rPr lang="en-US" sz="2400" dirty="0">
+                  <a:latin typeface="Helvetica" pitchFamily="2" charset="0"/>
+                </a:rPr>
               </a:br>
               <a:r>
-                <a:rPr lang="en-US" sz="2900" b="0" i="0" dirty="0">
+                <a:rPr lang="en-US" sz="2400" b="0" i="0" dirty="0">
                   <a:effectLst/>
-                  <a:latin typeface="Slack-Lato"/>
+                  <a:latin typeface="Helvetica" pitchFamily="2" charset="0"/>
                 </a:rPr>
                 <a:t>Contact information: </a:t>
               </a:r>
               <a:r>
-                <a:rPr lang="en-US" sz="2900" b="0" i="0" dirty="0" err="1">
+                <a:rPr lang="en-US" sz="2400" b="0" i="0" dirty="0" err="1">
                   <a:effectLst/>
-                  <a:latin typeface="Slack-Lato"/>
+                  <a:latin typeface="Helvetica" pitchFamily="2" charset="0"/>
                 </a:rPr>
                 <a:t>Avi.Dachs@temple.edu</a:t>
               </a:r>
               <a:r>
-                <a:rPr lang="en-US" sz="2900" b="0" i="0" dirty="0">
+                <a:rPr lang="en-US" sz="2400" b="0" i="0" dirty="0">
                   <a:effectLst/>
-                  <a:latin typeface="Slack-Lato"/>
+                  <a:latin typeface="Helvetica" pitchFamily="2" charset="0"/>
                 </a:rPr>
                 <a:t>, </a:t>
               </a:r>
               <a:r>
-                <a:rPr lang="en-US" sz="2900" b="0" i="0" dirty="0" err="1">
+                <a:rPr lang="en-US" sz="2400" b="0" i="0" dirty="0" err="1">
                   <a:effectLst/>
-                  <a:latin typeface="Slack-Lato"/>
+                  <a:latin typeface="Helvetica" pitchFamily="2" charset="0"/>
                 </a:rPr>
                 <a:t>Cooper.Sharp@temple.edu</a:t>
               </a:r>
-              <a:endParaRPr lang="en-US" sz="2900" dirty="0"/>
+              <a:endParaRPr lang="en-US" sz="2400" dirty="0">
+                <a:latin typeface="Helvetica" pitchFamily="2" charset="0"/>
+              </a:endParaRPr>
             </a:p>
           </p:txBody>
         </p:sp>
@@ -8209,7 +8213,7 @@
         </p:nvSpPr>
         <p:spPr>
           <a:xfrm>
-            <a:off x="30838648" y="22977323"/>
+            <a:off x="43891200" y="12531221"/>
             <a:ext cx="12062344" cy="1015663"/>
           </a:xfrm>
           <a:prstGeom prst="rect">
@@ -8596,7 +8600,7 @@
           </p:nvSpPr>
           <p:spPr>
             <a:xfrm>
-              <a:off x="17903802" y="8664303"/>
+              <a:off x="18105047" y="8664303"/>
               <a:ext cx="1069524" cy="369332"/>
             </a:xfrm>
             <a:prstGeom prst="rect">
@@ -10254,10 +10258,10 @@
         </p:nvGrpSpPr>
         <p:grpSpPr>
           <a:xfrm>
-            <a:off x="30819542" y="17309793"/>
-            <a:ext cx="4527522" cy="4489996"/>
-            <a:chOff x="30483851" y="13427301"/>
-            <a:chExt cx="6579830" cy="7050823"/>
+            <a:off x="30912367" y="15288689"/>
+            <a:ext cx="4003957" cy="3793200"/>
+            <a:chOff x="30175830" y="13427301"/>
+            <a:chExt cx="6887851" cy="7050823"/>
           </a:xfrm>
         </p:grpSpPr>
         <p:pic>
@@ -10310,8 +10314,8 @@
           </p:nvSpPr>
           <p:spPr>
             <a:xfrm>
-              <a:off x="30697537" y="13427301"/>
-              <a:ext cx="1827439" cy="987985"/>
+              <a:off x="30175830" y="13427301"/>
+              <a:ext cx="1827438" cy="987985"/>
             </a:xfrm>
             <a:prstGeom prst="rect">
               <a:avLst/>
@@ -10386,10 +10390,10 @@
         </p:nvGrpSpPr>
         <p:grpSpPr>
           <a:xfrm>
-            <a:off x="30900627" y="6464838"/>
-            <a:ext cx="4333451" cy="4397738"/>
-            <a:chOff x="30936691" y="4524097"/>
-            <a:chExt cx="5919174" cy="6592361"/>
+            <a:off x="30892788" y="7424174"/>
+            <a:ext cx="3962327" cy="4113783"/>
+            <a:chOff x="30936691" y="4266720"/>
+            <a:chExt cx="5919174" cy="6849738"/>
           </a:xfrm>
         </p:grpSpPr>
         <p:pic>
@@ -10442,7 +10446,7 @@
           </p:nvSpPr>
           <p:spPr>
             <a:xfrm>
-              <a:off x="30952727" y="4524097"/>
+              <a:off x="30952728" y="4266720"/>
               <a:ext cx="1539203" cy="707886"/>
             </a:xfrm>
             <a:prstGeom prst="rect">
@@ -10518,8 +10522,8 @@
         </p:nvSpPr>
         <p:spPr>
           <a:xfrm>
-            <a:off x="31019416" y="4697710"/>
-            <a:ext cx="9097362" cy="584775"/>
+            <a:off x="31126040" y="5975181"/>
+            <a:ext cx="4272148" cy="1077218"/>
           </a:xfrm>
           <a:prstGeom prst="rect">
             <a:avLst/>
@@ -10566,8 +10570,8 @@
         </p:nvSpPr>
         <p:spPr>
           <a:xfrm>
-            <a:off x="34641901" y="15025102"/>
-            <a:ext cx="9086342" cy="584775"/>
+            <a:off x="31089809" y="13842164"/>
+            <a:ext cx="4801133" cy="1077218"/>
           </a:xfrm>
           <a:prstGeom prst="rect">
             <a:avLst/>
@@ -10585,7 +10589,7 @@
                 <a:effectLst/>
                 <a:latin typeface="Helvetica" pitchFamily="2" charset="0"/>
               </a:rPr>
-              <a:t>Friend Reciprocating &gt; Computer Reciprocating</a:t>
+              <a:t>Friend Reciprocate &gt; Computer Reciprocate</a:t>
             </a:r>
             <a:endParaRPr lang="en-US" sz="3200" i="0" dirty="0">
               <a:effectLst/>
@@ -10608,7 +10612,7 @@
         </p:nvSpPr>
         <p:spPr>
           <a:xfrm>
-            <a:off x="30959587" y="12969017"/>
+            <a:off x="43408931" y="11102423"/>
             <a:ext cx="12062344" cy="1015663"/>
           </a:xfrm>
           <a:prstGeom prst="rect">
@@ -10647,7 +10651,7 @@
         </p:nvGrpSpPr>
         <p:grpSpPr>
           <a:xfrm>
-            <a:off x="22241892" y="22389514"/>
+            <a:off x="22227608" y="22377639"/>
             <a:ext cx="7672050" cy="8491864"/>
             <a:chOff x="23053763" y="15328939"/>
             <a:chExt cx="6729801" cy="7219447"/>
@@ -11028,8 +11032,8 @@
         </p:nvGrpSpPr>
         <p:grpSpPr>
           <a:xfrm>
-            <a:off x="35440249" y="15080821"/>
-            <a:ext cx="7581682" cy="8191817"/>
+            <a:off x="35263511" y="11894668"/>
+            <a:ext cx="7923930" cy="8561607"/>
             <a:chOff x="37324753" y="15097157"/>
             <a:chExt cx="6030525" cy="6738219"/>
           </a:xfrm>
@@ -11392,10 +11396,10 @@
         </p:nvGrpSpPr>
         <p:grpSpPr>
           <a:xfrm>
-            <a:off x="35322155" y="5111358"/>
-            <a:ext cx="8025077" cy="7927695"/>
+            <a:off x="35398188" y="4514399"/>
+            <a:ext cx="8025077" cy="7764103"/>
             <a:chOff x="37564868" y="5920531"/>
-            <a:chExt cx="6139033" cy="6439521"/>
+            <a:chExt cx="6139033" cy="6306638"/>
           </a:xfrm>
         </p:grpSpPr>
         <p:sp>
@@ -11553,7 +11557,7 @@
           <p:spPr>
             <a:xfrm>
               <a:off x="39886352" y="11652166"/>
-              <a:ext cx="1096775" cy="707886"/>
+              <a:ext cx="141316" cy="575003"/>
             </a:xfrm>
             <a:prstGeom prst="rect">
               <a:avLst/>
@@ -11566,10 +11570,7 @@
             </a:bodyPr>
             <a:lstStyle/>
             <a:p>
-              <a:r>
-                <a:rPr lang="en-US" sz="4000" dirty="0"/>
-                <a:t>Age</a:t>
-              </a:r>
+              <a:endParaRPr lang="en-US" sz="4000" dirty="0"/>
             </a:p>
           </p:txBody>
         </p:sp>
@@ -11909,6 +11910,136 @@
           </a:extLst>
         </p:spPr>
       </p:pic>
+      <p:sp>
+        <p:nvSpPr>
+          <p:cNvPr id="155" name="Rectangle 154">
+            <a:extLst>
+              <a:ext uri="{FF2B5EF4-FFF2-40B4-BE49-F238E27FC236}">
+                <a16:creationId xmlns:a16="http://schemas.microsoft.com/office/drawing/2014/main" id="{8F908185-E22F-CB44-8E95-78E9235C0525}"/>
+              </a:ext>
+            </a:extLst>
+          </p:cNvPr>
+          <p:cNvSpPr/>
+          <p:nvPr/>
+        </p:nvSpPr>
+        <p:spPr>
+          <a:xfrm>
+            <a:off x="30813844" y="20893442"/>
+            <a:ext cx="12914399" cy="3200876"/>
+          </a:xfrm>
+          <a:prstGeom prst="rect">
+            <a:avLst/>
+          </a:prstGeom>
+        </p:spPr>
+        <p:txBody>
+          <a:bodyPr wrap="square" lIns="91440" tIns="45720" rIns="91440" bIns="45720" anchor="t">
+            <a:spAutoFit/>
+          </a:bodyPr>
+          <a:lstStyle/>
+          <a:p>
+            <a:pPr marL="457200" indent="-457200">
+              <a:spcBef>
+                <a:spcPts val="360"/>
+              </a:spcBef>
+              <a:spcAft>
+                <a:spcPts val="0"/>
+              </a:spcAft>
+              <a:buFont typeface="Arial" panose="020B0604020202020204" pitchFamily="34" charset="0"/>
+              <a:buChar char="•"/>
+            </a:pPr>
+            <a:r>
+              <a:rPr lang="en-US" sz="3200" dirty="0">
+                <a:latin typeface="Helvetica"/>
+                <a:ea typeface="MS PGothic"/>
+                <a:cs typeface="Helvetica"/>
+              </a:rPr>
+              <a:t>We found that friend defecting resulted in increased </a:t>
+            </a:r>
+            <a:r>
+              <a:rPr lang="en-US" sz="3200" dirty="0" err="1">
+                <a:latin typeface="Helvetica"/>
+                <a:ea typeface="MS PGothic"/>
+                <a:cs typeface="Helvetica"/>
+              </a:rPr>
+              <a:t>dlPFC</a:t>
+            </a:r>
+            <a:r>
+              <a:rPr lang="en-US" sz="3200" dirty="0">
+                <a:latin typeface="Helvetica"/>
+                <a:ea typeface="MS PGothic"/>
+                <a:cs typeface="Helvetica"/>
+              </a:rPr>
+              <a:t> activation in older adults compared to younger adults. </a:t>
+            </a:r>
+          </a:p>
+          <a:p>
+            <a:pPr>
+              <a:spcBef>
+                <a:spcPts val="360"/>
+              </a:spcBef>
+              <a:spcAft>
+                <a:spcPts val="0"/>
+              </a:spcAft>
+            </a:pPr>
+            <a:endParaRPr lang="en-US" sz="3200" dirty="0">
+              <a:latin typeface="Helvetica"/>
+              <a:ea typeface="MS PGothic"/>
+              <a:cs typeface="Helvetica"/>
+            </a:endParaRPr>
+          </a:p>
+          <a:p>
+            <a:pPr marL="457200" indent="-457200">
+              <a:spcBef>
+                <a:spcPts val="360"/>
+              </a:spcBef>
+              <a:spcAft>
+                <a:spcPts val="0"/>
+              </a:spcAft>
+              <a:buFont typeface="Arial" panose="020B0604020202020204" pitchFamily="34" charset="0"/>
+              <a:buChar char="•"/>
+            </a:pPr>
+            <a:r>
+              <a:rPr lang="en-US" sz="3200" dirty="0">
+                <a:latin typeface="Helvetica"/>
+                <a:ea typeface="MS PGothic"/>
+                <a:cs typeface="Helvetica"/>
+              </a:rPr>
+              <a:t>We also found that friend reciprocating resulted in reduced </a:t>
+            </a:r>
+            <a:r>
+              <a:rPr lang="en-US" sz="3200" dirty="0" err="1">
+                <a:latin typeface="Helvetica"/>
+                <a:ea typeface="MS PGothic"/>
+                <a:cs typeface="Helvetica"/>
+              </a:rPr>
+              <a:t>mPFC</a:t>
+            </a:r>
+            <a:r>
+              <a:rPr lang="en-US" sz="3200" dirty="0">
+                <a:latin typeface="Helvetica"/>
+                <a:ea typeface="MS PGothic"/>
+                <a:cs typeface="Helvetica"/>
+              </a:rPr>
+              <a:t> activation in older adults compared to younger adults.</a:t>
+            </a:r>
+          </a:p>
+          <a:p>
+            <a:pPr algn="ctr">
+              <a:spcBef>
+                <a:spcPts val="360"/>
+              </a:spcBef>
+              <a:spcAft>
+                <a:spcPts val="0"/>
+              </a:spcAft>
+            </a:pPr>
+            <a:endParaRPr lang="en-US" sz="3200" dirty="0">
+              <a:latin typeface="Helvetica"/>
+              <a:ea typeface="MS PGothic"/>
+              <a:cs typeface="Helvetica"/>
+            </a:endParaRPr>
+          </a:p>
+        </p:txBody>
+      </p:sp>
     </p:spTree>
   </p:cSld>
   <p:clrMapOvr>
